--- a/eda week 3/Khalid Al Dosari - EDA Project Presentation.pptx
+++ b/eda week 3/Khalid Al Dosari - EDA Project Presentation.pptx
@@ -514,7 +514,7 @@
           <a:p>
             <a:r>
               <a:rPr lang="en-US" dirty="0"/>
-              <a:t>New York City Airbnb — 48,895 listings across all five boroughs, snapshot from 2019. My question was simple: what actually sets the price of a listing? I'll spend the first half on the data quality problems I had to fix before I could trust anything, and the second half on what the cleaned data showed.</a:t>
+              <a:t>New York City Airbnb. 48,895 listings across all five boroughs from 2019. My question was simple. What actually sets the price of a listing? The first half covers the data quality problems I had to fix before I could trust anything. The second half covers what the cleaned data showed.</a:t>
             </a:r>
             <a:endParaRPr lang="en-US" dirty="0"/>
           </a:p>
@@ -602,7 +602,7 @@
           <a:p>
             <a:r>
               <a:rPr lang="en-US" dirty="0"/>
-              <a:t>221 neighbourhoods, but listings pile into a handful. Practically that means it's high cardinality and imbalanced — most neighbourhoods have too few listings to estimate a price, so you group the tail or fall back to borough.</a:t>
+              <a:t>There are 221 neighbourhoods but listings pile into a handful. Practically that means high cardinality and imbalance. Most neighbourhoods have too few listings to estimate a price. So you group the tail or fall back to borough.</a:t>
             </a:r>
             <a:endParaRPr lang="en-US" dirty="0"/>
           </a:p>
@@ -690,7 +690,7 @@
           <a:p>
             <a:r>
               <a:rPr lang="en-US" dirty="0"/>
-              <a:t>Pulling it together. Location and room type set the price, and nothing else comes close. The median is the honest number to quote, not the mean. Activity metrics are not a pricing signal at all. And two structural findings worth flagging: a fifth of all listings have never been reviewed, and professional operators running hundreds of units now sit alongside the median host, who runs exactly one.</a:t>
+              <a:t>Pulling it together. Location and room type set the price and nothing else comes close. The median is the honest number to quote rather than the mean. Activity metrics are not a pricing signal at all. Two structural findings are worth flagging. A fifth of all listings have never been reviewed. And professional operators running hundreds of units now sit alongside the median host who runs exactly one.</a:t>
             </a:r>
             <a:endParaRPr lang="en-US" dirty="0"/>
           </a:p>
@@ -778,7 +778,7 @@
           <a:p>
             <a:r>
               <a:rPr lang="en-US" dirty="0"/>
-              <a:t>Five recommendations, each traceable to a finding. Pricing guidance drops the useless features. The badge closes the review gap. The pause toggle fixes a behaviour the data caught. And duplicate flagging closes the gap that let 217 through.</a:t>
+              <a:t>Five recommendations and each one is traceable to a finding. Pricing guidance drops the useless features. The badge closes the review gap. The pause toggle fixes a behaviour the data caught. Duplicate flagging closes the gap that let 217 through.</a:t>
             </a:r>
             <a:endParaRPr lang="en-US" dirty="0"/>
           </a:p>
@@ -866,7 +866,7 @@
           <a:p>
             <a:r>
               <a:rPr lang="en-US" dirty="0"/>
-              <a:t>Three takeaways. Hardest was the duplicates — no key, so I had to define what the same listing means. Best judgement was keeping the impossible minimum_nights, because reading the names turned dirt into a finding. Thank you.</a:t>
+              <a:t>Three takeaways. The duplicates were hardest because there was no key. I had to define what counts as the same listing. My best judgement was keeping the impossible minimum nights values. Reading the listing names turned dirt into a finding. Thank you.</a:t>
             </a:r>
             <a:endParaRPr lang="en-US" dirty="0"/>
           </a:p>
@@ -954,7 +954,7 @@
           <a:p>
             <a:r>
               <a:rPr lang="en-US" dirty="0"/>
-              <a:t>Each row is one listing — the host, the location, the price, the review history. Ten numeric columns, but two of them, id and host_id, are identifiers rather than measurements. There's no target variable; this is an unlabelled market snapshot, and price is what you'd predict if you modelled it. One flag up front: one in five listings has never been reviewed at all.</a:t>
+              <a:t>Each row is one listing. It carries the host and the location and the price and the review history. Ten numeric columns. Two of them are identifiers rather than measurements. There is no target variable here. This is an unlabelled market snapshot. Price is what you would predict if you modelled it. One flag up front. A fifth of listings have never been reviewed.</a:t>
             </a:r>
             <a:endParaRPr lang="en-US" dirty="0"/>
           </a:p>
@@ -1042,7 +1042,7 @@
           <a:p>
             <a:r>
               <a:rPr lang="en-US" dirty="0"/>
-              <a:t>Six problems, six decisions. Two are worth pausing on. Number two — pandas said zero duplicates, which only means no two rows are identical across all sixteen columns. Define a duplicate the way the business would, same host at the same coordinates at the same price, and 217 appear. And number six — those 1,250-night minimums are not errors. The listing names say things like 'not available'. Hosts are faking a pause button, so I capped rather than deleted. The value is a signal about host behaviour, not dirt.</a:t>
+              <a:t>Six problems and six decisions. Two are worth pausing on. Number two. Pandas said zero duplicates. That only means no two rows are identical across all sixteen columns. Define a duplicate the way the business would. Same host at the same coordinates at the same price. Then 217 appear. Number six. Those 1,250 night minimums are not errors. The listing names say things like not available. Hosts are faking a pause button. So I capped rather than deleted. The value is a signal about host behaviour and not dirt.</a:t>
             </a:r>
             <a:endParaRPr lang="en-US" dirty="0"/>
           </a:p>
@@ -1130,7 +1130,7 @@
           <a:p>
             <a:r>
               <a:rPr lang="en-US" dirty="0"/>
-              <a:t>Every column except availability is full of outliers. But an outlier is not the same as an error. A ten thousand dollar penthouse is a real listing. A host with 327 properties is a real business. So I kept all of them and capped only minimum_nights, because that was the one case where the value was logically impossible rather than merely extreme.</a:t>
+              <a:t>Every column except availability is full of outliers. But an outlier is not the same as an error. A ten thousand dollar penthouse is a real listing. A host with 327 properties is a real business. So I kept all of them and capped only minimum nights. That was the one case where the value was logically impossible rather than merely extreme.</a:t>
             </a:r>
             <a:endParaRPr lang="en-US" dirty="0"/>
           </a:p>
@@ -1218,7 +1218,7 @@
           <a:p>
             <a:r>
               <a:rPr lang="en-US" dirty="0"/>
-              <a:t>Every distribution leans right. The gap between the mean of 152 and the median of 105 is the whole story — quoting the average overstates what a normal guest actually pays by nearly fifty dollars. The median is the honest number. Availability is the interesting exception: it's bimodal, clustering at zero days and at 365. Hosts are either fully committed or effectively dormant, with very little in between.</a:t>
+              <a:t>Every distribution leans right. The gap between the mean of 152 and the median of 105 is the whole story. Quoting the average overstates what a normal guest actually pays by nearly fifty dollars. The median is the honest number. Availability is the interesting exception. It is bimodal and clusters at zero days and at 365. Hosts are either fully committed or effectively dormant with very little in between.</a:t>
             </a:r>
             <a:endParaRPr lang="en-US" dirty="0"/>
           </a:p>
@@ -1306,7 +1306,7 @@
           <a:p>
             <a:r>
               <a:rPr lang="en-US" dirty="0"/>
-              <a:t>Both categorical columns are imbalanced. Shared rooms are two percent of supply. Manhattan and Brooklyn together are eighty-five percent. And they interact — Manhattan skews to entire homes, outer boroughs to private rooms.</a:t>
+              <a:t>Both categorical columns are imbalanced. Shared rooms are two percent of supply. Manhattan and Brooklyn together are eighty five percent. And they interact. Manhattan skews to entire homes while the outer boroughs skew to private rooms.</a:t>
             </a:r>
             <a:endParaRPr lang="en-US" dirty="0"/>
           </a:p>
@@ -1394,7 +1394,7 @@
           <a:p>
             <a:r>
               <a:rPr lang="en-US" dirty="0"/>
-              <a:t>This was the most interesting finding for me. I expected review volume or availability to move with price. They don't — every correlation with price is under 0.08 in absolute terms, which is effectively zero, and the scatter plots confirm it with no visible structure. Price in this market is simply not explained by how busy a listing is. It's location and room type.</a:t>
+              <a:t>This was the most interesting finding for me. I expected review volume or availability to move with price. They do not. Every correlation with price is under 0.08 in absolute terms and that is effectively zero. The scatter plots confirm it with no visible structure. Price in this market is simply not explained by how busy a listing is. It is location and room type.</a:t>
             </a:r>
             <a:endParaRPr lang="en-US" dirty="0"/>
           </a:p>
@@ -1482,7 +1482,7 @@
           <a:p>
             <a:r>
               <a:rPr lang="en-US" dirty="0"/>
-              <a:t>Price capped at a thousand on the left, otherwise a few luxury listings flatten everything. Most of the market is under two hundred. Split by borough on the right — Manhattan at 196 against the Bronx at 88.</a:t>
+              <a:t>Price is capped at a thousand on the left. Otherwise a few luxury listings flatten everything. Most of the market sits under two hundred. The right hand chart splits by borough. Manhattan at 196 against the Bronx at 88.</a:t>
             </a:r>
             <a:endParaRPr lang="en-US" dirty="0"/>
           </a:p>
@@ -1570,7 +1570,7 @@
           <a:p>
             <a:r>
               <a:rPr lang="en-US" dirty="0"/>
-              <a:t>Room type is the sharpest divide in the data. An entire home is 211, a private room 90. Two and a half times over for privacy. On the right, a negative result — reviews and availability are unrelated.</a:t>
+              <a:t>Room type is the sharpest divide in the data. An entire home is 211 and a private room is 90. Two and a half times over for privacy. The right hand chart is a negative result. Reviews and availability are unrelated.</a:t>
             </a:r>
             <a:endParaRPr lang="en-US" dirty="0"/>
           </a:p>
@@ -1999,7 +1999,57 @@
       </p:sp>
       <p:sp>
         <p:nvSpPr>
-          <p:cNvPr id="4" name="Text 2"/>
+          <p:cNvPr id="4" name="Shape 2"/>
+          <p:cNvSpPr/>
+          <p:nvPr/>
+        </p:nvSpPr>
+        <p:spPr>
+          <a:xfrm>
+            <a:off x="10104120" y="2788920"/>
+            <a:ext cx="457200" cy="457200"/>
+          </a:xfrm>
+          <a:prstGeom prst="ellipse">
+            <a:avLst/>
+          </a:prstGeom>
+          <a:solidFill>
+            <a:srgbClr val="57E3D8"/>
+          </a:solidFill>
+          <a:ln w="12700">
+            <a:solidFill>
+              <a:srgbClr val="333333"/>
+            </a:solidFill>
+            <a:prstDash val="solid"/>
+          </a:ln>
+        </p:spPr>
+      </p:sp>
+      <p:sp>
+        <p:nvSpPr>
+          <p:cNvPr id="5" name="Shape 3"/>
+          <p:cNvSpPr/>
+          <p:nvPr/>
+        </p:nvSpPr>
+        <p:spPr>
+          <a:xfrm>
+            <a:off x="10927080" y="3310128"/>
+            <a:ext cx="274320" cy="274320"/>
+          </a:xfrm>
+          <a:prstGeom prst="ellipse">
+            <a:avLst/>
+          </a:prstGeom>
+          <a:solidFill>
+            <a:srgbClr val="F4A664"/>
+          </a:solidFill>
+          <a:ln w="12700">
+            <a:solidFill>
+              <a:srgbClr val="333333"/>
+            </a:solidFill>
+            <a:prstDash val="solid"/>
+          </a:ln>
+        </p:spPr>
+      </p:sp>
+      <p:sp>
+        <p:nvSpPr>
+          <p:cNvPr id="6" name="Text 4"/>
           <p:cNvSpPr/>
           <p:nvPr/>
         </p:nvSpPr>
@@ -2026,9 +2076,9 @@
                 <a:solidFill>
                   <a:srgbClr val="9B78F7"/>
                 </a:solidFill>
-                <a:latin typeface="Calibri" pitchFamily="34" charset="0"/>
-                <a:ea typeface="Calibri" pitchFamily="34" charset="-122"/>
-                <a:cs typeface="Calibri" pitchFamily="34" charset="-120"/>
+                <a:latin typeface="IBM Plex Sans" pitchFamily="34" charset="0"/>
+                <a:ea typeface="IBM Plex Sans" pitchFamily="34" charset="-122"/>
+                <a:cs typeface="IBM Plex Sans" pitchFamily="34" charset="-120"/>
               </a:rPr>
               <a:t>EXPLORATORY DATA ANALYSIS</a:t>
             </a:r>
@@ -2038,7 +2088,7 @@
       </p:sp>
       <p:sp>
         <p:nvSpPr>
-          <p:cNvPr id="5" name="Text 3"/>
+          <p:cNvPr id="7" name="Text 5"/>
           <p:cNvSpPr/>
           <p:nvPr/>
         </p:nvSpPr>
@@ -2064,17 +2114,17 @@
               <a:buNone/>
             </a:pPr>
             <a:r>
-              <a:rPr lang="en-US" sz="4800" b="1" dirty="0">
+              <a:rPr lang="en-US" sz="4600" b="1" dirty="0">
                 <a:solidFill>
                   <a:srgbClr val="522CBA"/>
                 </a:solidFill>
-                <a:latin typeface="Cambria" pitchFamily="34" charset="0"/>
-                <a:ea typeface="Cambria" pitchFamily="34" charset="-122"/>
-                <a:cs typeface="Cambria" pitchFamily="34" charset="-120"/>
+                <a:latin typeface="IBM Plex Sans" pitchFamily="34" charset="0"/>
+                <a:ea typeface="IBM Plex Sans" pitchFamily="34" charset="-122"/>
+                <a:cs typeface="IBM Plex Sans" pitchFamily="34" charset="-120"/>
               </a:rPr>
               <a:t>New York City</a:t>
             </a:r>
-            <a:endParaRPr lang="en-US" sz="4800" dirty="0"/>
+            <a:endParaRPr lang="en-US" sz="4600" dirty="0"/>
           </a:p>
           <a:p>
             <a:pPr indent="0" marL="0">
@@ -2084,29 +2134,29 @@
               <a:buNone/>
             </a:pPr>
             <a:r>
-              <a:rPr lang="en-US" sz="4800" b="1" dirty="0">
+              <a:rPr lang="en-US" sz="4600" b="1" dirty="0">
                 <a:solidFill>
                   <a:srgbClr val="522CBA"/>
                 </a:solidFill>
-                <a:latin typeface="Cambria" pitchFamily="34" charset="0"/>
-                <a:ea typeface="Cambria" pitchFamily="34" charset="-122"/>
-                <a:cs typeface="Cambria" pitchFamily="34" charset="-120"/>
+                <a:latin typeface="IBM Plex Sans" pitchFamily="34" charset="0"/>
+                <a:ea typeface="IBM Plex Sans" pitchFamily="34" charset="-122"/>
+                <a:cs typeface="IBM Plex Sans" pitchFamily="34" charset="-120"/>
               </a:rPr>
               <a:t>Airbnb Listings</a:t>
             </a:r>
-            <a:endParaRPr lang="en-US" sz="4800" dirty="0"/>
-          </a:p>
-        </p:txBody>
-      </p:sp>
-      <p:sp>
-        <p:nvSpPr>
-          <p:cNvPr id="6" name="Text 4"/>
-          <p:cNvSpPr/>
-          <p:nvPr/>
-        </p:nvSpPr>
-        <p:spPr>
-          <a:xfrm>
-            <a:off x="822960" y="3950208"/>
+            <a:endParaRPr lang="en-US" sz="4600" dirty="0"/>
+          </a:p>
+        </p:txBody>
+      </p:sp>
+      <p:sp>
+        <p:nvSpPr>
+          <p:cNvPr id="8" name="Text 6"/>
+          <p:cNvSpPr/>
+          <p:nvPr/>
+        </p:nvSpPr>
+        <p:spPr>
+          <a:xfrm>
+            <a:off x="822960" y="3968496"/>
             <a:ext cx="8046720" cy="365760"/>
           </a:xfrm>
           <a:prstGeom prst="rect">
@@ -2127,9 +2177,9 @@
                 <a:solidFill>
                   <a:srgbClr val="000000"/>
                 </a:solidFill>
-                <a:latin typeface="Calibri" pitchFamily="34" charset="0"/>
-                <a:ea typeface="Calibri" pitchFamily="34" charset="-122"/>
-                <a:cs typeface="Calibri" pitchFamily="34" charset="-120"/>
+                <a:latin typeface="IBM Plex Sans" pitchFamily="34" charset="0"/>
+                <a:ea typeface="IBM Plex Sans" pitchFamily="34" charset="-122"/>
+                <a:cs typeface="IBM Plex Sans" pitchFamily="34" charset="-120"/>
               </a:rPr>
               <a:t>What drives the price of a bed for the night?</a:t>
             </a:r>
@@ -2139,13 +2189,38 @@
       </p:sp>
       <p:sp>
         <p:nvSpPr>
-          <p:cNvPr id="7" name="Text 5"/>
-          <p:cNvSpPr/>
-          <p:nvPr/>
-        </p:nvSpPr>
-        <p:spPr>
-          <a:xfrm>
-            <a:off x="822960" y="4800600"/>
+          <p:cNvPr id="9" name="Shape 7"/>
+          <p:cNvSpPr/>
+          <p:nvPr/>
+        </p:nvSpPr>
+        <p:spPr>
+          <a:xfrm>
+            <a:off x="822960" y="4754880"/>
+            <a:ext cx="118872" cy="118872"/>
+          </a:xfrm>
+          <a:prstGeom prst="ellipse">
+            <a:avLst/>
+          </a:prstGeom>
+          <a:solidFill>
+            <a:srgbClr val="57E3D8"/>
+          </a:solidFill>
+          <a:ln w="12700">
+            <a:solidFill>
+              <a:srgbClr val="333333"/>
+            </a:solidFill>
+            <a:prstDash val="solid"/>
+          </a:ln>
+        </p:spPr>
+      </p:sp>
+      <p:sp>
+        <p:nvSpPr>
+          <p:cNvPr id="10" name="Text 8"/>
+          <p:cNvSpPr/>
+          <p:nvPr/>
+        </p:nvSpPr>
+        <p:spPr>
+          <a:xfrm>
+            <a:off x="822960" y="4956048"/>
             <a:ext cx="1965960" cy="475488"/>
           </a:xfrm>
           <a:prstGeom prst="rect">
@@ -2162,29 +2237,29 @@
               <a:buNone/>
             </a:pPr>
             <a:r>
-              <a:rPr lang="en-US" sz="2700" b="1" dirty="0">
+              <a:rPr lang="en-US" sz="2600" b="1" dirty="0">
                 <a:solidFill>
                   <a:srgbClr val="9B78F7"/>
                 </a:solidFill>
-                <a:latin typeface="Cambria" pitchFamily="34" charset="0"/>
-                <a:ea typeface="Cambria" pitchFamily="34" charset="-122"/>
-                <a:cs typeface="Cambria" pitchFamily="34" charset="-120"/>
+                <a:latin typeface="IBM Plex Sans" pitchFamily="34" charset="0"/>
+                <a:ea typeface="IBM Plex Sans" pitchFamily="34" charset="-122"/>
+                <a:cs typeface="IBM Plex Sans" pitchFamily="34" charset="-120"/>
               </a:rPr>
               <a:t>48,895</a:t>
             </a:r>
-            <a:endParaRPr lang="en-US" sz="2700" dirty="0"/>
-          </a:p>
-        </p:txBody>
-      </p:sp>
-      <p:sp>
-        <p:nvSpPr>
-          <p:cNvPr id="8" name="Text 6"/>
-          <p:cNvSpPr/>
-          <p:nvPr/>
-        </p:nvSpPr>
-        <p:spPr>
-          <a:xfrm>
-            <a:off x="822960" y="5285232"/>
+            <a:endParaRPr lang="en-US" sz="2600" dirty="0"/>
+          </a:p>
+        </p:txBody>
+      </p:sp>
+      <p:sp>
+        <p:nvSpPr>
+          <p:cNvPr id="11" name="Text 9"/>
+          <p:cNvSpPr/>
+          <p:nvPr/>
+        </p:nvSpPr>
+        <p:spPr>
+          <a:xfrm>
+            <a:off x="822960" y="5440680"/>
             <a:ext cx="1965960" cy="274320"/>
           </a:xfrm>
           <a:prstGeom prst="rect">
@@ -2205,9 +2280,9 @@
                 <a:solidFill>
                   <a:srgbClr val="000000"/>
                 </a:solidFill>
-                <a:latin typeface="Calibri" pitchFamily="34" charset="0"/>
-                <a:ea typeface="Calibri" pitchFamily="34" charset="-122"/>
-                <a:cs typeface="Calibri" pitchFamily="34" charset="-120"/>
+                <a:latin typeface="IBM Plex Sans" pitchFamily="34" charset="0"/>
+                <a:ea typeface="IBM Plex Sans" pitchFamily="34" charset="-122"/>
+                <a:cs typeface="IBM Plex Sans" pitchFamily="34" charset="-120"/>
               </a:rPr>
               <a:t>listings</a:t>
             </a:r>
@@ -2217,13 +2292,38 @@
       </p:sp>
       <p:sp>
         <p:nvSpPr>
-          <p:cNvPr id="9" name="Text 7"/>
-          <p:cNvSpPr/>
-          <p:nvPr/>
-        </p:nvSpPr>
-        <p:spPr>
-          <a:xfrm>
-            <a:off x="2971800" y="4800600"/>
+          <p:cNvPr id="12" name="Shape 10"/>
+          <p:cNvSpPr/>
+          <p:nvPr/>
+        </p:nvSpPr>
+        <p:spPr>
+          <a:xfrm>
+            <a:off x="2971800" y="4754880"/>
+            <a:ext cx="118872" cy="118872"/>
+          </a:xfrm>
+          <a:prstGeom prst="ellipse">
+            <a:avLst/>
+          </a:prstGeom>
+          <a:solidFill>
+            <a:srgbClr val="F4A664"/>
+          </a:solidFill>
+          <a:ln w="12700">
+            <a:solidFill>
+              <a:srgbClr val="333333"/>
+            </a:solidFill>
+            <a:prstDash val="solid"/>
+          </a:ln>
+        </p:spPr>
+      </p:sp>
+      <p:sp>
+        <p:nvSpPr>
+          <p:cNvPr id="13" name="Text 11"/>
+          <p:cNvSpPr/>
+          <p:nvPr/>
+        </p:nvSpPr>
+        <p:spPr>
+          <a:xfrm>
+            <a:off x="2971800" y="4956048"/>
             <a:ext cx="1965960" cy="475488"/>
           </a:xfrm>
           <a:prstGeom prst="rect">
@@ -2240,29 +2340,29 @@
               <a:buNone/>
             </a:pPr>
             <a:r>
-              <a:rPr lang="en-US" sz="2700" b="1" dirty="0">
+              <a:rPr lang="en-US" sz="2600" b="1" dirty="0">
                 <a:solidFill>
                   <a:srgbClr val="9B78F7"/>
                 </a:solidFill>
-                <a:latin typeface="Cambria" pitchFamily="34" charset="0"/>
-                <a:ea typeface="Cambria" pitchFamily="34" charset="-122"/>
-                <a:cs typeface="Cambria" pitchFamily="34" charset="-120"/>
+                <a:latin typeface="IBM Plex Sans" pitchFamily="34" charset="0"/>
+                <a:ea typeface="IBM Plex Sans" pitchFamily="34" charset="-122"/>
+                <a:cs typeface="IBM Plex Sans" pitchFamily="34" charset="-120"/>
               </a:rPr>
               <a:t>5</a:t>
             </a:r>
-            <a:endParaRPr lang="en-US" sz="2700" dirty="0"/>
-          </a:p>
-        </p:txBody>
-      </p:sp>
-      <p:sp>
-        <p:nvSpPr>
-          <p:cNvPr id="10" name="Text 8"/>
-          <p:cNvSpPr/>
-          <p:nvPr/>
-        </p:nvSpPr>
-        <p:spPr>
-          <a:xfrm>
-            <a:off x="2971800" y="5285232"/>
+            <a:endParaRPr lang="en-US" sz="2600" dirty="0"/>
+          </a:p>
+        </p:txBody>
+      </p:sp>
+      <p:sp>
+        <p:nvSpPr>
+          <p:cNvPr id="14" name="Text 12"/>
+          <p:cNvSpPr/>
+          <p:nvPr/>
+        </p:nvSpPr>
+        <p:spPr>
+          <a:xfrm>
+            <a:off x="2971800" y="5440680"/>
             <a:ext cx="1965960" cy="274320"/>
           </a:xfrm>
           <a:prstGeom prst="rect">
@@ -2283,9 +2383,9 @@
                 <a:solidFill>
                   <a:srgbClr val="000000"/>
                 </a:solidFill>
-                <a:latin typeface="Calibri" pitchFamily="34" charset="0"/>
-                <a:ea typeface="Calibri" pitchFamily="34" charset="-122"/>
-                <a:cs typeface="Calibri" pitchFamily="34" charset="-120"/>
+                <a:latin typeface="IBM Plex Sans" pitchFamily="34" charset="0"/>
+                <a:ea typeface="IBM Plex Sans" pitchFamily="34" charset="-122"/>
+                <a:cs typeface="IBM Plex Sans" pitchFamily="34" charset="-120"/>
               </a:rPr>
               <a:t>boroughs</a:t>
             </a:r>
@@ -2295,13 +2395,38 @@
       </p:sp>
       <p:sp>
         <p:nvSpPr>
-          <p:cNvPr id="11" name="Text 9"/>
-          <p:cNvSpPr/>
-          <p:nvPr/>
-        </p:nvSpPr>
-        <p:spPr>
-          <a:xfrm>
-            <a:off x="5120640" y="4800600"/>
+          <p:cNvPr id="15" name="Shape 13"/>
+          <p:cNvSpPr/>
+          <p:nvPr/>
+        </p:nvSpPr>
+        <p:spPr>
+          <a:xfrm>
+            <a:off x="5120640" y="4754880"/>
+            <a:ext cx="118872" cy="118872"/>
+          </a:xfrm>
+          <a:prstGeom prst="ellipse">
+            <a:avLst/>
+          </a:prstGeom>
+          <a:solidFill>
+            <a:srgbClr val="57E3D8"/>
+          </a:solidFill>
+          <a:ln w="12700">
+            <a:solidFill>
+              <a:srgbClr val="333333"/>
+            </a:solidFill>
+            <a:prstDash val="solid"/>
+          </a:ln>
+        </p:spPr>
+      </p:sp>
+      <p:sp>
+        <p:nvSpPr>
+          <p:cNvPr id="16" name="Text 14"/>
+          <p:cNvSpPr/>
+          <p:nvPr/>
+        </p:nvSpPr>
+        <p:spPr>
+          <a:xfrm>
+            <a:off x="5120640" y="4956048"/>
             <a:ext cx="1965960" cy="475488"/>
           </a:xfrm>
           <a:prstGeom prst="rect">
@@ -2318,29 +2443,29 @@
               <a:buNone/>
             </a:pPr>
             <a:r>
-              <a:rPr lang="en-US" sz="2700" b="1" dirty="0">
+              <a:rPr lang="en-US" sz="2600" b="1" dirty="0">
                 <a:solidFill>
                   <a:srgbClr val="9B78F7"/>
                 </a:solidFill>
-                <a:latin typeface="Cambria" pitchFamily="34" charset="0"/>
-                <a:ea typeface="Cambria" pitchFamily="34" charset="-122"/>
-                <a:cs typeface="Cambria" pitchFamily="34" charset="-120"/>
+                <a:latin typeface="IBM Plex Sans" pitchFamily="34" charset="0"/>
+                <a:ea typeface="IBM Plex Sans" pitchFamily="34" charset="-122"/>
+                <a:cs typeface="IBM Plex Sans" pitchFamily="34" charset="-120"/>
               </a:rPr>
               <a:t>221</a:t>
             </a:r>
-            <a:endParaRPr lang="en-US" sz="2700" dirty="0"/>
-          </a:p>
-        </p:txBody>
-      </p:sp>
-      <p:sp>
-        <p:nvSpPr>
-          <p:cNvPr id="12" name="Text 10"/>
-          <p:cNvSpPr/>
-          <p:nvPr/>
-        </p:nvSpPr>
-        <p:spPr>
-          <a:xfrm>
-            <a:off x="5120640" y="5285232"/>
+            <a:endParaRPr lang="en-US" sz="2600" dirty="0"/>
+          </a:p>
+        </p:txBody>
+      </p:sp>
+      <p:sp>
+        <p:nvSpPr>
+          <p:cNvPr id="17" name="Text 15"/>
+          <p:cNvSpPr/>
+          <p:nvPr/>
+        </p:nvSpPr>
+        <p:spPr>
+          <a:xfrm>
+            <a:off x="5120640" y="5440680"/>
             <a:ext cx="1965960" cy="274320"/>
           </a:xfrm>
           <a:prstGeom prst="rect">
@@ -2361,9 +2486,9 @@
                 <a:solidFill>
                   <a:srgbClr val="000000"/>
                 </a:solidFill>
-                <a:latin typeface="Calibri" pitchFamily="34" charset="0"/>
-                <a:ea typeface="Calibri" pitchFamily="34" charset="-122"/>
-                <a:cs typeface="Calibri" pitchFamily="34" charset="-120"/>
+                <a:latin typeface="IBM Plex Sans" pitchFamily="34" charset="0"/>
+                <a:ea typeface="IBM Plex Sans" pitchFamily="34" charset="-122"/>
+                <a:cs typeface="IBM Plex Sans" pitchFamily="34" charset="-120"/>
               </a:rPr>
               <a:t>neighbourhoods</a:t>
             </a:r>
@@ -2373,13 +2498,38 @@
       </p:sp>
       <p:sp>
         <p:nvSpPr>
-          <p:cNvPr id="13" name="Text 11"/>
-          <p:cNvSpPr/>
-          <p:nvPr/>
-        </p:nvSpPr>
-        <p:spPr>
-          <a:xfrm>
-            <a:off x="7269480" y="4800600"/>
+          <p:cNvPr id="18" name="Shape 16"/>
+          <p:cNvSpPr/>
+          <p:nvPr/>
+        </p:nvSpPr>
+        <p:spPr>
+          <a:xfrm>
+            <a:off x="7269480" y="4754880"/>
+            <a:ext cx="118872" cy="118872"/>
+          </a:xfrm>
+          <a:prstGeom prst="ellipse">
+            <a:avLst/>
+          </a:prstGeom>
+          <a:solidFill>
+            <a:srgbClr val="F4A664"/>
+          </a:solidFill>
+          <a:ln w="12700">
+            <a:solidFill>
+              <a:srgbClr val="333333"/>
+            </a:solidFill>
+            <a:prstDash val="solid"/>
+          </a:ln>
+        </p:spPr>
+      </p:sp>
+      <p:sp>
+        <p:nvSpPr>
+          <p:cNvPr id="19" name="Text 17"/>
+          <p:cNvSpPr/>
+          <p:nvPr/>
+        </p:nvSpPr>
+        <p:spPr>
+          <a:xfrm>
+            <a:off x="7269480" y="4956048"/>
             <a:ext cx="1965960" cy="475488"/>
           </a:xfrm>
           <a:prstGeom prst="rect">
@@ -2396,29 +2546,29 @@
               <a:buNone/>
             </a:pPr>
             <a:r>
-              <a:rPr lang="en-US" sz="2700" b="1" dirty="0">
+              <a:rPr lang="en-US" sz="2600" b="1" dirty="0">
                 <a:solidFill>
                   <a:srgbClr val="9B78F7"/>
                 </a:solidFill>
-                <a:latin typeface="Cambria" pitchFamily="34" charset="0"/>
-                <a:ea typeface="Cambria" pitchFamily="34" charset="-122"/>
-                <a:cs typeface="Cambria" pitchFamily="34" charset="-120"/>
+                <a:latin typeface="IBM Plex Sans" pitchFamily="34" charset="0"/>
+                <a:ea typeface="IBM Plex Sans" pitchFamily="34" charset="-122"/>
+                <a:cs typeface="IBM Plex Sans" pitchFamily="34" charset="-120"/>
               </a:rPr>
               <a:t>16</a:t>
             </a:r>
-            <a:endParaRPr lang="en-US" sz="2700" dirty="0"/>
-          </a:p>
-        </p:txBody>
-      </p:sp>
-      <p:sp>
-        <p:nvSpPr>
-          <p:cNvPr id="14" name="Text 12"/>
-          <p:cNvSpPr/>
-          <p:nvPr/>
-        </p:nvSpPr>
-        <p:spPr>
-          <a:xfrm>
-            <a:off x="7269480" y="5285232"/>
+            <a:endParaRPr lang="en-US" sz="2600" dirty="0"/>
+          </a:p>
+        </p:txBody>
+      </p:sp>
+      <p:sp>
+        <p:nvSpPr>
+          <p:cNvPr id="20" name="Text 18"/>
+          <p:cNvSpPr/>
+          <p:nvPr/>
+        </p:nvSpPr>
+        <p:spPr>
+          <a:xfrm>
+            <a:off x="7269480" y="5440680"/>
             <a:ext cx="1965960" cy="274320"/>
           </a:xfrm>
           <a:prstGeom prst="rect">
@@ -2439,9 +2589,9 @@
                 <a:solidFill>
                   <a:srgbClr val="000000"/>
                 </a:solidFill>
-                <a:latin typeface="Calibri" pitchFamily="34" charset="0"/>
-                <a:ea typeface="Calibri" pitchFamily="34" charset="-122"/>
-                <a:cs typeface="Calibri" pitchFamily="34" charset="-120"/>
+                <a:latin typeface="IBM Plex Sans" pitchFamily="34" charset="0"/>
+                <a:ea typeface="IBM Plex Sans" pitchFamily="34" charset="-122"/>
+                <a:cs typeface="IBM Plex Sans" pitchFamily="34" charset="-120"/>
               </a:rPr>
               <a:t>columns</a:t>
             </a:r>
@@ -2451,13 +2601,13 @@
       </p:sp>
       <p:sp>
         <p:nvSpPr>
-          <p:cNvPr id="15" name="Text 13"/>
-          <p:cNvSpPr/>
-          <p:nvPr/>
-        </p:nvSpPr>
-        <p:spPr>
-          <a:xfrm>
-            <a:off x="822960" y="6035040"/>
+          <p:cNvPr id="21" name="Text 19"/>
+          <p:cNvSpPr/>
+          <p:nvPr/>
+        </p:nvSpPr>
+        <p:spPr>
+          <a:xfrm>
+            <a:off x="822960" y="6053328"/>
             <a:ext cx="8229600" cy="292608"/>
           </a:xfrm>
           <a:prstGeom prst="rect">
@@ -2478,9 +2628,9 @@
                 <a:solidFill>
                   <a:srgbClr val="522CBA"/>
                 </a:solidFill>
-                <a:latin typeface="Calibri" pitchFamily="34" charset="0"/>
-                <a:ea typeface="Calibri" pitchFamily="34" charset="-122"/>
-                <a:cs typeface="Calibri" pitchFamily="34" charset="-120"/>
+                <a:latin typeface="IBM Plex Sans" pitchFamily="34" charset="0"/>
+                <a:ea typeface="IBM Plex Sans" pitchFamily="34" charset="-122"/>
+                <a:cs typeface="IBM Plex Sans" pitchFamily="34" charset="-120"/>
               </a:rPr>
               <a:t>Khalid Al Dosari  ·  Tuwaiq Bootcamp</a:t>
             </a:r>
@@ -2545,30 +2695,55 @@
               <a:buNone/>
             </a:pPr>
             <a:r>
-              <a:rPr lang="en-US" sz="3600" b="1" dirty="0">
+              <a:rPr lang="en-US" sz="3400" b="1" dirty="0">
                 <a:solidFill>
                   <a:srgbClr val="522CBA"/>
                 </a:solidFill>
-                <a:latin typeface="Cambria" pitchFamily="34" charset="0"/>
-                <a:ea typeface="Cambria" pitchFamily="34" charset="-122"/>
-                <a:cs typeface="Cambria" pitchFamily="34" charset="-120"/>
+                <a:latin typeface="IBM Plex Sans" pitchFamily="34" charset="0"/>
+                <a:ea typeface="IBM Plex Sans" pitchFamily="34" charset="-122"/>
+                <a:cs typeface="IBM Plex Sans" pitchFamily="34" charset="-120"/>
               </a:rPr>
               <a:t>Supply clusters</a:t>
             </a:r>
-            <a:endParaRPr lang="en-US" sz="3600" dirty="0"/>
-          </a:p>
-        </p:txBody>
-      </p:sp>
-      <p:sp>
-        <p:nvSpPr>
-          <p:cNvPr id="3" name="Text 1"/>
-          <p:cNvSpPr/>
-          <p:nvPr/>
-        </p:nvSpPr>
-        <p:spPr>
-          <a:xfrm>
-            <a:off x="566928" y="1042416"/>
-            <a:ext cx="11064240" cy="329184"/>
+            <a:endParaRPr lang="en-US" sz="3400" dirty="0"/>
+          </a:p>
+        </p:txBody>
+      </p:sp>
+      <p:sp>
+        <p:nvSpPr>
+          <p:cNvPr id="3" name="Shape 1"/>
+          <p:cNvSpPr/>
+          <p:nvPr/>
+        </p:nvSpPr>
+        <p:spPr>
+          <a:xfrm>
+            <a:off x="585216" y="1138428"/>
+            <a:ext cx="146304" cy="146304"/>
+          </a:xfrm>
+          <a:prstGeom prst="ellipse">
+            <a:avLst/>
+          </a:prstGeom>
+          <a:solidFill>
+            <a:srgbClr val="57E3D8"/>
+          </a:solidFill>
+          <a:ln w="12700">
+            <a:solidFill>
+              <a:srgbClr val="333333"/>
+            </a:solidFill>
+            <a:prstDash val="solid"/>
+          </a:ln>
+        </p:spPr>
+      </p:sp>
+      <p:sp>
+        <p:nvSpPr>
+          <p:cNvPr id="4" name="Text 2"/>
+          <p:cNvSpPr/>
+          <p:nvPr/>
+        </p:nvSpPr>
+        <p:spPr>
+          <a:xfrm>
+            <a:off x="859536" y="1042416"/>
+            <a:ext cx="10789920" cy="329184"/>
           </a:xfrm>
           <a:prstGeom prst="rect">
             <a:avLst/>
@@ -2588,11 +2763,11 @@
                 <a:solidFill>
                   <a:srgbClr val="9B78F7"/>
                 </a:solidFill>
-                <a:latin typeface="Calibri" pitchFamily="34" charset="0"/>
-                <a:ea typeface="Calibri" pitchFamily="34" charset="-122"/>
-                <a:cs typeface="Calibri" pitchFamily="34" charset="-120"/>
-              </a:rPr>
-              <a:t>221 neighbourhoods · 10 dominate</a:t>
+                <a:latin typeface="IBM Plex Sans" pitchFamily="34" charset="0"/>
+                <a:ea typeface="IBM Plex Sans" pitchFamily="34" charset="-122"/>
+                <a:cs typeface="IBM Plex Sans" pitchFamily="34" charset="-120"/>
+              </a:rPr>
+              <a:t>221 neighbourhoods and 10 dominate</a:t>
             </a:r>
             <a:endParaRPr lang="en-US" sz="1500" dirty="0"/>
           </a:p>
@@ -2600,7 +2775,7 @@
       </p:sp>
       <p:sp>
         <p:nvSpPr>
-          <p:cNvPr id="4" name="Shape 2"/>
+          <p:cNvPr id="5" name="Shape 3"/>
           <p:cNvSpPr/>
           <p:nvPr/>
         </p:nvSpPr>
@@ -2634,7 +2809,7 @@
       </p:sp>
       <p:pic>
         <p:nvPicPr>
-          <p:cNvPr id="5" name="Image 0" descr="/tmp/claude-0/-home-user-Tuwaiq-Bootcamp/31d76967-b7b5-527c-bee1-8d14c00fddcd/scratchpad/plots/viz_5.png">    </p:cNvPr>
+          <p:cNvPr id="6" name="Image 0" descr="/tmp/claude-0/-home-user-Tuwaiq-Bootcamp/31d76967-b7b5-527c-bee1-8d14c00fddcd/scratchpad/plots/viz_5.png">    </p:cNvPr>
           <p:cNvPicPr>
             <a:picLocks noChangeAspect="1"/>
           </p:cNvPicPr>
@@ -2657,7 +2832,7 @@
       </p:pic>
       <p:sp>
         <p:nvSpPr>
-          <p:cNvPr id="6" name="Shape 3"/>
+          <p:cNvPr id="7" name="Shape 4"/>
           <p:cNvSpPr/>
           <p:nvPr/>
         </p:nvSpPr>
@@ -2691,53 +2866,78 @@
       </p:sp>
       <p:sp>
         <p:nvSpPr>
-          <p:cNvPr id="7" name="Text 4"/>
-          <p:cNvSpPr/>
-          <p:nvPr/>
-        </p:nvSpPr>
-        <p:spPr>
-          <a:xfrm>
-            <a:off x="8001000" y="1810512"/>
-            <a:ext cx="3383280" cy="365760"/>
-          </a:xfrm>
-          <a:prstGeom prst="rect">
-            <a:avLst/>
-          </a:prstGeom>
-          <a:noFill/>
-          <a:ln/>
-        </p:spPr>
-        <p:txBody>
-          <a:bodyPr wrap="square" lIns="0" tIns="0" rIns="0" bIns="0" rtlCol="0" anchor="ctr"/>
-          <a:lstStyle/>
-          <a:p>
-            <a:pPr indent="0" marL="0">
-              <a:buNone/>
-            </a:pPr>
-            <a:r>
-              <a:rPr lang="en-US" sz="1800" b="1" dirty="0">
+          <p:cNvPr id="8" name="Shape 5"/>
+          <p:cNvSpPr/>
+          <p:nvPr/>
+        </p:nvSpPr>
+        <p:spPr>
+          <a:xfrm>
+            <a:off x="8001000" y="1929384"/>
+            <a:ext cx="137160" cy="137160"/>
+          </a:xfrm>
+          <a:prstGeom prst="ellipse">
+            <a:avLst/>
+          </a:prstGeom>
+          <a:solidFill>
+            <a:srgbClr val="F4A664"/>
+          </a:solidFill>
+          <a:ln w="12700">
+            <a:solidFill>
+              <a:srgbClr val="333333"/>
+            </a:solidFill>
+            <a:prstDash val="solid"/>
+          </a:ln>
+        </p:spPr>
+      </p:sp>
+      <p:sp>
+        <p:nvSpPr>
+          <p:cNvPr id="9" name="Text 6"/>
+          <p:cNvSpPr/>
+          <p:nvPr/>
+        </p:nvSpPr>
+        <p:spPr>
+          <a:xfrm>
+            <a:off x="8266176" y="1828800"/>
+            <a:ext cx="3209544" cy="347472"/>
+          </a:xfrm>
+          <a:prstGeom prst="rect">
+            <a:avLst/>
+          </a:prstGeom>
+          <a:noFill/>
+          <a:ln/>
+        </p:spPr>
+        <p:txBody>
+          <a:bodyPr wrap="square" lIns="0" tIns="0" rIns="0" bIns="0" rtlCol="0" anchor="ctr"/>
+          <a:lstStyle/>
+          <a:p>
+            <a:pPr indent="0" marL="0">
+              <a:buNone/>
+            </a:pPr>
+            <a:r>
+              <a:rPr lang="en-US" sz="1700" b="1" dirty="0">
                 <a:solidFill>
                   <a:srgbClr val="9B78F7"/>
                 </a:solidFill>
-                <a:latin typeface="Calibri" pitchFamily="34" charset="0"/>
-                <a:ea typeface="Calibri" pitchFamily="34" charset="-122"/>
-                <a:cs typeface="Calibri" pitchFamily="34" charset="-120"/>
+                <a:latin typeface="IBM Plex Sans" pitchFamily="34" charset="0"/>
+                <a:ea typeface="IBM Plex Sans" pitchFamily="34" charset="-122"/>
+                <a:cs typeface="IBM Plex Sans" pitchFamily="34" charset="-120"/>
               </a:rPr>
               <a:t>Why it matters</a:t>
             </a:r>
-            <a:endParaRPr lang="en-US" sz="1800" dirty="0"/>
-          </a:p>
-        </p:txBody>
-      </p:sp>
-      <p:sp>
-        <p:nvSpPr>
-          <p:cNvPr id="8" name="Text 5"/>
-          <p:cNvSpPr/>
-          <p:nvPr/>
-        </p:nvSpPr>
-        <p:spPr>
-          <a:xfrm>
-            <a:off x="8001000" y="2304288"/>
-            <a:ext cx="3383280" cy="3383280"/>
+            <a:endParaRPr lang="en-US" sz="1700" dirty="0"/>
+          </a:p>
+        </p:txBody>
+      </p:sp>
+      <p:sp>
+        <p:nvSpPr>
+          <p:cNvPr id="10" name="Text 7"/>
+          <p:cNvSpPr/>
+          <p:nvPr/>
+        </p:nvSpPr>
+        <p:spPr>
+          <a:xfrm>
+            <a:off x="8001000" y="2340864"/>
+            <a:ext cx="3383280" cy="3291840"/>
           </a:xfrm>
           <a:prstGeom prst="rect">
             <a:avLst/>
@@ -2757,17 +2957,17 @@
               <a:buChar char="•"/>
             </a:pPr>
             <a:r>
-              <a:rPr lang="en-US" sz="1500" dirty="0">
+              <a:rPr lang="en-US" sz="1400" dirty="0">
                 <a:solidFill>
                   <a:srgbClr val="000000"/>
                 </a:solidFill>
-                <a:latin typeface="Calibri" pitchFamily="34" charset="0"/>
-                <a:ea typeface="Calibri" pitchFamily="34" charset="-122"/>
-                <a:cs typeface="Calibri" pitchFamily="34" charset="-120"/>
+                <a:latin typeface="IBM Plex Sans" pitchFamily="34" charset="0"/>
+                <a:ea typeface="IBM Plex Sans" pitchFamily="34" charset="-122"/>
+                <a:cs typeface="IBM Plex Sans" pitchFamily="34" charset="-120"/>
               </a:rPr>
               <a:t>Williamsburg and Bed-Stuy lead</a:t>
             </a:r>
-            <a:endParaRPr lang="en-US" sz="1500" dirty="0"/>
+            <a:endParaRPr lang="en-US" sz="1400" dirty="0"/>
           </a:p>
           <a:p>
             <a:pPr marL="342900" indent="-342900">
@@ -2778,17 +2978,17 @@
               <a:buChar char="•"/>
             </a:pPr>
             <a:r>
-              <a:rPr lang="en-US" sz="1500" dirty="0">
+              <a:rPr lang="en-US" sz="1400" dirty="0">
                 <a:solidFill>
                   <a:srgbClr val="000000"/>
                 </a:solidFill>
-                <a:latin typeface="Calibri" pitchFamily="34" charset="0"/>
-                <a:ea typeface="Calibri" pitchFamily="34" charset="-122"/>
-                <a:cs typeface="Calibri" pitchFamily="34" charset="-120"/>
-              </a:rPr>
-              <a:t>High cardinality — 221 columns if encoded</a:t>
-            </a:r>
-            <a:endParaRPr lang="en-US" sz="1500" dirty="0"/>
+                <a:latin typeface="IBM Plex Sans" pitchFamily="34" charset="0"/>
+                <a:ea typeface="IBM Plex Sans" pitchFamily="34" charset="-122"/>
+                <a:cs typeface="IBM Plex Sans" pitchFamily="34" charset="-120"/>
+              </a:rPr>
+              <a:t>High cardinality with 221 columns if encoded</a:t>
+            </a:r>
+            <a:endParaRPr lang="en-US" sz="1400" dirty="0"/>
           </a:p>
           <a:p>
             <a:pPr marL="342900" indent="-342900">
@@ -2799,17 +2999,17 @@
               <a:buChar char="•"/>
             </a:pPr>
             <a:r>
-              <a:rPr lang="en-US" sz="1500" dirty="0">
+              <a:rPr lang="en-US" sz="1400" dirty="0">
                 <a:solidFill>
                   <a:srgbClr val="000000"/>
                 </a:solidFill>
-                <a:latin typeface="Calibri" pitchFamily="34" charset="0"/>
-                <a:ea typeface="Calibri" pitchFamily="34" charset="-122"/>
-                <a:cs typeface="Calibri" pitchFamily="34" charset="-120"/>
+                <a:latin typeface="IBM Plex Sans" pitchFamily="34" charset="0"/>
+                <a:ea typeface="IBM Plex Sans" pitchFamily="34" charset="-122"/>
+                <a:cs typeface="IBM Plex Sans" pitchFamily="34" charset="-120"/>
               </a:rPr>
               <a:t>Most have too few listings to price</a:t>
             </a:r>
-            <a:endParaRPr lang="en-US" sz="1500" dirty="0"/>
+            <a:endParaRPr lang="en-US" sz="1400" dirty="0"/>
           </a:p>
           <a:p>
             <a:pPr marL="342900" indent="-342900">
@@ -2820,17 +3020,17 @@
               <a:buChar char="•"/>
             </a:pPr>
             <a:r>
-              <a:rPr lang="en-US" sz="1500" dirty="0">
+              <a:rPr lang="en-US" sz="1400" dirty="0">
                 <a:solidFill>
                   <a:srgbClr val="000000"/>
                 </a:solidFill>
-                <a:latin typeface="Calibri" pitchFamily="34" charset="0"/>
-                <a:ea typeface="Calibri" pitchFamily="34" charset="-122"/>
-                <a:cs typeface="Calibri" pitchFamily="34" charset="-120"/>
-              </a:rPr>
-              <a:t>Group the tail, or use borough</a:t>
-            </a:r>
-            <a:endParaRPr lang="en-US" sz="1500" dirty="0"/>
+                <a:latin typeface="IBM Plex Sans" pitchFamily="34" charset="0"/>
+                <a:ea typeface="IBM Plex Sans" pitchFamily="34" charset="-122"/>
+                <a:cs typeface="IBM Plex Sans" pitchFamily="34" charset="-120"/>
+              </a:rPr>
+              <a:t>Group the tail or fall back to borough</a:t>
+            </a:r>
+            <a:endParaRPr lang="en-US" sz="1400" dirty="0"/>
           </a:p>
         </p:txBody>
       </p:sp>
@@ -2891,30 +3091,55 @@
               <a:buNone/>
             </a:pPr>
             <a:r>
-              <a:rPr lang="en-US" sz="3600" b="1" dirty="0">
+              <a:rPr lang="en-US" sz="3400" b="1" dirty="0">
                 <a:solidFill>
                   <a:srgbClr val="522CBA"/>
                 </a:solidFill>
-                <a:latin typeface="Cambria" pitchFamily="34" charset="0"/>
-                <a:ea typeface="Cambria" pitchFamily="34" charset="-122"/>
-                <a:cs typeface="Cambria" pitchFamily="34" charset="-120"/>
+                <a:latin typeface="IBM Plex Sans" pitchFamily="34" charset="0"/>
+                <a:ea typeface="IBM Plex Sans" pitchFamily="34" charset="-122"/>
+                <a:cs typeface="IBM Plex Sans" pitchFamily="34" charset="-120"/>
               </a:rPr>
               <a:t>What the data says</a:t>
             </a:r>
-            <a:endParaRPr lang="en-US" sz="3600" dirty="0"/>
-          </a:p>
-        </p:txBody>
-      </p:sp>
-      <p:sp>
-        <p:nvSpPr>
-          <p:cNvPr id="3" name="Text 1"/>
-          <p:cNvSpPr/>
-          <p:nvPr/>
-        </p:nvSpPr>
-        <p:spPr>
-          <a:xfrm>
-            <a:off x="566928" y="1042416"/>
-            <a:ext cx="11064240" cy="329184"/>
+            <a:endParaRPr lang="en-US" sz="3400" dirty="0"/>
+          </a:p>
+        </p:txBody>
+      </p:sp>
+      <p:sp>
+        <p:nvSpPr>
+          <p:cNvPr id="3" name="Shape 1"/>
+          <p:cNvSpPr/>
+          <p:nvPr/>
+        </p:nvSpPr>
+        <p:spPr>
+          <a:xfrm>
+            <a:off x="585216" y="1138428"/>
+            <a:ext cx="146304" cy="146304"/>
+          </a:xfrm>
+          <a:prstGeom prst="ellipse">
+            <a:avLst/>
+          </a:prstGeom>
+          <a:solidFill>
+            <a:srgbClr val="F4A664"/>
+          </a:solidFill>
+          <a:ln w="12700">
+            <a:solidFill>
+              <a:srgbClr val="333333"/>
+            </a:solidFill>
+            <a:prstDash val="solid"/>
+          </a:ln>
+        </p:spPr>
+      </p:sp>
+      <p:sp>
+        <p:nvSpPr>
+          <p:cNvPr id="4" name="Text 2"/>
+          <p:cNvSpPr/>
+          <p:nvPr/>
+        </p:nvSpPr>
+        <p:spPr>
+          <a:xfrm>
+            <a:off x="859536" y="1042416"/>
+            <a:ext cx="10789920" cy="329184"/>
           </a:xfrm>
           <a:prstGeom prst="rect">
             <a:avLst/>
@@ -2934,9 +3159,9 @@
                 <a:solidFill>
                   <a:srgbClr val="9B78F7"/>
                 </a:solidFill>
-                <a:latin typeface="Calibri" pitchFamily="34" charset="0"/>
-                <a:ea typeface="Calibri" pitchFamily="34" charset="-122"/>
-                <a:cs typeface="Calibri" pitchFamily="34" charset="-120"/>
+                <a:latin typeface="IBM Plex Sans" pitchFamily="34" charset="0"/>
+                <a:ea typeface="IBM Plex Sans" pitchFamily="34" charset="-122"/>
+                <a:cs typeface="IBM Plex Sans" pitchFamily="34" charset="-120"/>
               </a:rPr>
               <a:t>Six of the ten in the notebook</a:t>
             </a:r>
@@ -2946,7 +3171,7 @@
       </p:sp>
       <p:sp>
         <p:nvSpPr>
-          <p:cNvPr id="4" name="Shape 2"/>
+          <p:cNvPr id="5" name="Shape 3"/>
           <p:cNvSpPr/>
           <p:nvPr/>
         </p:nvSpPr>
@@ -2980,52 +3205,77 @@
       </p:sp>
       <p:sp>
         <p:nvSpPr>
-          <p:cNvPr id="5" name="Text 3"/>
-          <p:cNvSpPr/>
-          <p:nvPr/>
-        </p:nvSpPr>
-        <p:spPr>
-          <a:xfrm>
-            <a:off x="841248" y="1865376"/>
-            <a:ext cx="914400" cy="402336"/>
-          </a:xfrm>
-          <a:prstGeom prst="rect">
-            <a:avLst/>
-          </a:prstGeom>
-          <a:noFill/>
-          <a:ln/>
-        </p:spPr>
-        <p:txBody>
-          <a:bodyPr wrap="square" lIns="0" tIns="0" rIns="0" bIns="0" rtlCol="0" anchor="ctr"/>
-          <a:lstStyle/>
-          <a:p>
-            <a:pPr indent="0" marL="0">
-              <a:buNone/>
-            </a:pPr>
-            <a:r>
-              <a:rPr lang="en-US" sz="2200" b="1" dirty="0">
+          <p:cNvPr id="6" name="Shape 4"/>
+          <p:cNvSpPr/>
+          <p:nvPr/>
+        </p:nvSpPr>
+        <p:spPr>
+          <a:xfrm>
+            <a:off x="841248" y="1938528"/>
+            <a:ext cx="146304" cy="146304"/>
+          </a:xfrm>
+          <a:prstGeom prst="ellipse">
+            <a:avLst/>
+          </a:prstGeom>
+          <a:solidFill>
+            <a:srgbClr val="57E3D8"/>
+          </a:solidFill>
+          <a:ln w="12700">
+            <a:solidFill>
+              <a:srgbClr val="333333"/>
+            </a:solidFill>
+            <a:prstDash val="solid"/>
+          </a:ln>
+        </p:spPr>
+      </p:sp>
+      <p:sp>
+        <p:nvSpPr>
+          <p:cNvPr id="7" name="Text 5"/>
+          <p:cNvSpPr/>
+          <p:nvPr/>
+        </p:nvSpPr>
+        <p:spPr>
+          <a:xfrm>
+            <a:off x="1078992" y="1828800"/>
+            <a:ext cx="914400" cy="384048"/>
+          </a:xfrm>
+          <a:prstGeom prst="rect">
+            <a:avLst/>
+          </a:prstGeom>
+          <a:noFill/>
+          <a:ln/>
+        </p:spPr>
+        <p:txBody>
+          <a:bodyPr wrap="square" lIns="0" tIns="0" rIns="0" bIns="0" rtlCol="0" anchor="ctr"/>
+          <a:lstStyle/>
+          <a:p>
+            <a:pPr indent="0" marL="0">
+              <a:buNone/>
+            </a:pPr>
+            <a:r>
+              <a:rPr lang="en-US" sz="2100" b="1" dirty="0">
                 <a:solidFill>
                   <a:srgbClr val="9B78F7"/>
                 </a:solidFill>
-                <a:latin typeface="Cambria" pitchFamily="34" charset="0"/>
-                <a:ea typeface="Cambria" pitchFamily="34" charset="-122"/>
-                <a:cs typeface="Cambria" pitchFamily="34" charset="-120"/>
+                <a:latin typeface="IBM Plex Sans" pitchFamily="34" charset="0"/>
+                <a:ea typeface="IBM Plex Sans" pitchFamily="34" charset="-122"/>
+                <a:cs typeface="IBM Plex Sans" pitchFamily="34" charset="-120"/>
               </a:rPr>
               <a:t>01</a:t>
             </a:r>
-            <a:endParaRPr lang="en-US" sz="2200" dirty="0"/>
-          </a:p>
-        </p:txBody>
-      </p:sp>
-      <p:sp>
-        <p:nvSpPr>
-          <p:cNvPr id="6" name="Text 4"/>
-          <p:cNvSpPr/>
-          <p:nvPr/>
-        </p:nvSpPr>
-        <p:spPr>
-          <a:xfrm>
-            <a:off x="841248" y="2377440"/>
+            <a:endParaRPr lang="en-US" sz="2100" dirty="0"/>
+          </a:p>
+        </p:txBody>
+      </p:sp>
+      <p:sp>
+        <p:nvSpPr>
+          <p:cNvPr id="8" name="Text 6"/>
+          <p:cNvSpPr/>
+          <p:nvPr/>
+        </p:nvSpPr>
+        <p:spPr>
+          <a:xfrm>
+            <a:off x="841248" y="2359152"/>
             <a:ext cx="3017520" cy="694944"/>
           </a:xfrm>
           <a:prstGeom prst="rect">
@@ -3042,23 +3292,23 @@
               <a:buNone/>
             </a:pPr>
             <a:r>
-              <a:rPr lang="en-US" sz="1700" b="1" dirty="0">
+              <a:rPr lang="en-US" sz="1600" b="1" dirty="0">
                 <a:solidFill>
                   <a:srgbClr val="522CBA"/>
                 </a:solidFill>
-                <a:latin typeface="Calibri" pitchFamily="34" charset="0"/>
-                <a:ea typeface="Calibri" pitchFamily="34" charset="-122"/>
-                <a:cs typeface="Calibri" pitchFamily="34" charset="-120"/>
+                <a:latin typeface="IBM Plex Sans" pitchFamily="34" charset="0"/>
+                <a:ea typeface="IBM Plex Sans" pitchFamily="34" charset="-122"/>
+                <a:cs typeface="IBM Plex Sans" pitchFamily="34" charset="-120"/>
               </a:rPr>
               <a:t>Location beats everything</a:t>
             </a:r>
-            <a:endParaRPr lang="en-US" sz="1700" dirty="0"/>
-          </a:p>
-        </p:txBody>
-      </p:sp>
-      <p:sp>
-        <p:nvSpPr>
-          <p:cNvPr id="7" name="Text 5"/>
+            <a:endParaRPr lang="en-US" sz="1600" dirty="0"/>
+          </a:p>
+        </p:txBody>
+      </p:sp>
+      <p:sp>
+        <p:nvSpPr>
+          <p:cNvPr id="9" name="Text 7"/>
           <p:cNvSpPr/>
           <p:nvPr/>
         </p:nvSpPr>
@@ -3081,23 +3331,23 @@
               <a:buNone/>
             </a:pPr>
             <a:r>
-              <a:rPr lang="en-US" sz="1400" dirty="0">
+              <a:rPr lang="en-US" sz="1300" dirty="0">
                 <a:solidFill>
                   <a:srgbClr val="000000"/>
                 </a:solidFill>
-                <a:latin typeface="Calibri" pitchFamily="34" charset="0"/>
-                <a:ea typeface="Calibri" pitchFamily="34" charset="-122"/>
-                <a:cs typeface="Calibri" pitchFamily="34" charset="-120"/>
+                <a:latin typeface="IBM Plex Sans" pitchFamily="34" charset="0"/>
+                <a:ea typeface="IBM Plex Sans" pitchFamily="34" charset="-122"/>
+                <a:cs typeface="IBM Plex Sans" pitchFamily="34" charset="-120"/>
               </a:rPr>
               <a:t>Manhattan 2x Brooklyn</a:t>
             </a:r>
-            <a:endParaRPr lang="en-US" sz="1400" dirty="0"/>
-          </a:p>
-        </p:txBody>
-      </p:sp>
-      <p:sp>
-        <p:nvSpPr>
-          <p:cNvPr id="8" name="Shape 6"/>
+            <a:endParaRPr lang="en-US" sz="1300" dirty="0"/>
+          </a:p>
+        </p:txBody>
+      </p:sp>
+      <p:sp>
+        <p:nvSpPr>
+          <p:cNvPr id="10" name="Shape 8"/>
           <p:cNvSpPr/>
           <p:nvPr/>
         </p:nvSpPr>
@@ -3131,52 +3381,77 @@
       </p:sp>
       <p:sp>
         <p:nvSpPr>
-          <p:cNvPr id="9" name="Text 7"/>
-          <p:cNvSpPr/>
-          <p:nvPr/>
-        </p:nvSpPr>
-        <p:spPr>
-          <a:xfrm>
-            <a:off x="4599432" y="1865376"/>
-            <a:ext cx="914400" cy="402336"/>
-          </a:xfrm>
-          <a:prstGeom prst="rect">
-            <a:avLst/>
-          </a:prstGeom>
-          <a:noFill/>
-          <a:ln/>
-        </p:spPr>
-        <p:txBody>
-          <a:bodyPr wrap="square" lIns="0" tIns="0" rIns="0" bIns="0" rtlCol="0" anchor="ctr"/>
-          <a:lstStyle/>
-          <a:p>
-            <a:pPr indent="0" marL="0">
-              <a:buNone/>
-            </a:pPr>
-            <a:r>
-              <a:rPr lang="en-US" sz="2200" b="1" dirty="0">
+          <p:cNvPr id="11" name="Shape 9"/>
+          <p:cNvSpPr/>
+          <p:nvPr/>
+        </p:nvSpPr>
+        <p:spPr>
+          <a:xfrm>
+            <a:off x="4599432" y="1938528"/>
+            <a:ext cx="146304" cy="146304"/>
+          </a:xfrm>
+          <a:prstGeom prst="ellipse">
+            <a:avLst/>
+          </a:prstGeom>
+          <a:solidFill>
+            <a:srgbClr val="F4A664"/>
+          </a:solidFill>
+          <a:ln w="12700">
+            <a:solidFill>
+              <a:srgbClr val="333333"/>
+            </a:solidFill>
+            <a:prstDash val="solid"/>
+          </a:ln>
+        </p:spPr>
+      </p:sp>
+      <p:sp>
+        <p:nvSpPr>
+          <p:cNvPr id="12" name="Text 10"/>
+          <p:cNvSpPr/>
+          <p:nvPr/>
+        </p:nvSpPr>
+        <p:spPr>
+          <a:xfrm>
+            <a:off x="4837176" y="1828800"/>
+            <a:ext cx="914400" cy="384048"/>
+          </a:xfrm>
+          <a:prstGeom prst="rect">
+            <a:avLst/>
+          </a:prstGeom>
+          <a:noFill/>
+          <a:ln/>
+        </p:spPr>
+        <p:txBody>
+          <a:bodyPr wrap="square" lIns="0" tIns="0" rIns="0" bIns="0" rtlCol="0" anchor="ctr"/>
+          <a:lstStyle/>
+          <a:p>
+            <a:pPr indent="0" marL="0">
+              <a:buNone/>
+            </a:pPr>
+            <a:r>
+              <a:rPr lang="en-US" sz="2100" b="1" dirty="0">
                 <a:solidFill>
                   <a:srgbClr val="9B78F7"/>
                 </a:solidFill>
-                <a:latin typeface="Cambria" pitchFamily="34" charset="0"/>
-                <a:ea typeface="Cambria" pitchFamily="34" charset="-122"/>
-                <a:cs typeface="Cambria" pitchFamily="34" charset="-120"/>
+                <a:latin typeface="IBM Plex Sans" pitchFamily="34" charset="0"/>
+                <a:ea typeface="IBM Plex Sans" pitchFamily="34" charset="-122"/>
+                <a:cs typeface="IBM Plex Sans" pitchFamily="34" charset="-120"/>
               </a:rPr>
               <a:t>02</a:t>
             </a:r>
-            <a:endParaRPr lang="en-US" sz="2200" dirty="0"/>
-          </a:p>
-        </p:txBody>
-      </p:sp>
-      <p:sp>
-        <p:nvSpPr>
-          <p:cNvPr id="10" name="Text 8"/>
-          <p:cNvSpPr/>
-          <p:nvPr/>
-        </p:nvSpPr>
-        <p:spPr>
-          <a:xfrm>
-            <a:off x="4599432" y="2377440"/>
+            <a:endParaRPr lang="en-US" sz="2100" dirty="0"/>
+          </a:p>
+        </p:txBody>
+      </p:sp>
+      <p:sp>
+        <p:nvSpPr>
+          <p:cNvPr id="13" name="Text 11"/>
+          <p:cNvSpPr/>
+          <p:nvPr/>
+        </p:nvSpPr>
+        <p:spPr>
+          <a:xfrm>
+            <a:off x="4599432" y="2359152"/>
             <a:ext cx="3017520" cy="694944"/>
           </a:xfrm>
           <a:prstGeom prst="rect">
@@ -3193,23 +3468,23 @@
               <a:buNone/>
             </a:pPr>
             <a:r>
-              <a:rPr lang="en-US" sz="1700" b="1" dirty="0">
+              <a:rPr lang="en-US" sz="1600" b="1" dirty="0">
                 <a:solidFill>
                   <a:srgbClr val="522CBA"/>
                 </a:solidFill>
-                <a:latin typeface="Calibri" pitchFamily="34" charset="0"/>
-                <a:ea typeface="Calibri" pitchFamily="34" charset="-122"/>
-                <a:cs typeface="Calibri" pitchFamily="34" charset="-120"/>
+                <a:latin typeface="IBM Plex Sans" pitchFamily="34" charset="0"/>
+                <a:ea typeface="IBM Plex Sans" pitchFamily="34" charset="-122"/>
+                <a:cs typeface="IBM Plex Sans" pitchFamily="34" charset="-120"/>
               </a:rPr>
               <a:t>Privacy is the product</a:t>
             </a:r>
-            <a:endParaRPr lang="en-US" sz="1700" dirty="0"/>
-          </a:p>
-        </p:txBody>
-      </p:sp>
-      <p:sp>
-        <p:nvSpPr>
-          <p:cNvPr id="11" name="Text 9"/>
+            <a:endParaRPr lang="en-US" sz="1600" dirty="0"/>
+          </a:p>
+        </p:txBody>
+      </p:sp>
+      <p:sp>
+        <p:nvSpPr>
+          <p:cNvPr id="14" name="Text 12"/>
           <p:cNvSpPr/>
           <p:nvPr/>
         </p:nvSpPr>
@@ -3232,23 +3507,23 @@
               <a:buNone/>
             </a:pPr>
             <a:r>
-              <a:rPr lang="en-US" sz="1400" dirty="0">
+              <a:rPr lang="en-US" sz="1300" dirty="0">
                 <a:solidFill>
                   <a:srgbClr val="000000"/>
                 </a:solidFill>
-                <a:latin typeface="Calibri" pitchFamily="34" charset="0"/>
-                <a:ea typeface="Calibri" pitchFamily="34" charset="-122"/>
-                <a:cs typeface="Calibri" pitchFamily="34" charset="-120"/>
+                <a:latin typeface="IBM Plex Sans" pitchFamily="34" charset="0"/>
+                <a:ea typeface="IBM Plex Sans" pitchFamily="34" charset="-122"/>
+                <a:cs typeface="IBM Plex Sans" pitchFamily="34" charset="-120"/>
               </a:rPr>
               <a:t>entire home 2.4x private</a:t>
             </a:r>
-            <a:endParaRPr lang="en-US" sz="1400" dirty="0"/>
-          </a:p>
-        </p:txBody>
-      </p:sp>
-      <p:sp>
-        <p:nvSpPr>
-          <p:cNvPr id="12" name="Shape 10"/>
+            <a:endParaRPr lang="en-US" sz="1300" dirty="0"/>
+          </a:p>
+        </p:txBody>
+      </p:sp>
+      <p:sp>
+        <p:nvSpPr>
+          <p:cNvPr id="15" name="Shape 13"/>
           <p:cNvSpPr/>
           <p:nvPr/>
         </p:nvSpPr>
@@ -3282,52 +3557,77 @@
       </p:sp>
       <p:sp>
         <p:nvSpPr>
-          <p:cNvPr id="13" name="Text 11"/>
-          <p:cNvSpPr/>
-          <p:nvPr/>
-        </p:nvSpPr>
-        <p:spPr>
-          <a:xfrm>
-            <a:off x="8357616" y="1865376"/>
-            <a:ext cx="914400" cy="402336"/>
-          </a:xfrm>
-          <a:prstGeom prst="rect">
-            <a:avLst/>
-          </a:prstGeom>
-          <a:noFill/>
-          <a:ln/>
-        </p:spPr>
-        <p:txBody>
-          <a:bodyPr wrap="square" lIns="0" tIns="0" rIns="0" bIns="0" rtlCol="0" anchor="ctr"/>
-          <a:lstStyle/>
-          <a:p>
-            <a:pPr indent="0" marL="0">
-              <a:buNone/>
-            </a:pPr>
-            <a:r>
-              <a:rPr lang="en-US" sz="2200" b="1" dirty="0">
+          <p:cNvPr id="16" name="Shape 14"/>
+          <p:cNvSpPr/>
+          <p:nvPr/>
+        </p:nvSpPr>
+        <p:spPr>
+          <a:xfrm>
+            <a:off x="8357616" y="1938528"/>
+            <a:ext cx="146304" cy="146304"/>
+          </a:xfrm>
+          <a:prstGeom prst="ellipse">
+            <a:avLst/>
+          </a:prstGeom>
+          <a:solidFill>
+            <a:srgbClr val="57E3D8"/>
+          </a:solidFill>
+          <a:ln w="12700">
+            <a:solidFill>
+              <a:srgbClr val="333333"/>
+            </a:solidFill>
+            <a:prstDash val="solid"/>
+          </a:ln>
+        </p:spPr>
+      </p:sp>
+      <p:sp>
+        <p:nvSpPr>
+          <p:cNvPr id="17" name="Text 15"/>
+          <p:cNvSpPr/>
+          <p:nvPr/>
+        </p:nvSpPr>
+        <p:spPr>
+          <a:xfrm>
+            <a:off x="8595360" y="1828800"/>
+            <a:ext cx="914400" cy="384048"/>
+          </a:xfrm>
+          <a:prstGeom prst="rect">
+            <a:avLst/>
+          </a:prstGeom>
+          <a:noFill/>
+          <a:ln/>
+        </p:spPr>
+        <p:txBody>
+          <a:bodyPr wrap="square" lIns="0" tIns="0" rIns="0" bIns="0" rtlCol="0" anchor="ctr"/>
+          <a:lstStyle/>
+          <a:p>
+            <a:pPr indent="0" marL="0">
+              <a:buNone/>
+            </a:pPr>
+            <a:r>
+              <a:rPr lang="en-US" sz="2100" b="1" dirty="0">
                 <a:solidFill>
                   <a:srgbClr val="9B78F7"/>
                 </a:solidFill>
-                <a:latin typeface="Cambria" pitchFamily="34" charset="0"/>
-                <a:ea typeface="Cambria" pitchFamily="34" charset="-122"/>
-                <a:cs typeface="Cambria" pitchFamily="34" charset="-120"/>
+                <a:latin typeface="IBM Plex Sans" pitchFamily="34" charset="0"/>
+                <a:ea typeface="IBM Plex Sans" pitchFamily="34" charset="-122"/>
+                <a:cs typeface="IBM Plex Sans" pitchFamily="34" charset="-120"/>
               </a:rPr>
               <a:t>03</a:t>
             </a:r>
-            <a:endParaRPr lang="en-US" sz="2200" dirty="0"/>
-          </a:p>
-        </p:txBody>
-      </p:sp>
-      <p:sp>
-        <p:nvSpPr>
-          <p:cNvPr id="14" name="Text 12"/>
-          <p:cNvSpPr/>
-          <p:nvPr/>
-        </p:nvSpPr>
-        <p:spPr>
-          <a:xfrm>
-            <a:off x="8357616" y="2377440"/>
+            <a:endParaRPr lang="en-US" sz="2100" dirty="0"/>
+          </a:p>
+        </p:txBody>
+      </p:sp>
+      <p:sp>
+        <p:nvSpPr>
+          <p:cNvPr id="18" name="Text 16"/>
+          <p:cNvSpPr/>
+          <p:nvPr/>
+        </p:nvSpPr>
+        <p:spPr>
+          <a:xfrm>
+            <a:off x="8357616" y="2359152"/>
             <a:ext cx="3017520" cy="694944"/>
           </a:xfrm>
           <a:prstGeom prst="rect">
@@ -3344,23 +3644,23 @@
               <a:buNone/>
             </a:pPr>
             <a:r>
-              <a:rPr lang="en-US" sz="1700" b="1" dirty="0">
+              <a:rPr lang="en-US" sz="1600" b="1" dirty="0">
                 <a:solidFill>
                   <a:srgbClr val="522CBA"/>
                 </a:solidFill>
-                <a:latin typeface="Calibri" pitchFamily="34" charset="0"/>
-                <a:ea typeface="Calibri" pitchFamily="34" charset="-122"/>
-                <a:cs typeface="Calibri" pitchFamily="34" charset="-120"/>
+                <a:latin typeface="IBM Plex Sans" pitchFamily="34" charset="0"/>
+                <a:ea typeface="IBM Plex Sans" pitchFamily="34" charset="-122"/>
+                <a:cs typeface="IBM Plex Sans" pitchFamily="34" charset="-120"/>
               </a:rPr>
               <a:t>The mean misleads</a:t>
             </a:r>
-            <a:endParaRPr lang="en-US" sz="1700" dirty="0"/>
-          </a:p>
-        </p:txBody>
-      </p:sp>
-      <p:sp>
-        <p:nvSpPr>
-          <p:cNvPr id="15" name="Text 13"/>
+            <a:endParaRPr lang="en-US" sz="1600" dirty="0"/>
+          </a:p>
+        </p:txBody>
+      </p:sp>
+      <p:sp>
+        <p:nvSpPr>
+          <p:cNvPr id="19" name="Text 17"/>
           <p:cNvSpPr/>
           <p:nvPr/>
         </p:nvSpPr>
@@ -3383,23 +3683,23 @@
               <a:buNone/>
             </a:pPr>
             <a:r>
-              <a:rPr lang="en-US" sz="1400" dirty="0">
+              <a:rPr lang="en-US" sz="1300" dirty="0">
                 <a:solidFill>
                   <a:srgbClr val="000000"/>
                 </a:solidFill>
-                <a:latin typeface="Calibri" pitchFamily="34" charset="0"/>
-                <a:ea typeface="Calibri" pitchFamily="34" charset="-122"/>
-                <a:cs typeface="Calibri" pitchFamily="34" charset="-120"/>
-              </a:rPr>
-              <a:t>$152 vs $105 median</a:t>
-            </a:r>
-            <a:endParaRPr lang="en-US" sz="1400" dirty="0"/>
-          </a:p>
-        </p:txBody>
-      </p:sp>
-      <p:sp>
-        <p:nvSpPr>
-          <p:cNvPr id="16" name="Shape 14"/>
+                <a:latin typeface="IBM Plex Sans" pitchFamily="34" charset="0"/>
+                <a:ea typeface="IBM Plex Sans" pitchFamily="34" charset="-122"/>
+                <a:cs typeface="IBM Plex Sans" pitchFamily="34" charset="-120"/>
+              </a:rPr>
+              <a:t>$152 against $105 median</a:t>
+            </a:r>
+            <a:endParaRPr lang="en-US" sz="1300" dirty="0"/>
+          </a:p>
+        </p:txBody>
+      </p:sp>
+      <p:sp>
+        <p:nvSpPr>
+          <p:cNvPr id="20" name="Shape 18"/>
           <p:cNvSpPr/>
           <p:nvPr/>
         </p:nvSpPr>
@@ -3433,52 +3733,77 @@
       </p:sp>
       <p:sp>
         <p:nvSpPr>
-          <p:cNvPr id="17" name="Text 15"/>
-          <p:cNvSpPr/>
-          <p:nvPr/>
-        </p:nvSpPr>
-        <p:spPr>
-          <a:xfrm>
-            <a:off x="841248" y="4078224"/>
-            <a:ext cx="914400" cy="402336"/>
-          </a:xfrm>
-          <a:prstGeom prst="rect">
-            <a:avLst/>
-          </a:prstGeom>
-          <a:noFill/>
-          <a:ln/>
-        </p:spPr>
-        <p:txBody>
-          <a:bodyPr wrap="square" lIns="0" tIns="0" rIns="0" bIns="0" rtlCol="0" anchor="ctr"/>
-          <a:lstStyle/>
-          <a:p>
-            <a:pPr indent="0" marL="0">
-              <a:buNone/>
-            </a:pPr>
-            <a:r>
-              <a:rPr lang="en-US" sz="2200" b="1" dirty="0">
+          <p:cNvPr id="21" name="Shape 19"/>
+          <p:cNvSpPr/>
+          <p:nvPr/>
+        </p:nvSpPr>
+        <p:spPr>
+          <a:xfrm>
+            <a:off x="841248" y="4151376"/>
+            <a:ext cx="146304" cy="146304"/>
+          </a:xfrm>
+          <a:prstGeom prst="ellipse">
+            <a:avLst/>
+          </a:prstGeom>
+          <a:solidFill>
+            <a:srgbClr val="F4A664"/>
+          </a:solidFill>
+          <a:ln w="12700">
+            <a:solidFill>
+              <a:srgbClr val="333333"/>
+            </a:solidFill>
+            <a:prstDash val="solid"/>
+          </a:ln>
+        </p:spPr>
+      </p:sp>
+      <p:sp>
+        <p:nvSpPr>
+          <p:cNvPr id="22" name="Text 20"/>
+          <p:cNvSpPr/>
+          <p:nvPr/>
+        </p:nvSpPr>
+        <p:spPr>
+          <a:xfrm>
+            <a:off x="1078992" y="4041648"/>
+            <a:ext cx="914400" cy="384048"/>
+          </a:xfrm>
+          <a:prstGeom prst="rect">
+            <a:avLst/>
+          </a:prstGeom>
+          <a:noFill/>
+          <a:ln/>
+        </p:spPr>
+        <p:txBody>
+          <a:bodyPr wrap="square" lIns="0" tIns="0" rIns="0" bIns="0" rtlCol="0" anchor="ctr"/>
+          <a:lstStyle/>
+          <a:p>
+            <a:pPr indent="0" marL="0">
+              <a:buNone/>
+            </a:pPr>
+            <a:r>
+              <a:rPr lang="en-US" sz="2100" b="1" dirty="0">
                 <a:solidFill>
                   <a:srgbClr val="9B78F7"/>
                 </a:solidFill>
-                <a:latin typeface="Cambria" pitchFamily="34" charset="0"/>
-                <a:ea typeface="Cambria" pitchFamily="34" charset="-122"/>
-                <a:cs typeface="Cambria" pitchFamily="34" charset="-120"/>
+                <a:latin typeface="IBM Plex Sans" pitchFamily="34" charset="0"/>
+                <a:ea typeface="IBM Plex Sans" pitchFamily="34" charset="-122"/>
+                <a:cs typeface="IBM Plex Sans" pitchFamily="34" charset="-120"/>
               </a:rPr>
               <a:t>04</a:t>
             </a:r>
-            <a:endParaRPr lang="en-US" sz="2200" dirty="0"/>
-          </a:p>
-        </p:txBody>
-      </p:sp>
-      <p:sp>
-        <p:nvSpPr>
-          <p:cNvPr id="18" name="Text 16"/>
-          <p:cNvSpPr/>
-          <p:nvPr/>
-        </p:nvSpPr>
-        <p:spPr>
-          <a:xfrm>
-            <a:off x="841248" y="4590288"/>
+            <a:endParaRPr lang="en-US" sz="2100" dirty="0"/>
+          </a:p>
+        </p:txBody>
+      </p:sp>
+      <p:sp>
+        <p:nvSpPr>
+          <p:cNvPr id="23" name="Text 21"/>
+          <p:cNvSpPr/>
+          <p:nvPr/>
+        </p:nvSpPr>
+        <p:spPr>
+          <a:xfrm>
+            <a:off x="841248" y="4572000"/>
             <a:ext cx="3017520" cy="694944"/>
           </a:xfrm>
           <a:prstGeom prst="rect">
@@ -3495,23 +3820,23 @@
               <a:buNone/>
             </a:pPr>
             <a:r>
-              <a:rPr lang="en-US" sz="1700" b="1" dirty="0">
+              <a:rPr lang="en-US" sz="1600" b="1" dirty="0">
                 <a:solidFill>
                   <a:srgbClr val="522CBA"/>
                 </a:solidFill>
-                <a:latin typeface="Calibri" pitchFamily="34" charset="0"/>
-                <a:ea typeface="Calibri" pitchFamily="34" charset="-122"/>
-                <a:cs typeface="Calibri" pitchFamily="34" charset="-120"/>
-              </a:rPr>
-              <a:t>Activity ≠ price</a:t>
-            </a:r>
-            <a:endParaRPr lang="en-US" sz="1700" dirty="0"/>
-          </a:p>
-        </p:txBody>
-      </p:sp>
-      <p:sp>
-        <p:nvSpPr>
-          <p:cNvPr id="19" name="Text 17"/>
+                <a:latin typeface="IBM Plex Sans" pitchFamily="34" charset="0"/>
+                <a:ea typeface="IBM Plex Sans" pitchFamily="34" charset="-122"/>
+                <a:cs typeface="IBM Plex Sans" pitchFamily="34" charset="-120"/>
+              </a:rPr>
+              <a:t>Activity is not price</a:t>
+            </a:r>
+            <a:endParaRPr lang="en-US" sz="1600" dirty="0"/>
+          </a:p>
+        </p:txBody>
+      </p:sp>
+      <p:sp>
+        <p:nvSpPr>
+          <p:cNvPr id="24" name="Text 22"/>
           <p:cNvSpPr/>
           <p:nvPr/>
         </p:nvSpPr>
@@ -3534,23 +3859,23 @@
               <a:buNone/>
             </a:pPr>
             <a:r>
-              <a:rPr lang="en-US" sz="1400" dirty="0">
+              <a:rPr lang="en-US" sz="1300" dirty="0">
                 <a:solidFill>
                   <a:srgbClr val="000000"/>
                 </a:solidFill>
-                <a:latin typeface="Calibri" pitchFamily="34" charset="0"/>
-                <a:ea typeface="Calibri" pitchFamily="34" charset="-122"/>
-                <a:cs typeface="Calibri" pitchFamily="34" charset="-120"/>
+                <a:latin typeface="IBM Plex Sans" pitchFamily="34" charset="0"/>
+                <a:ea typeface="IBM Plex Sans" pitchFamily="34" charset="-122"/>
+                <a:cs typeface="IBM Plex Sans" pitchFamily="34" charset="-120"/>
               </a:rPr>
               <a:t>all correlations under 0.08</a:t>
             </a:r>
-            <a:endParaRPr lang="en-US" sz="1400" dirty="0"/>
-          </a:p>
-        </p:txBody>
-      </p:sp>
-      <p:sp>
-        <p:nvSpPr>
-          <p:cNvPr id="20" name="Shape 18"/>
+            <a:endParaRPr lang="en-US" sz="1300" dirty="0"/>
+          </a:p>
+        </p:txBody>
+      </p:sp>
+      <p:sp>
+        <p:nvSpPr>
+          <p:cNvPr id="25" name="Shape 23"/>
           <p:cNvSpPr/>
           <p:nvPr/>
         </p:nvSpPr>
@@ -3584,52 +3909,77 @@
       </p:sp>
       <p:sp>
         <p:nvSpPr>
-          <p:cNvPr id="21" name="Text 19"/>
-          <p:cNvSpPr/>
-          <p:nvPr/>
-        </p:nvSpPr>
-        <p:spPr>
-          <a:xfrm>
-            <a:off x="4599432" y="4078224"/>
-            <a:ext cx="914400" cy="402336"/>
-          </a:xfrm>
-          <a:prstGeom prst="rect">
-            <a:avLst/>
-          </a:prstGeom>
-          <a:noFill/>
-          <a:ln/>
-        </p:spPr>
-        <p:txBody>
-          <a:bodyPr wrap="square" lIns="0" tIns="0" rIns="0" bIns="0" rtlCol="0" anchor="ctr"/>
-          <a:lstStyle/>
-          <a:p>
-            <a:pPr indent="0" marL="0">
-              <a:buNone/>
-            </a:pPr>
-            <a:r>
-              <a:rPr lang="en-US" sz="2200" b="1" dirty="0">
+          <p:cNvPr id="26" name="Shape 24"/>
+          <p:cNvSpPr/>
+          <p:nvPr/>
+        </p:nvSpPr>
+        <p:spPr>
+          <a:xfrm>
+            <a:off x="4599432" y="4151376"/>
+            <a:ext cx="146304" cy="146304"/>
+          </a:xfrm>
+          <a:prstGeom prst="ellipse">
+            <a:avLst/>
+          </a:prstGeom>
+          <a:solidFill>
+            <a:srgbClr val="57E3D8"/>
+          </a:solidFill>
+          <a:ln w="12700">
+            <a:solidFill>
+              <a:srgbClr val="333333"/>
+            </a:solidFill>
+            <a:prstDash val="solid"/>
+          </a:ln>
+        </p:spPr>
+      </p:sp>
+      <p:sp>
+        <p:nvSpPr>
+          <p:cNvPr id="27" name="Text 25"/>
+          <p:cNvSpPr/>
+          <p:nvPr/>
+        </p:nvSpPr>
+        <p:spPr>
+          <a:xfrm>
+            <a:off x="4837176" y="4041648"/>
+            <a:ext cx="914400" cy="384048"/>
+          </a:xfrm>
+          <a:prstGeom prst="rect">
+            <a:avLst/>
+          </a:prstGeom>
+          <a:noFill/>
+          <a:ln/>
+        </p:spPr>
+        <p:txBody>
+          <a:bodyPr wrap="square" lIns="0" tIns="0" rIns="0" bIns="0" rtlCol="0" anchor="ctr"/>
+          <a:lstStyle/>
+          <a:p>
+            <a:pPr indent="0" marL="0">
+              <a:buNone/>
+            </a:pPr>
+            <a:r>
+              <a:rPr lang="en-US" sz="2100" b="1" dirty="0">
                 <a:solidFill>
                   <a:srgbClr val="9B78F7"/>
                 </a:solidFill>
-                <a:latin typeface="Cambria" pitchFamily="34" charset="0"/>
-                <a:ea typeface="Cambria" pitchFamily="34" charset="-122"/>
-                <a:cs typeface="Cambria" pitchFamily="34" charset="-120"/>
+                <a:latin typeface="IBM Plex Sans" pitchFamily="34" charset="0"/>
+                <a:ea typeface="IBM Plex Sans" pitchFamily="34" charset="-122"/>
+                <a:cs typeface="IBM Plex Sans" pitchFamily="34" charset="-120"/>
               </a:rPr>
               <a:t>05</a:t>
             </a:r>
-            <a:endParaRPr lang="en-US" sz="2200" dirty="0"/>
-          </a:p>
-        </p:txBody>
-      </p:sp>
-      <p:sp>
-        <p:nvSpPr>
-          <p:cNvPr id="22" name="Text 20"/>
-          <p:cNvSpPr/>
-          <p:nvPr/>
-        </p:nvSpPr>
-        <p:spPr>
-          <a:xfrm>
-            <a:off x="4599432" y="4590288"/>
+            <a:endParaRPr lang="en-US" sz="2100" dirty="0"/>
+          </a:p>
+        </p:txBody>
+      </p:sp>
+      <p:sp>
+        <p:nvSpPr>
+          <p:cNvPr id="28" name="Text 26"/>
+          <p:cNvSpPr/>
+          <p:nvPr/>
+        </p:nvSpPr>
+        <p:spPr>
+          <a:xfrm>
+            <a:off x="4599432" y="4572000"/>
             <a:ext cx="3017520" cy="694944"/>
           </a:xfrm>
           <a:prstGeom prst="rect">
@@ -3646,23 +3996,23 @@
               <a:buNone/>
             </a:pPr>
             <a:r>
-              <a:rPr lang="en-US" sz="1700" b="1" dirty="0">
+              <a:rPr lang="en-US" sz="1600" b="1" dirty="0">
                 <a:solidFill>
                   <a:srgbClr val="522CBA"/>
                 </a:solidFill>
-                <a:latin typeface="Calibri" pitchFamily="34" charset="0"/>
-                <a:ea typeface="Calibri" pitchFamily="34" charset="-122"/>
-                <a:cs typeface="Calibri" pitchFamily="34" charset="-120"/>
+                <a:latin typeface="IBM Plex Sans" pitchFamily="34" charset="0"/>
+                <a:ea typeface="IBM Plex Sans" pitchFamily="34" charset="-122"/>
+                <a:cs typeface="IBM Plex Sans" pitchFamily="34" charset="-120"/>
               </a:rPr>
               <a:t>A fifth are invisible</a:t>
             </a:r>
-            <a:endParaRPr lang="en-US" sz="1700" dirty="0"/>
-          </a:p>
-        </p:txBody>
-      </p:sp>
-      <p:sp>
-        <p:nvSpPr>
-          <p:cNvPr id="23" name="Text 21"/>
+            <a:endParaRPr lang="en-US" sz="1600" dirty="0"/>
+          </a:p>
+        </p:txBody>
+      </p:sp>
+      <p:sp>
+        <p:nvSpPr>
+          <p:cNvPr id="29" name="Text 27"/>
           <p:cNvSpPr/>
           <p:nvPr/>
         </p:nvSpPr>
@@ -3685,23 +4035,23 @@
               <a:buNone/>
             </a:pPr>
             <a:r>
-              <a:rPr lang="en-US" sz="1400" dirty="0">
+              <a:rPr lang="en-US" sz="1300" dirty="0">
                 <a:solidFill>
                   <a:srgbClr val="000000"/>
                 </a:solidFill>
-                <a:latin typeface="Calibri" pitchFamily="34" charset="0"/>
-                <a:ea typeface="Calibri" pitchFamily="34" charset="-122"/>
-                <a:cs typeface="Calibri" pitchFamily="34" charset="-120"/>
+                <a:latin typeface="IBM Plex Sans" pitchFamily="34" charset="0"/>
+                <a:ea typeface="IBM Plex Sans" pitchFamily="34" charset="-122"/>
+                <a:cs typeface="IBM Plex Sans" pitchFamily="34" charset="-120"/>
               </a:rPr>
               <a:t>20.3% never reviewed</a:t>
             </a:r>
-            <a:endParaRPr lang="en-US" sz="1400" dirty="0"/>
-          </a:p>
-        </p:txBody>
-      </p:sp>
-      <p:sp>
-        <p:nvSpPr>
-          <p:cNvPr id="24" name="Shape 22"/>
+            <a:endParaRPr lang="en-US" sz="1300" dirty="0"/>
+          </a:p>
+        </p:txBody>
+      </p:sp>
+      <p:sp>
+        <p:nvSpPr>
+          <p:cNvPr id="30" name="Shape 28"/>
           <p:cNvSpPr/>
           <p:nvPr/>
         </p:nvSpPr>
@@ -3735,52 +4085,77 @@
       </p:sp>
       <p:sp>
         <p:nvSpPr>
-          <p:cNvPr id="25" name="Text 23"/>
-          <p:cNvSpPr/>
-          <p:nvPr/>
-        </p:nvSpPr>
-        <p:spPr>
-          <a:xfrm>
-            <a:off x="8357616" y="4078224"/>
-            <a:ext cx="914400" cy="402336"/>
-          </a:xfrm>
-          <a:prstGeom prst="rect">
-            <a:avLst/>
-          </a:prstGeom>
-          <a:noFill/>
-          <a:ln/>
-        </p:spPr>
-        <p:txBody>
-          <a:bodyPr wrap="square" lIns="0" tIns="0" rIns="0" bIns="0" rtlCol="0" anchor="ctr"/>
-          <a:lstStyle/>
-          <a:p>
-            <a:pPr indent="0" marL="0">
-              <a:buNone/>
-            </a:pPr>
-            <a:r>
-              <a:rPr lang="en-US" sz="2200" b="1" dirty="0">
+          <p:cNvPr id="31" name="Shape 29"/>
+          <p:cNvSpPr/>
+          <p:nvPr/>
+        </p:nvSpPr>
+        <p:spPr>
+          <a:xfrm>
+            <a:off x="8357616" y="4151376"/>
+            <a:ext cx="146304" cy="146304"/>
+          </a:xfrm>
+          <a:prstGeom prst="ellipse">
+            <a:avLst/>
+          </a:prstGeom>
+          <a:solidFill>
+            <a:srgbClr val="F4A664"/>
+          </a:solidFill>
+          <a:ln w="12700">
+            <a:solidFill>
+              <a:srgbClr val="333333"/>
+            </a:solidFill>
+            <a:prstDash val="solid"/>
+          </a:ln>
+        </p:spPr>
+      </p:sp>
+      <p:sp>
+        <p:nvSpPr>
+          <p:cNvPr id="32" name="Text 30"/>
+          <p:cNvSpPr/>
+          <p:nvPr/>
+        </p:nvSpPr>
+        <p:spPr>
+          <a:xfrm>
+            <a:off x="8595360" y="4041648"/>
+            <a:ext cx="914400" cy="384048"/>
+          </a:xfrm>
+          <a:prstGeom prst="rect">
+            <a:avLst/>
+          </a:prstGeom>
+          <a:noFill/>
+          <a:ln/>
+        </p:spPr>
+        <p:txBody>
+          <a:bodyPr wrap="square" lIns="0" tIns="0" rIns="0" bIns="0" rtlCol="0" anchor="ctr"/>
+          <a:lstStyle/>
+          <a:p>
+            <a:pPr indent="0" marL="0">
+              <a:buNone/>
+            </a:pPr>
+            <a:r>
+              <a:rPr lang="en-US" sz="2100" b="1" dirty="0">
                 <a:solidFill>
                   <a:srgbClr val="9B78F7"/>
                 </a:solidFill>
-                <a:latin typeface="Cambria" pitchFamily="34" charset="0"/>
-                <a:ea typeface="Cambria" pitchFamily="34" charset="-122"/>
-                <a:cs typeface="Cambria" pitchFamily="34" charset="-120"/>
+                <a:latin typeface="IBM Plex Sans" pitchFamily="34" charset="0"/>
+                <a:ea typeface="IBM Plex Sans" pitchFamily="34" charset="-122"/>
+                <a:cs typeface="IBM Plex Sans" pitchFamily="34" charset="-120"/>
               </a:rPr>
               <a:t>06</a:t>
             </a:r>
-            <a:endParaRPr lang="en-US" sz="2200" dirty="0"/>
-          </a:p>
-        </p:txBody>
-      </p:sp>
-      <p:sp>
-        <p:nvSpPr>
-          <p:cNvPr id="26" name="Text 24"/>
-          <p:cNvSpPr/>
-          <p:nvPr/>
-        </p:nvSpPr>
-        <p:spPr>
-          <a:xfrm>
-            <a:off x="8357616" y="4590288"/>
+            <a:endParaRPr lang="en-US" sz="2100" dirty="0"/>
+          </a:p>
+        </p:txBody>
+      </p:sp>
+      <p:sp>
+        <p:nvSpPr>
+          <p:cNvPr id="33" name="Text 31"/>
+          <p:cNvSpPr/>
+          <p:nvPr/>
+        </p:nvSpPr>
+        <p:spPr>
+          <a:xfrm>
+            <a:off x="8357616" y="4572000"/>
             <a:ext cx="3017520" cy="694944"/>
           </a:xfrm>
           <a:prstGeom prst="rect">
@@ -3797,23 +4172,23 @@
               <a:buNone/>
             </a:pPr>
             <a:r>
-              <a:rPr lang="en-US" sz="1700" b="1" dirty="0">
+              <a:rPr lang="en-US" sz="1600" b="1" dirty="0">
                 <a:solidFill>
                   <a:srgbClr val="522CBA"/>
                 </a:solidFill>
-                <a:latin typeface="Calibri" pitchFamily="34" charset="0"/>
-                <a:ea typeface="Calibri" pitchFamily="34" charset="-122"/>
-                <a:cs typeface="Calibri" pitchFamily="34" charset="-120"/>
+                <a:latin typeface="IBM Plex Sans" pitchFamily="34" charset="0"/>
+                <a:ea typeface="IBM Plex Sans" pitchFamily="34" charset="-122"/>
+                <a:cs typeface="IBM Plex Sans" pitchFamily="34" charset="-120"/>
               </a:rPr>
               <a:t>Professionals have arrived</a:t>
             </a:r>
-            <a:endParaRPr lang="en-US" sz="1700" dirty="0"/>
-          </a:p>
-        </p:txBody>
-      </p:sp>
-      <p:sp>
-        <p:nvSpPr>
-          <p:cNvPr id="27" name="Text 25"/>
+            <a:endParaRPr lang="en-US" sz="1600" dirty="0"/>
+          </a:p>
+        </p:txBody>
+      </p:sp>
+      <p:sp>
+        <p:nvSpPr>
+          <p:cNvPr id="34" name="Text 32"/>
           <p:cNvSpPr/>
           <p:nvPr/>
         </p:nvSpPr>
@@ -3836,17 +4211,17 @@
               <a:buNone/>
             </a:pPr>
             <a:r>
-              <a:rPr lang="en-US" sz="1400" dirty="0">
+              <a:rPr lang="en-US" sz="1300" dirty="0">
                 <a:solidFill>
                   <a:srgbClr val="000000"/>
                 </a:solidFill>
-                <a:latin typeface="Calibri" pitchFamily="34" charset="0"/>
-                <a:ea typeface="Calibri" pitchFamily="34" charset="-122"/>
-                <a:cs typeface="Calibri" pitchFamily="34" charset="-120"/>
+                <a:latin typeface="IBM Plex Sans" pitchFamily="34" charset="0"/>
+                <a:ea typeface="IBM Plex Sans" pitchFamily="34" charset="-122"/>
+                <a:cs typeface="IBM Plex Sans" pitchFamily="34" charset="-120"/>
               </a:rPr>
               <a:t>Sonder 327 · median host 1</a:t>
             </a:r>
-            <a:endParaRPr lang="en-US" sz="1400" dirty="0"/>
+            <a:endParaRPr lang="en-US" sz="1300" dirty="0"/>
           </a:p>
         </p:txBody>
       </p:sp>
@@ -3907,30 +4282,55 @@
               <a:buNone/>
             </a:pPr>
             <a:r>
-              <a:rPr lang="en-US" sz="3600" b="1" dirty="0">
+              <a:rPr lang="en-US" sz="3400" b="1" dirty="0">
                 <a:solidFill>
                   <a:srgbClr val="522CBA"/>
                 </a:solidFill>
-                <a:latin typeface="Cambria" pitchFamily="34" charset="0"/>
-                <a:ea typeface="Cambria" pitchFamily="34" charset="-122"/>
-                <a:cs typeface="Cambria" pitchFamily="34" charset="-120"/>
-              </a:rPr>
-              <a:t>What I'd do about it</a:t>
-            </a:r>
-            <a:endParaRPr lang="en-US" sz="3600" dirty="0"/>
-          </a:p>
-        </p:txBody>
-      </p:sp>
-      <p:sp>
-        <p:nvSpPr>
-          <p:cNvPr id="3" name="Text 1"/>
-          <p:cNvSpPr/>
-          <p:nvPr/>
-        </p:nvSpPr>
-        <p:spPr>
-          <a:xfrm>
-            <a:off x="566928" y="1042416"/>
-            <a:ext cx="11064240" cy="329184"/>
+                <a:latin typeface="IBM Plex Sans" pitchFamily="34" charset="0"/>
+                <a:ea typeface="IBM Plex Sans" pitchFamily="34" charset="-122"/>
+                <a:cs typeface="IBM Plex Sans" pitchFamily="34" charset="-120"/>
+              </a:rPr>
+              <a:t>What I would do about it</a:t>
+            </a:r>
+            <a:endParaRPr lang="en-US" sz="3400" dirty="0"/>
+          </a:p>
+        </p:txBody>
+      </p:sp>
+      <p:sp>
+        <p:nvSpPr>
+          <p:cNvPr id="3" name="Shape 1"/>
+          <p:cNvSpPr/>
+          <p:nvPr/>
+        </p:nvSpPr>
+        <p:spPr>
+          <a:xfrm>
+            <a:off x="585216" y="1138428"/>
+            <a:ext cx="146304" cy="146304"/>
+          </a:xfrm>
+          <a:prstGeom prst="ellipse">
+            <a:avLst/>
+          </a:prstGeom>
+          <a:solidFill>
+            <a:srgbClr val="57E3D8"/>
+          </a:solidFill>
+          <a:ln w="12700">
+            <a:solidFill>
+              <a:srgbClr val="333333"/>
+            </a:solidFill>
+            <a:prstDash val="solid"/>
+          </a:ln>
+        </p:spPr>
+      </p:sp>
+      <p:sp>
+        <p:nvSpPr>
+          <p:cNvPr id="4" name="Text 2"/>
+          <p:cNvSpPr/>
+          <p:nvPr/>
+        </p:nvSpPr>
+        <p:spPr>
+          <a:xfrm>
+            <a:off x="859536" y="1042416"/>
+            <a:ext cx="10789920" cy="329184"/>
           </a:xfrm>
           <a:prstGeom prst="rect">
             <a:avLst/>
@@ -3950,11 +4350,11 @@
                 <a:solidFill>
                   <a:srgbClr val="9B78F7"/>
                 </a:solidFill>
-                <a:latin typeface="Calibri" pitchFamily="34" charset="0"/>
-                <a:ea typeface="Calibri" pitchFamily="34" charset="-122"/>
-                <a:cs typeface="Calibri" pitchFamily="34" charset="-120"/>
-              </a:rPr>
-              <a:t>Each tied to a finding</a:t>
+                <a:latin typeface="IBM Plex Sans" pitchFamily="34" charset="0"/>
+                <a:ea typeface="IBM Plex Sans" pitchFamily="34" charset="-122"/>
+                <a:cs typeface="IBM Plex Sans" pitchFamily="34" charset="-120"/>
+              </a:rPr>
+              <a:t>Each one is tied to a finding</a:t>
             </a:r>
             <a:endParaRPr lang="en-US" sz="1500" dirty="0"/>
           </a:p>
@@ -3962,7 +4362,7 @@
       </p:sp>
       <p:sp>
         <p:nvSpPr>
-          <p:cNvPr id="4" name="Shape 2"/>
+          <p:cNvPr id="5" name="Shape 3"/>
           <p:cNvSpPr/>
           <p:nvPr/>
         </p:nvSpPr>
@@ -3996,7 +4396,7 @@
       </p:sp>
       <p:sp>
         <p:nvSpPr>
-          <p:cNvPr id="5" name="Shape 3"/>
+          <p:cNvPr id="6" name="Shape 4"/>
           <p:cNvSpPr/>
           <p:nvPr/>
         </p:nvSpPr>
@@ -4021,7 +4421,7 @@
       </p:sp>
       <p:sp>
         <p:nvSpPr>
-          <p:cNvPr id="6" name="Text 4"/>
+          <p:cNvPr id="7" name="Text 5"/>
           <p:cNvSpPr/>
           <p:nvPr/>
         </p:nvSpPr>
@@ -4048,9 +4448,9 @@
                 <a:solidFill>
                   <a:srgbClr val="FFFFFF"/>
                 </a:solidFill>
-                <a:latin typeface="Calibri" pitchFamily="34" charset="0"/>
-                <a:ea typeface="Calibri" pitchFamily="34" charset="-122"/>
-                <a:cs typeface="Calibri" pitchFamily="34" charset="-120"/>
+                <a:latin typeface="IBM Plex Sans" pitchFamily="34" charset="0"/>
+                <a:ea typeface="IBM Plex Sans" pitchFamily="34" charset="-122"/>
+                <a:cs typeface="IBM Plex Sans" pitchFamily="34" charset="-120"/>
               </a:rPr>
               <a:t>1</a:t>
             </a:r>
@@ -4060,7 +4460,7 @@
       </p:sp>
       <p:sp>
         <p:nvSpPr>
-          <p:cNvPr id="7" name="Text 5"/>
+          <p:cNvPr id="8" name="Text 6"/>
           <p:cNvSpPr/>
           <p:nvPr/>
         </p:nvSpPr>
@@ -4083,23 +4483,23 @@
               <a:buNone/>
             </a:pPr>
             <a:r>
-              <a:rPr lang="en-US" sz="1700" b="1" dirty="0">
+              <a:rPr lang="en-US" sz="1600" b="1" dirty="0">
                 <a:solidFill>
                   <a:srgbClr val="522CBA"/>
                 </a:solidFill>
-                <a:latin typeface="Calibri" pitchFamily="34" charset="0"/>
-                <a:ea typeface="Calibri" pitchFamily="34" charset="-122"/>
-                <a:cs typeface="Calibri" pitchFamily="34" charset="-120"/>
+                <a:latin typeface="IBM Plex Sans" pitchFamily="34" charset="0"/>
+                <a:ea typeface="IBM Plex Sans" pitchFamily="34" charset="-122"/>
+                <a:cs typeface="IBM Plex Sans" pitchFamily="34" charset="-120"/>
               </a:rPr>
               <a:t>Price on location and room type</a:t>
             </a:r>
-            <a:endParaRPr lang="en-US" sz="1700" dirty="0"/>
-          </a:p>
-        </p:txBody>
-      </p:sp>
-      <p:sp>
-        <p:nvSpPr>
-          <p:cNvPr id="8" name="Text 6"/>
+            <a:endParaRPr lang="en-US" sz="1600" dirty="0"/>
+          </a:p>
+        </p:txBody>
+      </p:sp>
+      <p:sp>
+        <p:nvSpPr>
+          <p:cNvPr id="9" name="Text 7"/>
           <p:cNvSpPr/>
           <p:nvPr/>
         </p:nvSpPr>
@@ -4122,23 +4522,23 @@
               <a:buNone/>
             </a:pPr>
             <a:r>
-              <a:rPr lang="en-US" sz="1400" dirty="0">
+              <a:rPr lang="en-US" sz="1300" dirty="0">
                 <a:solidFill>
                   <a:srgbClr val="000000"/>
                 </a:solidFill>
-                <a:latin typeface="Calibri" pitchFamily="34" charset="0"/>
-                <a:ea typeface="Calibri" pitchFamily="34" charset="-122"/>
-                <a:cs typeface="Calibri" pitchFamily="34" charset="-120"/>
+                <a:latin typeface="IBM Plex Sans" pitchFamily="34" charset="0"/>
+                <a:ea typeface="IBM Plex Sans" pitchFamily="34" charset="-122"/>
+                <a:cs typeface="IBM Plex Sans" pitchFamily="34" charset="-120"/>
               </a:rPr>
               <a:t>drop the features that predict nothing</a:t>
             </a:r>
-            <a:endParaRPr lang="en-US" sz="1400" dirty="0"/>
-          </a:p>
-        </p:txBody>
-      </p:sp>
-      <p:sp>
-        <p:nvSpPr>
-          <p:cNvPr id="9" name="Shape 7"/>
+            <a:endParaRPr lang="en-US" sz="1300" dirty="0"/>
+          </a:p>
+        </p:txBody>
+      </p:sp>
+      <p:sp>
+        <p:nvSpPr>
+          <p:cNvPr id="10" name="Shape 8"/>
           <p:cNvSpPr/>
           <p:nvPr/>
         </p:nvSpPr>
@@ -4172,7 +4572,7 @@
       </p:sp>
       <p:sp>
         <p:nvSpPr>
-          <p:cNvPr id="10" name="Shape 8"/>
+          <p:cNvPr id="11" name="Shape 9"/>
           <p:cNvSpPr/>
           <p:nvPr/>
         </p:nvSpPr>
@@ -4197,7 +4597,7 @@
       </p:sp>
       <p:sp>
         <p:nvSpPr>
-          <p:cNvPr id="11" name="Text 9"/>
+          <p:cNvPr id="12" name="Text 10"/>
           <p:cNvSpPr/>
           <p:nvPr/>
         </p:nvSpPr>
@@ -4224,9 +4624,9 @@
                 <a:solidFill>
                   <a:srgbClr val="FFFFFF"/>
                 </a:solidFill>
-                <a:latin typeface="Calibri" pitchFamily="34" charset="0"/>
-                <a:ea typeface="Calibri" pitchFamily="34" charset="-122"/>
-                <a:cs typeface="Calibri" pitchFamily="34" charset="-120"/>
+                <a:latin typeface="IBM Plex Sans" pitchFamily="34" charset="0"/>
+                <a:ea typeface="IBM Plex Sans" pitchFamily="34" charset="-122"/>
+                <a:cs typeface="IBM Plex Sans" pitchFamily="34" charset="-120"/>
               </a:rPr>
               <a:t>2</a:t>
             </a:r>
@@ -4236,7 +4636,7 @@
       </p:sp>
       <p:sp>
         <p:nvSpPr>
-          <p:cNvPr id="12" name="Text 10"/>
+          <p:cNvPr id="13" name="Text 11"/>
           <p:cNvSpPr/>
           <p:nvPr/>
         </p:nvSpPr>
@@ -4259,23 +4659,23 @@
               <a:buNone/>
             </a:pPr>
             <a:r>
-              <a:rPr lang="en-US" sz="1700" b="1" dirty="0">
+              <a:rPr lang="en-US" sz="1600" b="1" dirty="0">
                 <a:solidFill>
                   <a:srgbClr val="522CBA"/>
                 </a:solidFill>
-                <a:latin typeface="Calibri" pitchFamily="34" charset="0"/>
-                <a:ea typeface="Calibri" pitchFamily="34" charset="-122"/>
-                <a:cs typeface="Calibri" pitchFamily="34" charset="-120"/>
+                <a:latin typeface="IBM Plex Sans" pitchFamily="34" charset="0"/>
+                <a:ea typeface="IBM Plex Sans" pitchFamily="34" charset="-122"/>
+                <a:cs typeface="IBM Plex Sans" pitchFamily="34" charset="-120"/>
               </a:rPr>
               <a:t>Badge for new listings</a:t>
             </a:r>
-            <a:endParaRPr lang="en-US" sz="1700" dirty="0"/>
-          </a:p>
-        </p:txBody>
-      </p:sp>
-      <p:sp>
-        <p:nvSpPr>
-          <p:cNvPr id="13" name="Text 11"/>
+            <a:endParaRPr lang="en-US" sz="1600" dirty="0"/>
+          </a:p>
+        </p:txBody>
+      </p:sp>
+      <p:sp>
+        <p:nvSpPr>
+          <p:cNvPr id="14" name="Text 12"/>
           <p:cNvSpPr/>
           <p:nvPr/>
         </p:nvSpPr>
@@ -4298,23 +4698,23 @@
               <a:buNone/>
             </a:pPr>
             <a:r>
-              <a:rPr lang="en-US" sz="1400" dirty="0">
+              <a:rPr lang="en-US" sz="1300" dirty="0">
                 <a:solidFill>
                   <a:srgbClr val="000000"/>
                 </a:solidFill>
-                <a:latin typeface="Calibri" pitchFamily="34" charset="0"/>
-                <a:ea typeface="Calibri" pitchFamily="34" charset="-122"/>
-                <a:cs typeface="Calibri" pitchFamily="34" charset="-120"/>
+                <a:latin typeface="IBM Plex Sans" pitchFamily="34" charset="0"/>
+                <a:ea typeface="IBM Plex Sans" pitchFamily="34" charset="-122"/>
+                <a:cs typeface="IBM Plex Sans" pitchFamily="34" charset="-120"/>
               </a:rPr>
               <a:t>help the 20% with no reviews</a:t>
             </a:r>
-            <a:endParaRPr lang="en-US" sz="1400" dirty="0"/>
-          </a:p>
-        </p:txBody>
-      </p:sp>
-      <p:sp>
-        <p:nvSpPr>
-          <p:cNvPr id="14" name="Shape 12"/>
+            <a:endParaRPr lang="en-US" sz="1300" dirty="0"/>
+          </a:p>
+        </p:txBody>
+      </p:sp>
+      <p:sp>
+        <p:nvSpPr>
+          <p:cNvPr id="15" name="Shape 13"/>
           <p:cNvSpPr/>
           <p:nvPr/>
         </p:nvSpPr>
@@ -4348,7 +4748,7 @@
       </p:sp>
       <p:sp>
         <p:nvSpPr>
-          <p:cNvPr id="15" name="Shape 13"/>
+          <p:cNvPr id="16" name="Shape 14"/>
           <p:cNvSpPr/>
           <p:nvPr/>
         </p:nvSpPr>
@@ -4361,7 +4761,7 @@
             <a:avLst/>
           </a:prstGeom>
           <a:solidFill>
-            <a:srgbClr val="522CBA"/>
+            <a:srgbClr val="57E3D8"/>
           </a:solidFill>
           <a:ln w="12700">
             <a:solidFill>
@@ -4373,7 +4773,7 @@
       </p:sp>
       <p:sp>
         <p:nvSpPr>
-          <p:cNvPr id="16" name="Text 14"/>
+          <p:cNvPr id="17" name="Text 15"/>
           <p:cNvSpPr/>
           <p:nvPr/>
         </p:nvSpPr>
@@ -4398,11 +4798,11 @@
             <a:r>
               <a:rPr lang="en-US" sz="1500" b="1" dirty="0">
                 <a:solidFill>
-                  <a:srgbClr val="FFFFFF"/>
-                </a:solidFill>
-                <a:latin typeface="Calibri" pitchFamily="34" charset="0"/>
-                <a:ea typeface="Calibri" pitchFamily="34" charset="-122"/>
-                <a:cs typeface="Calibri" pitchFamily="34" charset="-120"/>
+                  <a:srgbClr val="000000"/>
+                </a:solidFill>
+                <a:latin typeface="IBM Plex Sans" pitchFamily="34" charset="0"/>
+                <a:ea typeface="IBM Plex Sans" pitchFamily="34" charset="-122"/>
+                <a:cs typeface="IBM Plex Sans" pitchFamily="34" charset="-120"/>
               </a:rPr>
               <a:t>3</a:t>
             </a:r>
@@ -4412,7 +4812,7 @@
       </p:sp>
       <p:sp>
         <p:nvSpPr>
-          <p:cNvPr id="17" name="Text 15"/>
+          <p:cNvPr id="18" name="Text 16"/>
           <p:cNvSpPr/>
           <p:nvPr/>
         </p:nvSpPr>
@@ -4435,23 +4835,23 @@
               <a:buNone/>
             </a:pPr>
             <a:r>
-              <a:rPr lang="en-US" sz="1700" b="1" dirty="0">
+              <a:rPr lang="en-US" sz="1600" b="1" dirty="0">
                 <a:solidFill>
                   <a:srgbClr val="522CBA"/>
                 </a:solidFill>
-                <a:latin typeface="Calibri" pitchFamily="34" charset="0"/>
-                <a:ea typeface="Calibri" pitchFamily="34" charset="-122"/>
-                <a:cs typeface="Calibri" pitchFamily="34" charset="-120"/>
+                <a:latin typeface="IBM Plex Sans" pitchFamily="34" charset="0"/>
+                <a:ea typeface="IBM Plex Sans" pitchFamily="34" charset="-122"/>
+                <a:cs typeface="IBM Plex Sans" pitchFamily="34" charset="-120"/>
               </a:rPr>
               <a:t>Ship a real pause button</a:t>
             </a:r>
-            <a:endParaRPr lang="en-US" sz="1700" dirty="0"/>
-          </a:p>
-        </p:txBody>
-      </p:sp>
-      <p:sp>
-        <p:nvSpPr>
-          <p:cNvPr id="18" name="Text 16"/>
+            <a:endParaRPr lang="en-US" sz="1600" dirty="0"/>
+          </a:p>
+        </p:txBody>
+      </p:sp>
+      <p:sp>
+        <p:nvSpPr>
+          <p:cNvPr id="19" name="Text 17"/>
           <p:cNvSpPr/>
           <p:nvPr/>
         </p:nvSpPr>
@@ -4474,23 +4874,23 @@
               <a:buNone/>
             </a:pPr>
             <a:r>
-              <a:rPr lang="en-US" sz="1400" dirty="0">
+              <a:rPr lang="en-US" sz="1300" dirty="0">
                 <a:solidFill>
                   <a:srgbClr val="000000"/>
                 </a:solidFill>
-                <a:latin typeface="Calibri" pitchFamily="34" charset="0"/>
-                <a:ea typeface="Calibri" pitchFamily="34" charset="-122"/>
-                <a:cs typeface="Calibri" pitchFamily="34" charset="-120"/>
+                <a:latin typeface="IBM Plex Sans" pitchFamily="34" charset="0"/>
+                <a:ea typeface="IBM Plex Sans" pitchFamily="34" charset="-122"/>
+                <a:cs typeface="IBM Plex Sans" pitchFamily="34" charset="-120"/>
               </a:rPr>
               <a:t>hosts already fake one</a:t>
             </a:r>
-            <a:endParaRPr lang="en-US" sz="1400" dirty="0"/>
-          </a:p>
-        </p:txBody>
-      </p:sp>
-      <p:sp>
-        <p:nvSpPr>
-          <p:cNvPr id="19" name="Shape 17"/>
+            <a:endParaRPr lang="en-US" sz="1300" dirty="0"/>
+          </a:p>
+        </p:txBody>
+      </p:sp>
+      <p:sp>
+        <p:nvSpPr>
+          <p:cNvPr id="20" name="Shape 18"/>
           <p:cNvSpPr/>
           <p:nvPr/>
         </p:nvSpPr>
@@ -4524,7 +4924,7 @@
       </p:sp>
       <p:sp>
         <p:nvSpPr>
-          <p:cNvPr id="20" name="Shape 18"/>
+          <p:cNvPr id="21" name="Shape 19"/>
           <p:cNvSpPr/>
           <p:nvPr/>
         </p:nvSpPr>
@@ -4537,7 +4937,7 @@
             <a:avLst/>
           </a:prstGeom>
           <a:solidFill>
-            <a:srgbClr val="9B78F7"/>
+            <a:srgbClr val="F4A664"/>
           </a:solidFill>
           <a:ln w="12700">
             <a:solidFill>
@@ -4549,7 +4949,7 @@
       </p:sp>
       <p:sp>
         <p:nvSpPr>
-          <p:cNvPr id="21" name="Text 19"/>
+          <p:cNvPr id="22" name="Text 20"/>
           <p:cNvSpPr/>
           <p:nvPr/>
         </p:nvSpPr>
@@ -4574,11 +4974,11 @@
             <a:r>
               <a:rPr lang="en-US" sz="1500" b="1" dirty="0">
                 <a:solidFill>
-                  <a:srgbClr val="FFFFFF"/>
-                </a:solidFill>
-                <a:latin typeface="Calibri" pitchFamily="34" charset="0"/>
-                <a:ea typeface="Calibri" pitchFamily="34" charset="-122"/>
-                <a:cs typeface="Calibri" pitchFamily="34" charset="-120"/>
+                  <a:srgbClr val="000000"/>
+                </a:solidFill>
+                <a:latin typeface="IBM Plex Sans" pitchFamily="34" charset="0"/>
+                <a:ea typeface="IBM Plex Sans" pitchFamily="34" charset="-122"/>
+                <a:cs typeface="IBM Plex Sans" pitchFamily="34" charset="-120"/>
               </a:rPr>
               <a:t>4</a:t>
             </a:r>
@@ -4588,7 +4988,7 @@
       </p:sp>
       <p:sp>
         <p:nvSpPr>
-          <p:cNvPr id="22" name="Text 20"/>
+          <p:cNvPr id="23" name="Text 21"/>
           <p:cNvSpPr/>
           <p:nvPr/>
         </p:nvSpPr>
@@ -4611,23 +5011,23 @@
               <a:buNone/>
             </a:pPr>
             <a:r>
-              <a:rPr lang="en-US" sz="1700" b="1" dirty="0">
+              <a:rPr lang="en-US" sz="1600" b="1" dirty="0">
                 <a:solidFill>
                   <a:srgbClr val="522CBA"/>
                 </a:solidFill>
-                <a:latin typeface="Calibri" pitchFamily="34" charset="0"/>
-                <a:ea typeface="Calibri" pitchFamily="34" charset="-122"/>
-                <a:cs typeface="Calibri" pitchFamily="34" charset="-120"/>
+                <a:latin typeface="IBM Plex Sans" pitchFamily="34" charset="0"/>
+                <a:ea typeface="IBM Plex Sans" pitchFamily="34" charset="-122"/>
+                <a:cs typeface="IBM Plex Sans" pitchFamily="34" charset="-120"/>
               </a:rPr>
               <a:t>Recruit outside the core two</a:t>
             </a:r>
-            <a:endParaRPr lang="en-US" sz="1700" dirty="0"/>
-          </a:p>
-        </p:txBody>
-      </p:sp>
-      <p:sp>
-        <p:nvSpPr>
-          <p:cNvPr id="23" name="Text 21"/>
+            <a:endParaRPr lang="en-US" sz="1600" dirty="0"/>
+          </a:p>
+        </p:txBody>
+      </p:sp>
+      <p:sp>
+        <p:nvSpPr>
+          <p:cNvPr id="24" name="Text 22"/>
           <p:cNvSpPr/>
           <p:nvPr/>
         </p:nvSpPr>
@@ -4650,23 +5050,23 @@
               <a:buNone/>
             </a:pPr>
             <a:r>
-              <a:rPr lang="en-US" sz="1400" dirty="0">
+              <a:rPr lang="en-US" sz="1300" dirty="0">
                 <a:solidFill>
                   <a:srgbClr val="000000"/>
                 </a:solidFill>
-                <a:latin typeface="Calibri" pitchFamily="34" charset="0"/>
-                <a:ea typeface="Calibri" pitchFamily="34" charset="-122"/>
-                <a:cs typeface="Calibri" pitchFamily="34" charset="-120"/>
-              </a:rPr>
-              <a:t>Staten Island, the Bronx</a:t>
-            </a:r>
-            <a:endParaRPr lang="en-US" sz="1400" dirty="0"/>
-          </a:p>
-        </p:txBody>
-      </p:sp>
-      <p:sp>
-        <p:nvSpPr>
-          <p:cNvPr id="24" name="Shape 22"/>
+                <a:latin typeface="IBM Plex Sans" pitchFamily="34" charset="0"/>
+                <a:ea typeface="IBM Plex Sans" pitchFamily="34" charset="-122"/>
+                <a:cs typeface="IBM Plex Sans" pitchFamily="34" charset="-120"/>
+              </a:rPr>
+              <a:t>Staten Island and the Bronx</a:t>
+            </a:r>
+            <a:endParaRPr lang="en-US" sz="1300" dirty="0"/>
+          </a:p>
+        </p:txBody>
+      </p:sp>
+      <p:sp>
+        <p:nvSpPr>
+          <p:cNvPr id="25" name="Shape 23"/>
           <p:cNvSpPr/>
           <p:nvPr/>
         </p:nvSpPr>
@@ -4700,7 +5100,7 @@
       </p:sp>
       <p:sp>
         <p:nvSpPr>
-          <p:cNvPr id="25" name="Shape 23"/>
+          <p:cNvPr id="26" name="Shape 24"/>
           <p:cNvSpPr/>
           <p:nvPr/>
         </p:nvSpPr>
@@ -4725,7 +5125,7 @@
       </p:sp>
       <p:sp>
         <p:nvSpPr>
-          <p:cNvPr id="26" name="Text 24"/>
+          <p:cNvPr id="27" name="Text 25"/>
           <p:cNvSpPr/>
           <p:nvPr/>
         </p:nvSpPr>
@@ -4752,9 +5152,9 @@
                 <a:solidFill>
                   <a:srgbClr val="FFFFFF"/>
                 </a:solidFill>
-                <a:latin typeface="Calibri" pitchFamily="34" charset="0"/>
-                <a:ea typeface="Calibri" pitchFamily="34" charset="-122"/>
-                <a:cs typeface="Calibri" pitchFamily="34" charset="-120"/>
+                <a:latin typeface="IBM Plex Sans" pitchFamily="34" charset="0"/>
+                <a:ea typeface="IBM Plex Sans" pitchFamily="34" charset="-122"/>
+                <a:cs typeface="IBM Plex Sans" pitchFamily="34" charset="-120"/>
               </a:rPr>
               <a:t>5</a:t>
             </a:r>
@@ -4764,7 +5164,7 @@
       </p:sp>
       <p:sp>
         <p:nvSpPr>
-          <p:cNvPr id="27" name="Text 25"/>
+          <p:cNvPr id="28" name="Text 26"/>
           <p:cNvSpPr/>
           <p:nvPr/>
         </p:nvSpPr>
@@ -4787,23 +5187,23 @@
               <a:buNone/>
             </a:pPr>
             <a:r>
-              <a:rPr lang="en-US" sz="1700" b="1" dirty="0">
+              <a:rPr lang="en-US" sz="1600" b="1" dirty="0">
                 <a:solidFill>
                   <a:srgbClr val="522CBA"/>
                 </a:solidFill>
-                <a:latin typeface="Calibri" pitchFamily="34" charset="0"/>
-                <a:ea typeface="Calibri" pitchFamily="34" charset="-122"/>
-                <a:cs typeface="Calibri" pitchFamily="34" charset="-120"/>
+                <a:latin typeface="IBM Plex Sans" pitchFamily="34" charset="0"/>
+                <a:ea typeface="IBM Plex Sans" pitchFamily="34" charset="-122"/>
+                <a:cs typeface="IBM Plex Sans" pitchFamily="34" charset="-120"/>
               </a:rPr>
               <a:t>Flag duplicates at creation</a:t>
             </a:r>
-            <a:endParaRPr lang="en-US" sz="1700" dirty="0"/>
-          </a:p>
-        </p:txBody>
-      </p:sp>
-      <p:sp>
-        <p:nvSpPr>
-          <p:cNvPr id="28" name="Text 26"/>
+            <a:endParaRPr lang="en-US" sz="1600" dirty="0"/>
+          </a:p>
+        </p:txBody>
+      </p:sp>
+      <p:sp>
+        <p:nvSpPr>
+          <p:cNvPr id="29" name="Text 27"/>
           <p:cNvSpPr/>
           <p:nvPr/>
         </p:nvSpPr>
@@ -4826,17 +5226,17 @@
               <a:buNone/>
             </a:pPr>
             <a:r>
-              <a:rPr lang="en-US" sz="1400" dirty="0">
+              <a:rPr lang="en-US" sz="1300" dirty="0">
                 <a:solidFill>
                   <a:srgbClr val="000000"/>
                 </a:solidFill>
-                <a:latin typeface="Calibri" pitchFamily="34" charset="0"/>
-                <a:ea typeface="Calibri" pitchFamily="34" charset="-122"/>
-                <a:cs typeface="Calibri" pitchFamily="34" charset="-120"/>
+                <a:latin typeface="IBM Plex Sans" pitchFamily="34" charset="0"/>
+                <a:ea typeface="IBM Plex Sans" pitchFamily="34" charset="-122"/>
+                <a:cs typeface="IBM Plex Sans" pitchFamily="34" charset="-120"/>
               </a:rPr>
               <a:t>keep inventory counts honest</a:t>
             </a:r>
-            <a:endParaRPr lang="en-US" sz="1400" dirty="0"/>
+            <a:endParaRPr lang="en-US" sz="1300" dirty="0"/>
           </a:p>
         </p:txBody>
       </p:sp>
@@ -4901,7 +5301,57 @@
       </p:sp>
       <p:sp>
         <p:nvSpPr>
-          <p:cNvPr id="3" name="Text 1"/>
+          <p:cNvPr id="3" name="Shape 1"/>
+          <p:cNvSpPr/>
+          <p:nvPr/>
+        </p:nvSpPr>
+        <p:spPr>
+          <a:xfrm>
+            <a:off x="10607040" y="1051560"/>
+            <a:ext cx="566928" cy="566928"/>
+          </a:xfrm>
+          <a:prstGeom prst="ellipse">
+            <a:avLst/>
+          </a:prstGeom>
+          <a:solidFill>
+            <a:srgbClr val="57E3D8"/>
+          </a:solidFill>
+          <a:ln w="12700">
+            <a:solidFill>
+              <a:srgbClr val="333333"/>
+            </a:solidFill>
+            <a:prstDash val="solid"/>
+          </a:ln>
+        </p:spPr>
+      </p:sp>
+      <p:sp>
+        <p:nvSpPr>
+          <p:cNvPr id="4" name="Shape 2"/>
+          <p:cNvSpPr/>
+          <p:nvPr/>
+        </p:nvSpPr>
+        <p:spPr>
+          <a:xfrm>
+            <a:off x="11430000" y="1783080"/>
+            <a:ext cx="310896" cy="310896"/>
+          </a:xfrm>
+          <a:prstGeom prst="ellipse">
+            <a:avLst/>
+          </a:prstGeom>
+          <a:solidFill>
+            <a:srgbClr val="F4A664"/>
+          </a:solidFill>
+          <a:ln w="12700">
+            <a:solidFill>
+              <a:srgbClr val="333333"/>
+            </a:solidFill>
+            <a:prstDash val="solid"/>
+          </a:ln>
+        </p:spPr>
+      </p:sp>
+      <p:sp>
+        <p:nvSpPr>
+          <p:cNvPr id="5" name="Text 3"/>
           <p:cNvSpPr/>
           <p:nvPr/>
         </p:nvSpPr>
@@ -4928,9 +5378,9 @@
                 <a:solidFill>
                   <a:srgbClr val="9B78F7"/>
                 </a:solidFill>
-                <a:latin typeface="Calibri" pitchFamily="34" charset="0"/>
-                <a:ea typeface="Calibri" pitchFamily="34" charset="-122"/>
-                <a:cs typeface="Calibri" pitchFamily="34" charset="-120"/>
+                <a:latin typeface="IBM Plex Sans" pitchFamily="34" charset="0"/>
+                <a:ea typeface="IBM Plex Sans" pitchFamily="34" charset="-122"/>
+                <a:cs typeface="IBM Plex Sans" pitchFamily="34" charset="-120"/>
               </a:rPr>
               <a:t>WHAT I TOOK AWAY</a:t>
             </a:r>
@@ -4940,14 +5390,14 @@
       </p:sp>
       <p:sp>
         <p:nvSpPr>
-          <p:cNvPr id="4" name="Text 2"/>
+          <p:cNvPr id="6" name="Text 4"/>
           <p:cNvSpPr/>
           <p:nvPr/>
         </p:nvSpPr>
         <p:spPr>
           <a:xfrm>
             <a:off x="822960" y="1417320"/>
-            <a:ext cx="10515600" cy="1371600"/>
+            <a:ext cx="9509760" cy="1371600"/>
           </a:xfrm>
           <a:prstGeom prst="rect">
             <a:avLst/>
@@ -4966,17 +5416,17 @@
               <a:buNone/>
             </a:pPr>
             <a:r>
-              <a:rPr lang="en-US" sz="4000" b="1" dirty="0">
+              <a:rPr lang="en-US" sz="3800" b="1" dirty="0">
                 <a:solidFill>
                   <a:srgbClr val="522CBA"/>
                 </a:solidFill>
-                <a:latin typeface="Cambria" pitchFamily="34" charset="0"/>
-                <a:ea typeface="Cambria" pitchFamily="34" charset="-122"/>
-                <a:cs typeface="Cambria" pitchFamily="34" charset="-120"/>
-              </a:rPr>
-              <a:t>EDA is the argument,</a:t>
-            </a:r>
-            <a:endParaRPr lang="en-US" sz="4000" dirty="0"/>
+                <a:latin typeface="IBM Plex Sans" pitchFamily="34" charset="0"/>
+                <a:ea typeface="IBM Plex Sans" pitchFamily="34" charset="-122"/>
+                <a:cs typeface="IBM Plex Sans" pitchFamily="34" charset="-120"/>
+              </a:rPr>
+              <a:t>EDA is the argument</a:t>
+            </a:r>
+            <a:endParaRPr lang="en-US" sz="3800" dirty="0"/>
           </a:p>
           <a:p>
             <a:pPr indent="0" marL="0">
@@ -4986,23 +5436,23 @@
               <a:buNone/>
             </a:pPr>
             <a:r>
-              <a:rPr lang="en-US" sz="4000" b="1" dirty="0">
+              <a:rPr lang="en-US" sz="3800" b="1" dirty="0">
                 <a:solidFill>
                   <a:srgbClr val="522CBA"/>
                 </a:solidFill>
-                <a:latin typeface="Cambria" pitchFamily="34" charset="0"/>
-                <a:ea typeface="Cambria" pitchFamily="34" charset="-122"/>
-                <a:cs typeface="Cambria" pitchFamily="34" charset="-120"/>
+                <a:latin typeface="IBM Plex Sans" pitchFamily="34" charset="0"/>
+                <a:ea typeface="IBM Plex Sans" pitchFamily="34" charset="-122"/>
+                <a:cs typeface="IBM Plex Sans" pitchFamily="34" charset="-120"/>
               </a:rPr>
               <a:t>not the output.</a:t>
             </a:r>
-            <a:endParaRPr lang="en-US" sz="4000" dirty="0"/>
-          </a:p>
-        </p:txBody>
-      </p:sp>
-      <p:sp>
-        <p:nvSpPr>
-          <p:cNvPr id="5" name="Shape 3"/>
+            <a:endParaRPr lang="en-US" sz="3800" dirty="0"/>
+          </a:p>
+        </p:txBody>
+      </p:sp>
+      <p:sp>
+        <p:nvSpPr>
+          <p:cNvPr id="7" name="Shape 5"/>
           <p:cNvSpPr/>
           <p:nvPr/>
         </p:nvSpPr>
@@ -5036,52 +5486,77 @@
       </p:sp>
       <p:sp>
         <p:nvSpPr>
-          <p:cNvPr id="6" name="Text 4"/>
-          <p:cNvSpPr/>
-          <p:nvPr/>
-        </p:nvSpPr>
-        <p:spPr>
-          <a:xfrm>
-            <a:off x="1060704" y="3520440"/>
-            <a:ext cx="2788920" cy="347472"/>
-          </a:xfrm>
-          <a:prstGeom prst="rect">
-            <a:avLst/>
-          </a:prstGeom>
-          <a:noFill/>
-          <a:ln/>
-        </p:spPr>
-        <p:txBody>
-          <a:bodyPr wrap="square" lIns="0" tIns="0" rIns="0" bIns="0" rtlCol="0" anchor="ctr"/>
-          <a:lstStyle/>
-          <a:p>
-            <a:pPr indent="0" marL="0">
-              <a:buNone/>
-            </a:pPr>
-            <a:r>
-              <a:rPr lang="en-US" sz="1600" b="1" dirty="0">
+          <p:cNvPr id="8" name="Shape 6"/>
+          <p:cNvSpPr/>
+          <p:nvPr/>
+        </p:nvSpPr>
+        <p:spPr>
+          <a:xfrm>
+            <a:off x="1060704" y="3602736"/>
+            <a:ext cx="137160" cy="137160"/>
+          </a:xfrm>
+          <a:prstGeom prst="ellipse">
+            <a:avLst/>
+          </a:prstGeom>
+          <a:solidFill>
+            <a:srgbClr val="57E3D8"/>
+          </a:solidFill>
+          <a:ln w="12700">
+            <a:solidFill>
+              <a:srgbClr val="333333"/>
+            </a:solidFill>
+            <a:prstDash val="solid"/>
+          </a:ln>
+        </p:spPr>
+      </p:sp>
+      <p:sp>
+        <p:nvSpPr>
+          <p:cNvPr id="9" name="Text 7"/>
+          <p:cNvSpPr/>
+          <p:nvPr/>
+        </p:nvSpPr>
+        <p:spPr>
+          <a:xfrm>
+            <a:off x="1325880" y="3502152"/>
+            <a:ext cx="2523744" cy="347472"/>
+          </a:xfrm>
+          <a:prstGeom prst="rect">
+            <a:avLst/>
+          </a:prstGeom>
+          <a:noFill/>
+          <a:ln/>
+        </p:spPr>
+        <p:txBody>
+          <a:bodyPr wrap="square" lIns="0" tIns="0" rIns="0" bIns="0" rtlCol="0" anchor="ctr"/>
+          <a:lstStyle/>
+          <a:p>
+            <a:pPr indent="0" marL="0">
+              <a:buNone/>
+            </a:pPr>
+            <a:r>
+              <a:rPr lang="en-US" sz="1500" b="1" dirty="0">
                 <a:solidFill>
                   <a:srgbClr val="9B78F7"/>
                 </a:solidFill>
-                <a:latin typeface="Calibri" pitchFamily="34" charset="0"/>
-                <a:ea typeface="Calibri" pitchFamily="34" charset="-122"/>
-                <a:cs typeface="Calibri" pitchFamily="34" charset="-120"/>
+                <a:latin typeface="IBM Plex Sans" pitchFamily="34" charset="0"/>
+                <a:ea typeface="IBM Plex Sans" pitchFamily="34" charset="-122"/>
+                <a:cs typeface="IBM Plex Sans" pitchFamily="34" charset="-120"/>
               </a:rPr>
               <a:t>Hardest</a:t>
             </a:r>
-            <a:endParaRPr lang="en-US" sz="1600" dirty="0"/>
-          </a:p>
-        </p:txBody>
-      </p:sp>
-      <p:sp>
-        <p:nvSpPr>
-          <p:cNvPr id="7" name="Text 5"/>
-          <p:cNvSpPr/>
-          <p:nvPr/>
-        </p:nvSpPr>
-        <p:spPr>
-          <a:xfrm>
-            <a:off x="1060704" y="3931920"/>
+            <a:endParaRPr lang="en-US" sz="1500" dirty="0"/>
+          </a:p>
+        </p:txBody>
+      </p:sp>
+      <p:sp>
+        <p:nvSpPr>
+          <p:cNvPr id="10" name="Text 8"/>
+          <p:cNvSpPr/>
+          <p:nvPr/>
+        </p:nvSpPr>
+        <p:spPr>
+          <a:xfrm>
+            <a:off x="1060704" y="3968496"/>
             <a:ext cx="2788920" cy="859536"/>
           </a:xfrm>
           <a:prstGeom prst="rect">
@@ -5098,23 +5573,23 @@
               <a:buNone/>
             </a:pPr>
             <a:r>
-              <a:rPr lang="en-US" sz="1500" dirty="0">
+              <a:rPr lang="en-US" sz="1400" dirty="0">
                 <a:solidFill>
                   <a:srgbClr val="000000"/>
                 </a:solidFill>
-                <a:latin typeface="Calibri" pitchFamily="34" charset="0"/>
-                <a:ea typeface="Calibri" pitchFamily="34" charset="-122"/>
-                <a:cs typeface="Calibri" pitchFamily="34" charset="-120"/>
-              </a:rPr>
-              <a:t>defining what "the same listing" means</a:t>
-            </a:r>
-            <a:endParaRPr lang="en-US" sz="1500" dirty="0"/>
-          </a:p>
-        </p:txBody>
-      </p:sp>
-      <p:sp>
-        <p:nvSpPr>
-          <p:cNvPr id="8" name="Shape 6"/>
+                <a:latin typeface="IBM Plex Sans" pitchFamily="34" charset="0"/>
+                <a:ea typeface="IBM Plex Sans" pitchFamily="34" charset="-122"/>
+                <a:cs typeface="IBM Plex Sans" pitchFamily="34" charset="-120"/>
+              </a:rPr>
+              <a:t>defining what counts as the same listing</a:t>
+            </a:r>
+            <a:endParaRPr lang="en-US" sz="1400" dirty="0"/>
+          </a:p>
+        </p:txBody>
+      </p:sp>
+      <p:sp>
+        <p:nvSpPr>
+          <p:cNvPr id="11" name="Shape 9"/>
           <p:cNvSpPr/>
           <p:nvPr/>
         </p:nvSpPr>
@@ -5148,52 +5623,77 @@
       </p:sp>
       <p:sp>
         <p:nvSpPr>
-          <p:cNvPr id="9" name="Text 7"/>
-          <p:cNvSpPr/>
-          <p:nvPr/>
-        </p:nvSpPr>
-        <p:spPr>
-          <a:xfrm>
-            <a:off x="4672584" y="3520440"/>
-            <a:ext cx="2788920" cy="347472"/>
-          </a:xfrm>
-          <a:prstGeom prst="rect">
-            <a:avLst/>
-          </a:prstGeom>
-          <a:noFill/>
-          <a:ln/>
-        </p:spPr>
-        <p:txBody>
-          <a:bodyPr wrap="square" lIns="0" tIns="0" rIns="0" bIns="0" rtlCol="0" anchor="ctr"/>
-          <a:lstStyle/>
-          <a:p>
-            <a:pPr indent="0" marL="0">
-              <a:buNone/>
-            </a:pPr>
-            <a:r>
-              <a:rPr lang="en-US" sz="1600" b="1" dirty="0">
+          <p:cNvPr id="12" name="Shape 10"/>
+          <p:cNvSpPr/>
+          <p:nvPr/>
+        </p:nvSpPr>
+        <p:spPr>
+          <a:xfrm>
+            <a:off x="4672584" y="3602736"/>
+            <a:ext cx="137160" cy="137160"/>
+          </a:xfrm>
+          <a:prstGeom prst="ellipse">
+            <a:avLst/>
+          </a:prstGeom>
+          <a:solidFill>
+            <a:srgbClr val="F4A664"/>
+          </a:solidFill>
+          <a:ln w="12700">
+            <a:solidFill>
+              <a:srgbClr val="333333"/>
+            </a:solidFill>
+            <a:prstDash val="solid"/>
+          </a:ln>
+        </p:spPr>
+      </p:sp>
+      <p:sp>
+        <p:nvSpPr>
+          <p:cNvPr id="13" name="Text 11"/>
+          <p:cNvSpPr/>
+          <p:nvPr/>
+        </p:nvSpPr>
+        <p:spPr>
+          <a:xfrm>
+            <a:off x="4937760" y="3502152"/>
+            <a:ext cx="2523744" cy="347472"/>
+          </a:xfrm>
+          <a:prstGeom prst="rect">
+            <a:avLst/>
+          </a:prstGeom>
+          <a:noFill/>
+          <a:ln/>
+        </p:spPr>
+        <p:txBody>
+          <a:bodyPr wrap="square" lIns="0" tIns="0" rIns="0" bIns="0" rtlCol="0" anchor="ctr"/>
+          <a:lstStyle/>
+          <a:p>
+            <a:pPr indent="0" marL="0">
+              <a:buNone/>
+            </a:pPr>
+            <a:r>
+              <a:rPr lang="en-US" sz="1500" b="1" dirty="0">
                 <a:solidFill>
                   <a:srgbClr val="9B78F7"/>
                 </a:solidFill>
-                <a:latin typeface="Calibri" pitchFamily="34" charset="0"/>
-                <a:ea typeface="Calibri" pitchFamily="34" charset="-122"/>
-                <a:cs typeface="Calibri" pitchFamily="34" charset="-120"/>
+                <a:latin typeface="IBM Plex Sans" pitchFamily="34" charset="0"/>
+                <a:ea typeface="IBM Plex Sans" pitchFamily="34" charset="-122"/>
+                <a:cs typeface="IBM Plex Sans" pitchFamily="34" charset="-120"/>
               </a:rPr>
               <a:t>Best judgement</a:t>
             </a:r>
-            <a:endParaRPr lang="en-US" sz="1600" dirty="0"/>
-          </a:p>
-        </p:txBody>
-      </p:sp>
-      <p:sp>
-        <p:nvSpPr>
-          <p:cNvPr id="10" name="Text 8"/>
-          <p:cNvSpPr/>
-          <p:nvPr/>
-        </p:nvSpPr>
-        <p:spPr>
-          <a:xfrm>
-            <a:off x="4672584" y="3931920"/>
+            <a:endParaRPr lang="en-US" sz="1500" dirty="0"/>
+          </a:p>
+        </p:txBody>
+      </p:sp>
+      <p:sp>
+        <p:nvSpPr>
+          <p:cNvPr id="14" name="Text 12"/>
+          <p:cNvSpPr/>
+          <p:nvPr/>
+        </p:nvSpPr>
+        <p:spPr>
+          <a:xfrm>
+            <a:off x="4672584" y="3968496"/>
             <a:ext cx="2788920" cy="859536"/>
           </a:xfrm>
           <a:prstGeom prst="rect">
@@ -5210,23 +5710,23 @@
               <a:buNone/>
             </a:pPr>
             <a:r>
-              <a:rPr lang="en-US" sz="1500" dirty="0">
+              <a:rPr lang="en-US" sz="1400" dirty="0">
                 <a:solidFill>
                   <a:srgbClr val="000000"/>
                 </a:solidFill>
-                <a:latin typeface="Calibri" pitchFamily="34" charset="0"/>
-                <a:ea typeface="Calibri" pitchFamily="34" charset="-122"/>
-                <a:cs typeface="Calibri" pitchFamily="34" charset="-120"/>
+                <a:latin typeface="IBM Plex Sans" pitchFamily="34" charset="0"/>
+                <a:ea typeface="IBM Plex Sans" pitchFamily="34" charset="-122"/>
+                <a:cs typeface="IBM Plex Sans" pitchFamily="34" charset="-120"/>
               </a:rPr>
               <a:t>kept the 1,250-night signal</a:t>
             </a:r>
-            <a:endParaRPr lang="en-US" sz="1500" dirty="0"/>
-          </a:p>
-        </p:txBody>
-      </p:sp>
-      <p:sp>
-        <p:nvSpPr>
-          <p:cNvPr id="11" name="Shape 9"/>
+            <a:endParaRPr lang="en-US" sz="1400" dirty="0"/>
+          </a:p>
+        </p:txBody>
+      </p:sp>
+      <p:sp>
+        <p:nvSpPr>
+          <p:cNvPr id="15" name="Shape 13"/>
           <p:cNvSpPr/>
           <p:nvPr/>
         </p:nvSpPr>
@@ -5260,52 +5760,77 @@
       </p:sp>
       <p:sp>
         <p:nvSpPr>
-          <p:cNvPr id="12" name="Text 10"/>
-          <p:cNvSpPr/>
-          <p:nvPr/>
-        </p:nvSpPr>
-        <p:spPr>
-          <a:xfrm>
-            <a:off x="8284464" y="3520440"/>
-            <a:ext cx="2788920" cy="347472"/>
-          </a:xfrm>
-          <a:prstGeom prst="rect">
-            <a:avLst/>
-          </a:prstGeom>
-          <a:noFill/>
-          <a:ln/>
-        </p:spPr>
-        <p:txBody>
-          <a:bodyPr wrap="square" lIns="0" tIns="0" rIns="0" bIns="0" rtlCol="0" anchor="ctr"/>
-          <a:lstStyle/>
-          <a:p>
-            <a:pPr indent="0" marL="0">
-              <a:buNone/>
-            </a:pPr>
-            <a:r>
-              <a:rPr lang="en-US" sz="1600" b="1" dirty="0">
+          <p:cNvPr id="16" name="Shape 14"/>
+          <p:cNvSpPr/>
+          <p:nvPr/>
+        </p:nvSpPr>
+        <p:spPr>
+          <a:xfrm>
+            <a:off x="8284464" y="3602736"/>
+            <a:ext cx="137160" cy="137160"/>
+          </a:xfrm>
+          <a:prstGeom prst="ellipse">
+            <a:avLst/>
+          </a:prstGeom>
+          <a:solidFill>
+            <a:srgbClr val="57E3D8"/>
+          </a:solidFill>
+          <a:ln w="12700">
+            <a:solidFill>
+              <a:srgbClr val="333333"/>
+            </a:solidFill>
+            <a:prstDash val="solid"/>
+          </a:ln>
+        </p:spPr>
+      </p:sp>
+      <p:sp>
+        <p:nvSpPr>
+          <p:cNvPr id="17" name="Text 15"/>
+          <p:cNvSpPr/>
+          <p:nvPr/>
+        </p:nvSpPr>
+        <p:spPr>
+          <a:xfrm>
+            <a:off x="8549640" y="3502152"/>
+            <a:ext cx="2523744" cy="347472"/>
+          </a:xfrm>
+          <a:prstGeom prst="rect">
+            <a:avLst/>
+          </a:prstGeom>
+          <a:noFill/>
+          <a:ln/>
+        </p:spPr>
+        <p:txBody>
+          <a:bodyPr wrap="square" lIns="0" tIns="0" rIns="0" bIns="0" rtlCol="0" anchor="ctr"/>
+          <a:lstStyle/>
+          <a:p>
+            <a:pPr indent="0" marL="0">
+              <a:buNone/>
+            </a:pPr>
+            <a:r>
+              <a:rPr lang="en-US" sz="1500" b="1" dirty="0">
                 <a:solidFill>
                   <a:srgbClr val="9B78F7"/>
                 </a:solidFill>
-                <a:latin typeface="Calibri" pitchFamily="34" charset="0"/>
-                <a:ea typeface="Calibri" pitchFamily="34" charset="-122"/>
-                <a:cs typeface="Calibri" pitchFamily="34" charset="-120"/>
+                <a:latin typeface="IBM Plex Sans" pitchFamily="34" charset="0"/>
+                <a:ea typeface="IBM Plex Sans" pitchFamily="34" charset="-122"/>
+                <a:cs typeface="IBM Plex Sans" pitchFamily="34" charset="-120"/>
               </a:rPr>
               <a:t>Next time</a:t>
             </a:r>
-            <a:endParaRPr lang="en-US" sz="1600" dirty="0"/>
-          </a:p>
-        </p:txBody>
-      </p:sp>
-      <p:sp>
-        <p:nvSpPr>
-          <p:cNvPr id="13" name="Text 11"/>
-          <p:cNvSpPr/>
-          <p:nvPr/>
-        </p:nvSpPr>
-        <p:spPr>
-          <a:xfrm>
-            <a:off x="8284464" y="3931920"/>
+            <a:endParaRPr lang="en-US" sz="1500" dirty="0"/>
+          </a:p>
+        </p:txBody>
+      </p:sp>
+      <p:sp>
+        <p:nvSpPr>
+          <p:cNvPr id="18" name="Text 16"/>
+          <p:cNvSpPr/>
+          <p:nvPr/>
+        </p:nvSpPr>
+        <p:spPr>
+          <a:xfrm>
+            <a:off x="8284464" y="3968496"/>
             <a:ext cx="2788920" cy="859536"/>
           </a:xfrm>
           <a:prstGeom prst="rect">
@@ -5322,23 +5847,23 @@
               <a:buNone/>
             </a:pPr>
             <a:r>
-              <a:rPr lang="en-US" sz="1500" dirty="0">
+              <a:rPr lang="en-US" sz="1400" dirty="0">
                 <a:solidFill>
                   <a:srgbClr val="000000"/>
                 </a:solidFill>
-                <a:latin typeface="Calibri" pitchFamily="34" charset="0"/>
-                <a:ea typeface="Calibri" pitchFamily="34" charset="-122"/>
-                <a:cs typeface="Calibri" pitchFamily="34" charset="-120"/>
+                <a:latin typeface="IBM Plex Sans" pitchFamily="34" charset="0"/>
+                <a:ea typeface="IBM Plex Sans" pitchFamily="34" charset="-122"/>
+                <a:cs typeface="IBM Plex Sans" pitchFamily="34" charset="-120"/>
               </a:rPr>
               <a:t>dedupe before the missing-value audit</a:t>
             </a:r>
-            <a:endParaRPr lang="en-US" sz="1500" dirty="0"/>
-          </a:p>
-        </p:txBody>
-      </p:sp>
-      <p:sp>
-        <p:nvSpPr>
-          <p:cNvPr id="14" name="Text 12"/>
+            <a:endParaRPr lang="en-US" sz="1400" dirty="0"/>
+          </a:p>
+        </p:txBody>
+      </p:sp>
+      <p:sp>
+        <p:nvSpPr>
+          <p:cNvPr id="19" name="Text 17"/>
           <p:cNvSpPr/>
           <p:nvPr/>
         </p:nvSpPr>
@@ -5361,17 +5886,17 @@
               <a:buNone/>
             </a:pPr>
             <a:r>
-              <a:rPr lang="en-US" sz="2000" b="1" dirty="0">
+              <a:rPr lang="en-US" sz="1900" b="1" dirty="0">
                 <a:solidFill>
                   <a:srgbClr val="522CBA"/>
                 </a:solidFill>
-                <a:latin typeface="Cambria" pitchFamily="34" charset="0"/>
-                <a:ea typeface="Cambria" pitchFamily="34" charset="-122"/>
-                <a:cs typeface="Cambria" pitchFamily="34" charset="-120"/>
+                <a:latin typeface="IBM Plex Sans" pitchFamily="34" charset="0"/>
+                <a:ea typeface="IBM Plex Sans" pitchFamily="34" charset="-122"/>
+                <a:cs typeface="IBM Plex Sans" pitchFamily="34" charset="-120"/>
               </a:rPr>
               <a:t>Thank you  ·  Khalid Al Dosari</a:t>
             </a:r>
-            <a:endParaRPr lang="en-US" sz="2000" dirty="0"/>
+            <a:endParaRPr lang="en-US" sz="1900" dirty="0"/>
           </a:p>
         </p:txBody>
       </p:sp>
@@ -5432,30 +5957,55 @@
               <a:buNone/>
             </a:pPr>
             <a:r>
-              <a:rPr lang="en-US" sz="3600" b="1" dirty="0">
+              <a:rPr lang="en-US" sz="3400" b="1" dirty="0">
                 <a:solidFill>
                   <a:srgbClr val="522CBA"/>
                 </a:solidFill>
-                <a:latin typeface="Cambria" pitchFamily="34" charset="0"/>
-                <a:ea typeface="Cambria" pitchFamily="34" charset="-122"/>
-                <a:cs typeface="Cambria" pitchFamily="34" charset="-120"/>
+                <a:latin typeface="IBM Plex Sans" pitchFamily="34" charset="0"/>
+                <a:ea typeface="IBM Plex Sans" pitchFamily="34" charset="-122"/>
+                <a:cs typeface="IBM Plex Sans" pitchFamily="34" charset="-120"/>
               </a:rPr>
               <a:t>The data</a:t>
             </a:r>
-            <a:endParaRPr lang="en-US" sz="3600" dirty="0"/>
-          </a:p>
-        </p:txBody>
-      </p:sp>
-      <p:sp>
-        <p:nvSpPr>
-          <p:cNvPr id="3" name="Text 1"/>
-          <p:cNvSpPr/>
-          <p:nvPr/>
-        </p:nvSpPr>
-        <p:spPr>
-          <a:xfrm>
-            <a:off x="566928" y="1042416"/>
-            <a:ext cx="11064240" cy="329184"/>
+            <a:endParaRPr lang="en-US" sz="3400" dirty="0"/>
+          </a:p>
+        </p:txBody>
+      </p:sp>
+      <p:sp>
+        <p:nvSpPr>
+          <p:cNvPr id="3" name="Shape 1"/>
+          <p:cNvSpPr/>
+          <p:nvPr/>
+        </p:nvSpPr>
+        <p:spPr>
+          <a:xfrm>
+            <a:off x="585216" y="1138428"/>
+            <a:ext cx="146304" cy="146304"/>
+          </a:xfrm>
+          <a:prstGeom prst="ellipse">
+            <a:avLst/>
+          </a:prstGeom>
+          <a:solidFill>
+            <a:srgbClr val="57E3D8"/>
+          </a:solidFill>
+          <a:ln w="12700">
+            <a:solidFill>
+              <a:srgbClr val="333333"/>
+            </a:solidFill>
+            <a:prstDash val="solid"/>
+          </a:ln>
+        </p:spPr>
+      </p:sp>
+      <p:sp>
+        <p:nvSpPr>
+          <p:cNvPr id="4" name="Text 2"/>
+          <p:cNvSpPr/>
+          <p:nvPr/>
+        </p:nvSpPr>
+        <p:spPr>
+          <a:xfrm>
+            <a:off x="859536" y="1042416"/>
+            <a:ext cx="10789920" cy="329184"/>
           </a:xfrm>
           <a:prstGeom prst="rect">
             <a:avLst/>
@@ -5475,11 +6025,11 @@
                 <a:solidFill>
                   <a:srgbClr val="9B78F7"/>
                 </a:solidFill>
-                <a:latin typeface="Calibri" pitchFamily="34" charset="0"/>
-                <a:ea typeface="Calibri" pitchFamily="34" charset="-122"/>
-                <a:cs typeface="Calibri" pitchFamily="34" charset="-120"/>
-              </a:rPr>
-              <a:t>One row = one listing</a:t>
+                <a:latin typeface="IBM Plex Sans" pitchFamily="34" charset="0"/>
+                <a:ea typeface="IBM Plex Sans" pitchFamily="34" charset="-122"/>
+                <a:cs typeface="IBM Plex Sans" pitchFamily="34" charset="-120"/>
+              </a:rPr>
+              <a:t>One row is one listing</a:t>
             </a:r>
             <a:endParaRPr lang="en-US" sz="1500" dirty="0"/>
           </a:p>
@@ -5487,7 +6037,7 @@
       </p:sp>
       <p:sp>
         <p:nvSpPr>
-          <p:cNvPr id="4" name="Shape 2"/>
+          <p:cNvPr id="5" name="Shape 3"/>
           <p:cNvSpPr/>
           <p:nvPr/>
         </p:nvSpPr>
@@ -5521,46 +6071,71 @@
       </p:sp>
       <p:sp>
         <p:nvSpPr>
-          <p:cNvPr id="5" name="Text 3"/>
+          <p:cNvPr id="6" name="Shape 4"/>
+          <p:cNvSpPr/>
+          <p:nvPr/>
+        </p:nvSpPr>
+        <p:spPr>
+          <a:xfrm>
+            <a:off x="2852928" y="1773936"/>
+            <a:ext cx="146304" cy="146304"/>
+          </a:xfrm>
+          <a:prstGeom prst="ellipse">
+            <a:avLst/>
+          </a:prstGeom>
+          <a:solidFill>
+            <a:srgbClr val="57E3D8"/>
+          </a:solidFill>
+          <a:ln w="12700">
+            <a:solidFill>
+              <a:srgbClr val="333333"/>
+            </a:solidFill>
+            <a:prstDash val="solid"/>
+          </a:ln>
+        </p:spPr>
+      </p:sp>
+      <p:sp>
+        <p:nvSpPr>
+          <p:cNvPr id="7" name="Text 5"/>
           <p:cNvSpPr/>
           <p:nvPr/>
         </p:nvSpPr>
         <p:spPr>
           <a:xfrm>
             <a:off x="768096" y="1773936"/>
-            <a:ext cx="2286000" cy="512064"/>
-          </a:xfrm>
-          <a:prstGeom prst="rect">
-            <a:avLst/>
-          </a:prstGeom>
-          <a:noFill/>
-          <a:ln/>
-        </p:spPr>
-        <p:txBody>
-          <a:bodyPr wrap="square" lIns="0" tIns="0" rIns="0" bIns="0" rtlCol="0" anchor="ctr"/>
-          <a:lstStyle/>
-          <a:p>
-            <a:pPr indent="0" marL="0">
-              <a:buNone/>
-            </a:pPr>
-            <a:r>
-              <a:rPr lang="en-US" sz="2500" b="1" dirty="0">
+            <a:ext cx="2011680" cy="512064"/>
+          </a:xfrm>
+          <a:prstGeom prst="rect">
+            <a:avLst/>
+          </a:prstGeom>
+          <a:noFill/>
+          <a:ln/>
+        </p:spPr>
+        <p:txBody>
+          <a:bodyPr wrap="square" lIns="0" tIns="0" rIns="0" bIns="0" rtlCol="0" anchor="ctr"/>
+          <a:lstStyle/>
+          <a:p>
+            <a:pPr indent="0" marL="0">
+              <a:buNone/>
+            </a:pPr>
+            <a:r>
+              <a:rPr lang="en-US" sz="2400" b="1" dirty="0">
                 <a:solidFill>
                   <a:srgbClr val="522CBA"/>
                 </a:solidFill>
-                <a:latin typeface="Cambria" pitchFamily="34" charset="0"/>
-                <a:ea typeface="Cambria" pitchFamily="34" charset="-122"/>
-                <a:cs typeface="Cambria" pitchFamily="34" charset="-120"/>
+                <a:latin typeface="IBM Plex Sans" pitchFamily="34" charset="0"/>
+                <a:ea typeface="IBM Plex Sans" pitchFamily="34" charset="-122"/>
+                <a:cs typeface="IBM Plex Sans" pitchFamily="34" charset="-120"/>
               </a:rPr>
               <a:t>48,895</a:t>
             </a:r>
-            <a:endParaRPr lang="en-US" sz="2500" dirty="0"/>
-          </a:p>
-        </p:txBody>
-      </p:sp>
-      <p:sp>
-        <p:nvSpPr>
-          <p:cNvPr id="6" name="Text 4"/>
+            <a:endParaRPr lang="en-US" sz="2400" dirty="0"/>
+          </a:p>
+        </p:txBody>
+      </p:sp>
+      <p:sp>
+        <p:nvSpPr>
+          <p:cNvPr id="8" name="Text 6"/>
           <p:cNvSpPr/>
           <p:nvPr/>
         </p:nvSpPr>
@@ -5587,9 +6162,9 @@
                 <a:solidFill>
                   <a:srgbClr val="000000"/>
                 </a:solidFill>
-                <a:latin typeface="Calibri" pitchFamily="34" charset="0"/>
-                <a:ea typeface="Calibri" pitchFamily="34" charset="-122"/>
-                <a:cs typeface="Calibri" pitchFamily="34" charset="-120"/>
+                <a:latin typeface="IBM Plex Sans" pitchFamily="34" charset="0"/>
+                <a:ea typeface="IBM Plex Sans" pitchFamily="34" charset="-122"/>
+                <a:cs typeface="IBM Plex Sans" pitchFamily="34" charset="-120"/>
               </a:rPr>
               <a:t>rows</a:t>
             </a:r>
@@ -5599,7 +6174,7 @@
       </p:sp>
       <p:sp>
         <p:nvSpPr>
-          <p:cNvPr id="7" name="Shape 5"/>
+          <p:cNvPr id="9" name="Shape 7"/>
           <p:cNvSpPr/>
           <p:nvPr/>
         </p:nvSpPr>
@@ -5633,46 +6208,71 @@
       </p:sp>
       <p:sp>
         <p:nvSpPr>
-          <p:cNvPr id="8" name="Text 6"/>
+          <p:cNvPr id="10" name="Shape 8"/>
+          <p:cNvSpPr/>
+          <p:nvPr/>
+        </p:nvSpPr>
+        <p:spPr>
+          <a:xfrm>
+            <a:off x="5678424" y="1773936"/>
+            <a:ext cx="146304" cy="146304"/>
+          </a:xfrm>
+          <a:prstGeom prst="ellipse">
+            <a:avLst/>
+          </a:prstGeom>
+          <a:solidFill>
+            <a:srgbClr val="F4A664"/>
+          </a:solidFill>
+          <a:ln w="12700">
+            <a:solidFill>
+              <a:srgbClr val="333333"/>
+            </a:solidFill>
+            <a:prstDash val="solid"/>
+          </a:ln>
+        </p:spPr>
+      </p:sp>
+      <p:sp>
+        <p:nvSpPr>
+          <p:cNvPr id="11" name="Text 9"/>
           <p:cNvSpPr/>
           <p:nvPr/>
         </p:nvSpPr>
         <p:spPr>
           <a:xfrm>
             <a:off x="3593592" y="1773936"/>
-            <a:ext cx="2286000" cy="512064"/>
-          </a:xfrm>
-          <a:prstGeom prst="rect">
-            <a:avLst/>
-          </a:prstGeom>
-          <a:noFill/>
-          <a:ln/>
-        </p:spPr>
-        <p:txBody>
-          <a:bodyPr wrap="square" lIns="0" tIns="0" rIns="0" bIns="0" rtlCol="0" anchor="ctr"/>
-          <a:lstStyle/>
-          <a:p>
-            <a:pPr indent="0" marL="0">
-              <a:buNone/>
-            </a:pPr>
-            <a:r>
-              <a:rPr lang="en-US" sz="2500" b="1" dirty="0">
+            <a:ext cx="2011680" cy="512064"/>
+          </a:xfrm>
+          <a:prstGeom prst="rect">
+            <a:avLst/>
+          </a:prstGeom>
+          <a:noFill/>
+          <a:ln/>
+        </p:spPr>
+        <p:txBody>
+          <a:bodyPr wrap="square" lIns="0" tIns="0" rIns="0" bIns="0" rtlCol="0" anchor="ctr"/>
+          <a:lstStyle/>
+          <a:p>
+            <a:pPr indent="0" marL="0">
+              <a:buNone/>
+            </a:pPr>
+            <a:r>
+              <a:rPr lang="en-US" sz="2400" b="1" dirty="0">
                 <a:solidFill>
                   <a:srgbClr val="522CBA"/>
                 </a:solidFill>
-                <a:latin typeface="Cambria" pitchFamily="34" charset="0"/>
-                <a:ea typeface="Cambria" pitchFamily="34" charset="-122"/>
-                <a:cs typeface="Cambria" pitchFamily="34" charset="-120"/>
+                <a:latin typeface="IBM Plex Sans" pitchFamily="34" charset="0"/>
+                <a:ea typeface="IBM Plex Sans" pitchFamily="34" charset="-122"/>
+                <a:cs typeface="IBM Plex Sans" pitchFamily="34" charset="-120"/>
               </a:rPr>
               <a:t>16</a:t>
             </a:r>
-            <a:endParaRPr lang="en-US" sz="2500" dirty="0"/>
-          </a:p>
-        </p:txBody>
-      </p:sp>
-      <p:sp>
-        <p:nvSpPr>
-          <p:cNvPr id="9" name="Text 7"/>
+            <a:endParaRPr lang="en-US" sz="2400" dirty="0"/>
+          </a:p>
+        </p:txBody>
+      </p:sp>
+      <p:sp>
+        <p:nvSpPr>
+          <p:cNvPr id="12" name="Text 10"/>
           <p:cNvSpPr/>
           <p:nvPr/>
         </p:nvSpPr>
@@ -5699,9 +6299,9 @@
                 <a:solidFill>
                   <a:srgbClr val="000000"/>
                 </a:solidFill>
-                <a:latin typeface="Calibri" pitchFamily="34" charset="0"/>
-                <a:ea typeface="Calibri" pitchFamily="34" charset="-122"/>
-                <a:cs typeface="Calibri" pitchFamily="34" charset="-120"/>
+                <a:latin typeface="IBM Plex Sans" pitchFamily="34" charset="0"/>
+                <a:ea typeface="IBM Plex Sans" pitchFamily="34" charset="-122"/>
+                <a:cs typeface="IBM Plex Sans" pitchFamily="34" charset="-120"/>
               </a:rPr>
               <a:t>columns</a:t>
             </a:r>
@@ -5711,7 +6311,7 @@
       </p:sp>
       <p:sp>
         <p:nvSpPr>
-          <p:cNvPr id="10" name="Shape 8"/>
+          <p:cNvPr id="13" name="Shape 11"/>
           <p:cNvSpPr/>
           <p:nvPr/>
         </p:nvSpPr>
@@ -5745,46 +6345,71 @@
       </p:sp>
       <p:sp>
         <p:nvSpPr>
-          <p:cNvPr id="11" name="Text 9"/>
+          <p:cNvPr id="14" name="Shape 12"/>
+          <p:cNvSpPr/>
+          <p:nvPr/>
+        </p:nvSpPr>
+        <p:spPr>
+          <a:xfrm>
+            <a:off x="8503920" y="1773936"/>
+            <a:ext cx="146304" cy="146304"/>
+          </a:xfrm>
+          <a:prstGeom prst="ellipse">
+            <a:avLst/>
+          </a:prstGeom>
+          <a:solidFill>
+            <a:srgbClr val="57E3D8"/>
+          </a:solidFill>
+          <a:ln w="12700">
+            <a:solidFill>
+              <a:srgbClr val="333333"/>
+            </a:solidFill>
+            <a:prstDash val="solid"/>
+          </a:ln>
+        </p:spPr>
+      </p:sp>
+      <p:sp>
+        <p:nvSpPr>
+          <p:cNvPr id="15" name="Text 13"/>
           <p:cNvSpPr/>
           <p:nvPr/>
         </p:nvSpPr>
         <p:spPr>
           <a:xfrm>
             <a:off x="6419088" y="1773936"/>
-            <a:ext cx="2286000" cy="512064"/>
-          </a:xfrm>
-          <a:prstGeom prst="rect">
-            <a:avLst/>
-          </a:prstGeom>
-          <a:noFill/>
-          <a:ln/>
-        </p:spPr>
-        <p:txBody>
-          <a:bodyPr wrap="square" lIns="0" tIns="0" rIns="0" bIns="0" rtlCol="0" anchor="ctr"/>
-          <a:lstStyle/>
-          <a:p>
-            <a:pPr indent="0" marL="0">
-              <a:buNone/>
-            </a:pPr>
-            <a:r>
-              <a:rPr lang="en-US" sz="2500" b="1" dirty="0">
+            <a:ext cx="2011680" cy="512064"/>
+          </a:xfrm>
+          <a:prstGeom prst="rect">
+            <a:avLst/>
+          </a:prstGeom>
+          <a:noFill/>
+          <a:ln/>
+        </p:spPr>
+        <p:txBody>
+          <a:bodyPr wrap="square" lIns="0" tIns="0" rIns="0" bIns="0" rtlCol="0" anchor="ctr"/>
+          <a:lstStyle/>
+          <a:p>
+            <a:pPr indent="0" marL="0">
+              <a:buNone/>
+            </a:pPr>
+            <a:r>
+              <a:rPr lang="en-US" sz="2400" b="1" dirty="0">
                 <a:solidFill>
                   <a:srgbClr val="522CBA"/>
                 </a:solidFill>
-                <a:latin typeface="Cambria" pitchFamily="34" charset="0"/>
-                <a:ea typeface="Cambria" pitchFamily="34" charset="-122"/>
-                <a:cs typeface="Cambria" pitchFamily="34" charset="-120"/>
+                <a:latin typeface="IBM Plex Sans" pitchFamily="34" charset="0"/>
+                <a:ea typeface="IBM Plex Sans" pitchFamily="34" charset="-122"/>
+                <a:cs typeface="IBM Plex Sans" pitchFamily="34" charset="-120"/>
               </a:rPr>
               <a:t>20.3%</a:t>
             </a:r>
-            <a:endParaRPr lang="en-US" sz="2500" dirty="0"/>
-          </a:p>
-        </p:txBody>
-      </p:sp>
-      <p:sp>
-        <p:nvSpPr>
-          <p:cNvPr id="12" name="Text 10"/>
+            <a:endParaRPr lang="en-US" sz="2400" dirty="0"/>
+          </a:p>
+        </p:txBody>
+      </p:sp>
+      <p:sp>
+        <p:nvSpPr>
+          <p:cNvPr id="16" name="Text 14"/>
           <p:cNvSpPr/>
           <p:nvPr/>
         </p:nvSpPr>
@@ -5811,9 +6436,9 @@
                 <a:solidFill>
                   <a:srgbClr val="000000"/>
                 </a:solidFill>
-                <a:latin typeface="Calibri" pitchFamily="34" charset="0"/>
-                <a:ea typeface="Calibri" pitchFamily="34" charset="-122"/>
-                <a:cs typeface="Calibri" pitchFamily="34" charset="-120"/>
+                <a:latin typeface="IBM Plex Sans" pitchFamily="34" charset="0"/>
+                <a:ea typeface="IBM Plex Sans" pitchFamily="34" charset="-122"/>
+                <a:cs typeface="IBM Plex Sans" pitchFamily="34" charset="-120"/>
               </a:rPr>
               <a:t>never reviewed</a:t>
             </a:r>
@@ -5823,7 +6448,7 @@
       </p:sp>
       <p:sp>
         <p:nvSpPr>
-          <p:cNvPr id="13" name="Shape 11"/>
+          <p:cNvPr id="17" name="Shape 15"/>
           <p:cNvSpPr/>
           <p:nvPr/>
         </p:nvSpPr>
@@ -5857,46 +6482,71 @@
       </p:sp>
       <p:sp>
         <p:nvSpPr>
-          <p:cNvPr id="14" name="Text 12"/>
+          <p:cNvPr id="18" name="Shape 16"/>
+          <p:cNvSpPr/>
+          <p:nvPr/>
+        </p:nvSpPr>
+        <p:spPr>
+          <a:xfrm>
+            <a:off x="11329416" y="1773936"/>
+            <a:ext cx="146304" cy="146304"/>
+          </a:xfrm>
+          <a:prstGeom prst="ellipse">
+            <a:avLst/>
+          </a:prstGeom>
+          <a:solidFill>
+            <a:srgbClr val="F4A664"/>
+          </a:solidFill>
+          <a:ln w="12700">
+            <a:solidFill>
+              <a:srgbClr val="333333"/>
+            </a:solidFill>
+            <a:prstDash val="solid"/>
+          </a:ln>
+        </p:spPr>
+      </p:sp>
+      <p:sp>
+        <p:nvSpPr>
+          <p:cNvPr id="19" name="Text 17"/>
           <p:cNvSpPr/>
           <p:nvPr/>
         </p:nvSpPr>
         <p:spPr>
           <a:xfrm>
             <a:off x="9244584" y="1773936"/>
-            <a:ext cx="2286000" cy="512064"/>
-          </a:xfrm>
-          <a:prstGeom prst="rect">
-            <a:avLst/>
-          </a:prstGeom>
-          <a:noFill/>
-          <a:ln/>
-        </p:spPr>
-        <p:txBody>
-          <a:bodyPr wrap="square" lIns="0" tIns="0" rIns="0" bIns="0" rtlCol="0" anchor="ctr"/>
-          <a:lstStyle/>
-          <a:p>
-            <a:pPr indent="0" marL="0">
-              <a:buNone/>
-            </a:pPr>
-            <a:r>
-              <a:rPr lang="en-US" sz="2500" b="1" dirty="0">
+            <a:ext cx="2011680" cy="512064"/>
+          </a:xfrm>
+          <a:prstGeom prst="rect">
+            <a:avLst/>
+          </a:prstGeom>
+          <a:noFill/>
+          <a:ln/>
+        </p:spPr>
+        <p:txBody>
+          <a:bodyPr wrap="square" lIns="0" tIns="0" rIns="0" bIns="0" rtlCol="0" anchor="ctr"/>
+          <a:lstStyle/>
+          <a:p>
+            <a:pPr indent="0" marL="0">
+              <a:buNone/>
+            </a:pPr>
+            <a:r>
+              <a:rPr lang="en-US" sz="2400" b="1" dirty="0">
                 <a:solidFill>
                   <a:srgbClr val="522CBA"/>
                 </a:solidFill>
-                <a:latin typeface="Cambria" pitchFamily="34" charset="0"/>
-                <a:ea typeface="Cambria" pitchFamily="34" charset="-122"/>
-                <a:cs typeface="Cambria" pitchFamily="34" charset="-120"/>
+                <a:latin typeface="IBM Plex Sans" pitchFamily="34" charset="0"/>
+                <a:ea typeface="IBM Plex Sans" pitchFamily="34" charset="-122"/>
+                <a:cs typeface="IBM Plex Sans" pitchFamily="34" charset="-120"/>
               </a:rPr>
               <a:t>8 Jul 2019</a:t>
             </a:r>
-            <a:endParaRPr lang="en-US" sz="2500" dirty="0"/>
-          </a:p>
-        </p:txBody>
-      </p:sp>
-      <p:sp>
-        <p:nvSpPr>
-          <p:cNvPr id="15" name="Text 13"/>
+            <a:endParaRPr lang="en-US" sz="2400" dirty="0"/>
+          </a:p>
+        </p:txBody>
+      </p:sp>
+      <p:sp>
+        <p:nvSpPr>
+          <p:cNvPr id="20" name="Text 18"/>
           <p:cNvSpPr/>
           <p:nvPr/>
         </p:nvSpPr>
@@ -5923,9 +6573,9 @@
                 <a:solidFill>
                   <a:srgbClr val="000000"/>
                 </a:solidFill>
-                <a:latin typeface="Calibri" pitchFamily="34" charset="0"/>
-                <a:ea typeface="Calibri" pitchFamily="34" charset="-122"/>
-                <a:cs typeface="Calibri" pitchFamily="34" charset="-120"/>
+                <a:latin typeface="IBM Plex Sans" pitchFamily="34" charset="0"/>
+                <a:ea typeface="IBM Plex Sans" pitchFamily="34" charset="-122"/>
+                <a:cs typeface="IBM Plex Sans" pitchFamily="34" charset="-120"/>
               </a:rPr>
               <a:t>last review</a:t>
             </a:r>
@@ -5935,7 +6585,7 @@
       </p:sp>
       <p:sp>
         <p:nvSpPr>
-          <p:cNvPr id="16" name="Shape 14"/>
+          <p:cNvPr id="21" name="Shape 19"/>
           <p:cNvSpPr/>
           <p:nvPr/>
         </p:nvSpPr>
@@ -5969,14 +6619,39 @@
       </p:sp>
       <p:sp>
         <p:nvSpPr>
-          <p:cNvPr id="17" name="Text 15"/>
-          <p:cNvSpPr/>
-          <p:nvPr/>
-        </p:nvSpPr>
-        <p:spPr>
-          <a:xfrm>
-            <a:off x="841248" y="3328416"/>
-            <a:ext cx="5029200" cy="329184"/>
+          <p:cNvPr id="22" name="Shape 20"/>
+          <p:cNvSpPr/>
+          <p:nvPr/>
+        </p:nvSpPr>
+        <p:spPr>
+          <a:xfrm>
+            <a:off x="841248" y="3429000"/>
+            <a:ext cx="137160" cy="137160"/>
+          </a:xfrm>
+          <a:prstGeom prst="ellipse">
+            <a:avLst/>
+          </a:prstGeom>
+          <a:solidFill>
+            <a:srgbClr val="57E3D8"/>
+          </a:solidFill>
+          <a:ln w="12700">
+            <a:solidFill>
+              <a:srgbClr val="333333"/>
+            </a:solidFill>
+            <a:prstDash val="solid"/>
+          </a:ln>
+        </p:spPr>
+      </p:sp>
+      <p:sp>
+        <p:nvSpPr>
+          <p:cNvPr id="23" name="Text 21"/>
+          <p:cNvSpPr/>
+          <p:nvPr/>
+        </p:nvSpPr>
+        <p:spPr>
+          <a:xfrm>
+            <a:off x="1106424" y="3328416"/>
+            <a:ext cx="4764024" cy="347472"/>
           </a:xfrm>
           <a:prstGeom prst="rect">
             <a:avLst/>
@@ -5996,9 +6671,9 @@
                 <a:solidFill>
                   <a:srgbClr val="9B78F7"/>
                 </a:solidFill>
-                <a:latin typeface="Calibri" pitchFamily="34" charset="0"/>
-                <a:ea typeface="Calibri" pitchFamily="34" charset="-122"/>
-                <a:cs typeface="Calibri" pitchFamily="34" charset="-120"/>
+                <a:latin typeface="IBM Plex Sans" pitchFamily="34" charset="0"/>
+                <a:ea typeface="IBM Plex Sans" pitchFamily="34" charset="-122"/>
+                <a:cs typeface="IBM Plex Sans" pitchFamily="34" charset="-120"/>
               </a:rPr>
               <a:t>Numerical</a:t>
             </a:r>
@@ -6008,14 +6683,14 @@
       </p:sp>
       <p:sp>
         <p:nvSpPr>
-          <p:cNvPr id="18" name="Text 16"/>
-          <p:cNvSpPr/>
-          <p:nvPr/>
-        </p:nvSpPr>
-        <p:spPr>
-          <a:xfrm>
-            <a:off x="841248" y="3712464"/>
-            <a:ext cx="4983480" cy="1737360"/>
+          <p:cNvPr id="24" name="Text 22"/>
+          <p:cNvSpPr/>
+          <p:nvPr/>
+        </p:nvSpPr>
+        <p:spPr>
+          <a:xfrm>
+            <a:off x="841248" y="3749040"/>
+            <a:ext cx="4983480" cy="1700784"/>
           </a:xfrm>
           <a:prstGeom prst="rect">
             <a:avLst/>
@@ -6035,17 +6710,17 @@
               <a:buChar char="•"/>
             </a:pPr>
             <a:r>
-              <a:rPr lang="en-US" sz="1500" dirty="0">
+              <a:rPr lang="en-US" sz="1400" dirty="0">
                 <a:solidFill>
                   <a:srgbClr val="000000"/>
                 </a:solidFill>
-                <a:latin typeface="Calibri" pitchFamily="34" charset="0"/>
-                <a:ea typeface="Calibri" pitchFamily="34" charset="-122"/>
-                <a:cs typeface="Calibri" pitchFamily="34" charset="-120"/>
+                <a:latin typeface="IBM Plex Sans" pitchFamily="34" charset="0"/>
+                <a:ea typeface="IBM Plex Sans" pitchFamily="34" charset="-122"/>
+                <a:cs typeface="IBM Plex Sans" pitchFamily="34" charset="-120"/>
               </a:rPr>
               <a:t>price · minimum_nights · availability_365</a:t>
             </a:r>
-            <a:endParaRPr lang="en-US" sz="1500" dirty="0"/>
+            <a:endParaRPr lang="en-US" sz="1400" dirty="0"/>
           </a:p>
           <a:p>
             <a:pPr marL="342900" indent="-342900">
@@ -6056,17 +6731,17 @@
               <a:buChar char="•"/>
             </a:pPr>
             <a:r>
-              <a:rPr lang="en-US" sz="1500" dirty="0">
+              <a:rPr lang="en-US" sz="1400" dirty="0">
                 <a:solidFill>
                   <a:srgbClr val="000000"/>
                 </a:solidFill>
-                <a:latin typeface="Calibri" pitchFamily="34" charset="0"/>
-                <a:ea typeface="Calibri" pitchFamily="34" charset="-122"/>
-                <a:cs typeface="Calibri" pitchFamily="34" charset="-120"/>
+                <a:latin typeface="IBM Plex Sans" pitchFamily="34" charset="0"/>
+                <a:ea typeface="IBM Plex Sans" pitchFamily="34" charset="-122"/>
+                <a:cs typeface="IBM Plex Sans" pitchFamily="34" charset="-120"/>
               </a:rPr>
               <a:t>number_of_reviews · reviews_per_month</a:t>
             </a:r>
-            <a:endParaRPr lang="en-US" sz="1500" dirty="0"/>
+            <a:endParaRPr lang="en-US" sz="1400" dirty="0"/>
           </a:p>
           <a:p>
             <a:pPr marL="342900" indent="-342900">
@@ -6077,17 +6752,17 @@
               <a:buChar char="•"/>
             </a:pPr>
             <a:r>
-              <a:rPr lang="en-US" sz="1500" dirty="0">
+              <a:rPr lang="en-US" sz="1400" dirty="0">
                 <a:solidFill>
                   <a:srgbClr val="000000"/>
                 </a:solidFill>
-                <a:latin typeface="Calibri" pitchFamily="34" charset="0"/>
-                <a:ea typeface="Calibri" pitchFamily="34" charset="-122"/>
-                <a:cs typeface="Calibri" pitchFamily="34" charset="-120"/>
+                <a:latin typeface="IBM Plex Sans" pitchFamily="34" charset="0"/>
+                <a:ea typeface="IBM Plex Sans" pitchFamily="34" charset="-122"/>
+                <a:cs typeface="IBM Plex Sans" pitchFamily="34" charset="-120"/>
               </a:rPr>
               <a:t>calculated_host_listings_count</a:t>
             </a:r>
-            <a:endParaRPr lang="en-US" sz="1500" dirty="0"/>
+            <a:endParaRPr lang="en-US" sz="1400" dirty="0"/>
           </a:p>
           <a:p>
             <a:pPr marL="342900" indent="-342900">
@@ -6098,23 +6773,23 @@
               <a:buChar char="•"/>
             </a:pPr>
             <a:r>
-              <a:rPr lang="en-US" sz="1500" dirty="0">
+              <a:rPr lang="en-US" sz="1400" dirty="0">
                 <a:solidFill>
                   <a:srgbClr val="000000"/>
                 </a:solidFill>
-                <a:latin typeface="Calibri" pitchFamily="34" charset="0"/>
-                <a:ea typeface="Calibri" pitchFamily="34" charset="-122"/>
-                <a:cs typeface="Calibri" pitchFamily="34" charset="-120"/>
-              </a:rPr>
-              <a:t>id and host_id are labels, not measurements</a:t>
-            </a:r>
-            <a:endParaRPr lang="en-US" sz="1500" dirty="0"/>
-          </a:p>
-        </p:txBody>
-      </p:sp>
-      <p:sp>
-        <p:nvSpPr>
-          <p:cNvPr id="19" name="Text 17"/>
+                <a:latin typeface="IBM Plex Sans" pitchFamily="34" charset="0"/>
+                <a:ea typeface="IBM Plex Sans" pitchFamily="34" charset="-122"/>
+                <a:cs typeface="IBM Plex Sans" pitchFamily="34" charset="-120"/>
+              </a:rPr>
+              <a:t>id and host_id are labels not measurements</a:t>
+            </a:r>
+            <a:endParaRPr lang="en-US" sz="1400" dirty="0"/>
+          </a:p>
+        </p:txBody>
+      </p:sp>
+      <p:sp>
+        <p:nvSpPr>
+          <p:cNvPr id="25" name="Text 23"/>
           <p:cNvSpPr/>
           <p:nvPr/>
         </p:nvSpPr>
@@ -6141,11 +6816,11 @@
                 <a:solidFill>
                   <a:srgbClr val="522CBA"/>
                 </a:solidFill>
-                <a:latin typeface="Calibri" pitchFamily="34" charset="0"/>
-                <a:ea typeface="Calibri" pitchFamily="34" charset="-122"/>
-                <a:cs typeface="Calibri" pitchFamily="34" charset="-120"/>
-              </a:rPr>
-              <a:t>No target variable — price if modelled</a:t>
+                <a:latin typeface="IBM Plex Sans" pitchFamily="34" charset="0"/>
+                <a:ea typeface="IBM Plex Sans" pitchFamily="34" charset="-122"/>
+                <a:cs typeface="IBM Plex Sans" pitchFamily="34" charset="-120"/>
+              </a:rPr>
+              <a:t>No target variable. Price if modelled.</a:t>
             </a:r>
             <a:endParaRPr lang="en-US" sz="1400" dirty="0"/>
           </a:p>
@@ -6153,7 +6828,7 @@
       </p:sp>
       <p:sp>
         <p:nvSpPr>
-          <p:cNvPr id="20" name="Shape 18"/>
+          <p:cNvPr id="26" name="Shape 24"/>
           <p:cNvSpPr/>
           <p:nvPr/>
         </p:nvSpPr>
@@ -6187,14 +6862,39 @@
       </p:sp>
       <p:sp>
         <p:nvSpPr>
-          <p:cNvPr id="21" name="Text 19"/>
-          <p:cNvSpPr/>
-          <p:nvPr/>
-        </p:nvSpPr>
-        <p:spPr>
-          <a:xfrm>
-            <a:off x="6629400" y="3328416"/>
-            <a:ext cx="4754880" cy="329184"/>
+          <p:cNvPr id="27" name="Shape 25"/>
+          <p:cNvSpPr/>
+          <p:nvPr/>
+        </p:nvSpPr>
+        <p:spPr>
+          <a:xfrm>
+            <a:off x="6629400" y="3429000"/>
+            <a:ext cx="137160" cy="137160"/>
+          </a:xfrm>
+          <a:prstGeom prst="ellipse">
+            <a:avLst/>
+          </a:prstGeom>
+          <a:solidFill>
+            <a:srgbClr val="F4A664"/>
+          </a:solidFill>
+          <a:ln w="12700">
+            <a:solidFill>
+              <a:srgbClr val="333333"/>
+            </a:solidFill>
+            <a:prstDash val="solid"/>
+          </a:ln>
+        </p:spPr>
+      </p:sp>
+      <p:sp>
+        <p:nvSpPr>
+          <p:cNvPr id="28" name="Text 26"/>
+          <p:cNvSpPr/>
+          <p:nvPr/>
+        </p:nvSpPr>
+        <p:spPr>
+          <a:xfrm>
+            <a:off x="6894576" y="3328416"/>
+            <a:ext cx="4489704" cy="347472"/>
           </a:xfrm>
           <a:prstGeom prst="rect">
             <a:avLst/>
@@ -6214,9 +6914,9 @@
                 <a:solidFill>
                   <a:srgbClr val="9B78F7"/>
                 </a:solidFill>
-                <a:latin typeface="Calibri" pitchFamily="34" charset="0"/>
-                <a:ea typeface="Calibri" pitchFamily="34" charset="-122"/>
-                <a:cs typeface="Calibri" pitchFamily="34" charset="-120"/>
+                <a:latin typeface="IBM Plex Sans" pitchFamily="34" charset="0"/>
+                <a:ea typeface="IBM Plex Sans" pitchFamily="34" charset="-122"/>
+                <a:cs typeface="IBM Plex Sans" pitchFamily="34" charset="-120"/>
               </a:rPr>
               <a:t>Categorical</a:t>
             </a:r>
@@ -6226,14 +6926,14 @@
       </p:sp>
       <p:sp>
         <p:nvSpPr>
-          <p:cNvPr id="22" name="Text 20"/>
-          <p:cNvSpPr/>
-          <p:nvPr/>
-        </p:nvSpPr>
-        <p:spPr>
-          <a:xfrm>
-            <a:off x="6629400" y="3712464"/>
-            <a:ext cx="4754880" cy="1737360"/>
+          <p:cNvPr id="29" name="Text 27"/>
+          <p:cNvSpPr/>
+          <p:nvPr/>
+        </p:nvSpPr>
+        <p:spPr>
+          <a:xfrm>
+            <a:off x="6629400" y="3749040"/>
+            <a:ext cx="4754880" cy="1700784"/>
           </a:xfrm>
           <a:prstGeom prst="rect">
             <a:avLst/>
@@ -6253,17 +6953,17 @@
               <a:buChar char="•"/>
             </a:pPr>
             <a:r>
-              <a:rPr lang="en-US" sz="1500" dirty="0">
+              <a:rPr lang="en-US" sz="1400" dirty="0">
                 <a:solidFill>
                   <a:srgbClr val="000000"/>
                 </a:solidFill>
-                <a:latin typeface="Calibri" pitchFamily="34" charset="0"/>
-                <a:ea typeface="Calibri" pitchFamily="34" charset="-122"/>
-                <a:cs typeface="Calibri" pitchFamily="34" charset="-120"/>
-              </a:rPr>
-              <a:t>neighbourhood_group — 5 boroughs</a:t>
-            </a:r>
-            <a:endParaRPr lang="en-US" sz="1500" dirty="0"/>
+                <a:latin typeface="IBM Plex Sans" pitchFamily="34" charset="0"/>
+                <a:ea typeface="IBM Plex Sans" pitchFamily="34" charset="-122"/>
+                <a:cs typeface="IBM Plex Sans" pitchFamily="34" charset="-120"/>
+              </a:rPr>
+              <a:t>neighbourhood_group: 5 boroughs</a:t>
+            </a:r>
+            <a:endParaRPr lang="en-US" sz="1400" dirty="0"/>
           </a:p>
           <a:p>
             <a:pPr marL="342900" indent="-342900">
@@ -6274,17 +6974,17 @@
               <a:buChar char="•"/>
             </a:pPr>
             <a:r>
-              <a:rPr lang="en-US" sz="1500" dirty="0">
+              <a:rPr lang="en-US" sz="1400" dirty="0">
                 <a:solidFill>
                   <a:srgbClr val="000000"/>
                 </a:solidFill>
-                <a:latin typeface="Calibri" pitchFamily="34" charset="0"/>
-                <a:ea typeface="Calibri" pitchFamily="34" charset="-122"/>
-                <a:cs typeface="Calibri" pitchFamily="34" charset="-120"/>
-              </a:rPr>
-              <a:t>neighbourhood — 221, imbalanced</a:t>
-            </a:r>
-            <a:endParaRPr lang="en-US" sz="1500" dirty="0"/>
+                <a:latin typeface="IBM Plex Sans" pitchFamily="34" charset="0"/>
+                <a:ea typeface="IBM Plex Sans" pitchFamily="34" charset="-122"/>
+                <a:cs typeface="IBM Plex Sans" pitchFamily="34" charset="-120"/>
+              </a:rPr>
+              <a:t>neighbourhood: 221 values and imbalanced</a:t>
+            </a:r>
+            <a:endParaRPr lang="en-US" sz="1400" dirty="0"/>
           </a:p>
           <a:p>
             <a:pPr marL="342900" indent="-342900">
@@ -6295,17 +6995,17 @@
               <a:buChar char="•"/>
             </a:pPr>
             <a:r>
-              <a:rPr lang="en-US" sz="1500" dirty="0">
+              <a:rPr lang="en-US" sz="1400" dirty="0">
                 <a:solidFill>
                   <a:srgbClr val="000000"/>
                 </a:solidFill>
-                <a:latin typeface="Calibri" pitchFamily="34" charset="0"/>
-                <a:ea typeface="Calibri" pitchFamily="34" charset="-122"/>
-                <a:cs typeface="Calibri" pitchFamily="34" charset="-120"/>
-              </a:rPr>
-              <a:t>room_type — 3 values</a:t>
-            </a:r>
-            <a:endParaRPr lang="en-US" sz="1500" dirty="0"/>
+                <a:latin typeface="IBM Plex Sans" pitchFamily="34" charset="0"/>
+                <a:ea typeface="IBM Plex Sans" pitchFamily="34" charset="-122"/>
+                <a:cs typeface="IBM Plex Sans" pitchFamily="34" charset="-120"/>
+              </a:rPr>
+              <a:t>room_type: 3 values</a:t>
+            </a:r>
+            <a:endParaRPr lang="en-US" sz="1400" dirty="0"/>
           </a:p>
           <a:p>
             <a:pPr marL="342900" indent="-342900">
@@ -6316,23 +7016,23 @@
               <a:buChar char="•"/>
             </a:pPr>
             <a:r>
-              <a:rPr lang="en-US" sz="1500" dirty="0">
+              <a:rPr lang="en-US" sz="1400" dirty="0">
                 <a:solidFill>
                   <a:srgbClr val="000000"/>
                 </a:solidFill>
-                <a:latin typeface="Calibri" pitchFamily="34" charset="0"/>
-                <a:ea typeface="Calibri" pitchFamily="34" charset="-122"/>
-                <a:cs typeface="Calibri" pitchFamily="34" charset="-120"/>
-              </a:rPr>
-              <a:t>host_name — free text</a:t>
-            </a:r>
-            <a:endParaRPr lang="en-US" sz="1500" dirty="0"/>
-          </a:p>
-        </p:txBody>
-      </p:sp>
-      <p:sp>
-        <p:nvSpPr>
-          <p:cNvPr id="23" name="Text 21"/>
+                <a:latin typeface="IBM Plex Sans" pitchFamily="34" charset="0"/>
+                <a:ea typeface="IBM Plex Sans" pitchFamily="34" charset="-122"/>
+                <a:cs typeface="IBM Plex Sans" pitchFamily="34" charset="-120"/>
+              </a:rPr>
+              <a:t>host_name: free text</a:t>
+            </a:r>
+            <a:endParaRPr lang="en-US" sz="1400" dirty="0"/>
+          </a:p>
+        </p:txBody>
+      </p:sp>
+      <p:sp>
+        <p:nvSpPr>
+          <p:cNvPr id="30" name="Text 28"/>
           <p:cNvSpPr/>
           <p:nvPr/>
         </p:nvSpPr>
@@ -6359,11 +7059,11 @@
                 <a:solidFill>
                   <a:srgbClr val="522CBA"/>
                 </a:solidFill>
-                <a:latin typeface="Calibri" pitchFamily="34" charset="0"/>
-                <a:ea typeface="Calibri" pitchFamily="34" charset="-122"/>
-                <a:cs typeface="Calibri" pitchFamily="34" charset="-120"/>
-              </a:rPr>
-              <a:t>Not categorical — name, last_review</a:t>
+                <a:latin typeface="IBM Plex Sans" pitchFamily="34" charset="0"/>
+                <a:ea typeface="IBM Plex Sans" pitchFamily="34" charset="-122"/>
+                <a:cs typeface="IBM Plex Sans" pitchFamily="34" charset="-120"/>
+              </a:rPr>
+              <a:t>Not categorical: name and last_review</a:t>
             </a:r>
             <a:endParaRPr lang="en-US" sz="1400" dirty="0"/>
           </a:p>
@@ -6426,30 +7126,55 @@
               <a:buNone/>
             </a:pPr>
             <a:r>
-              <a:rPr lang="en-US" sz="3600" b="1" dirty="0">
+              <a:rPr lang="en-US" sz="3400" b="1" dirty="0">
                 <a:solidFill>
                   <a:srgbClr val="522CBA"/>
                 </a:solidFill>
-                <a:latin typeface="Cambria" pitchFamily="34" charset="0"/>
-                <a:ea typeface="Cambria" pitchFamily="34" charset="-122"/>
-                <a:cs typeface="Cambria" pitchFamily="34" charset="-120"/>
-              </a:rPr>
-              <a:t>Six problems, six fixes</a:t>
-            </a:r>
-            <a:endParaRPr lang="en-US" sz="3600" dirty="0"/>
-          </a:p>
-        </p:txBody>
-      </p:sp>
-      <p:sp>
-        <p:nvSpPr>
-          <p:cNvPr id="3" name="Text 1"/>
-          <p:cNvSpPr/>
-          <p:nvPr/>
-        </p:nvSpPr>
-        <p:spPr>
-          <a:xfrm>
-            <a:off x="566928" y="1042416"/>
-            <a:ext cx="11064240" cy="329184"/>
+                <a:latin typeface="IBM Plex Sans" pitchFamily="34" charset="0"/>
+                <a:ea typeface="IBM Plex Sans" pitchFamily="34" charset="-122"/>
+                <a:cs typeface="IBM Plex Sans" pitchFamily="34" charset="-120"/>
+              </a:rPr>
+              <a:t>Six problems and six fixes</a:t>
+            </a:r>
+            <a:endParaRPr lang="en-US" sz="3400" dirty="0"/>
+          </a:p>
+        </p:txBody>
+      </p:sp>
+      <p:sp>
+        <p:nvSpPr>
+          <p:cNvPr id="3" name="Shape 1"/>
+          <p:cNvSpPr/>
+          <p:nvPr/>
+        </p:nvSpPr>
+        <p:spPr>
+          <a:xfrm>
+            <a:off x="585216" y="1138428"/>
+            <a:ext cx="146304" cy="146304"/>
+          </a:xfrm>
+          <a:prstGeom prst="ellipse">
+            <a:avLst/>
+          </a:prstGeom>
+          <a:solidFill>
+            <a:srgbClr val="F4A664"/>
+          </a:solidFill>
+          <a:ln w="12700">
+            <a:solidFill>
+              <a:srgbClr val="333333"/>
+            </a:solidFill>
+            <a:prstDash val="solid"/>
+          </a:ln>
+        </p:spPr>
+      </p:sp>
+      <p:sp>
+        <p:nvSpPr>
+          <p:cNvPr id="4" name="Text 2"/>
+          <p:cNvSpPr/>
+          <p:nvPr/>
+        </p:nvSpPr>
+        <p:spPr>
+          <a:xfrm>
+            <a:off x="859536" y="1042416"/>
+            <a:ext cx="10789920" cy="329184"/>
           </a:xfrm>
           <a:prstGeom prst="rect">
             <a:avLst/>
@@ -6469,9 +7194,9 @@
                 <a:solidFill>
                   <a:srgbClr val="9B78F7"/>
                 </a:solidFill>
-                <a:latin typeface="Calibri" pitchFamily="34" charset="0"/>
-                <a:ea typeface="Calibri" pitchFamily="34" charset="-122"/>
-                <a:cs typeface="Calibri" pitchFamily="34" charset="-120"/>
+                <a:latin typeface="IBM Plex Sans" pitchFamily="34" charset="0"/>
+                <a:ea typeface="IBM Plex Sans" pitchFamily="34" charset="-122"/>
+                <a:cs typeface="IBM Plex Sans" pitchFamily="34" charset="-120"/>
               </a:rPr>
               <a:t>The decision matters more than the method</a:t>
             </a:r>
@@ -6481,124 +7206,124 @@
       </p:sp>
       <p:sp>
         <p:nvSpPr>
-          <p:cNvPr id="4" name="Text 2"/>
-          <p:cNvSpPr/>
-          <p:nvPr/>
-        </p:nvSpPr>
-        <p:spPr>
-          <a:xfrm>
-            <a:off x="1481328" y="1481328"/>
-            <a:ext cx="2743200" cy="256032"/>
-          </a:xfrm>
-          <a:prstGeom prst="rect">
-            <a:avLst/>
-          </a:prstGeom>
-          <a:noFill/>
-          <a:ln/>
-        </p:spPr>
-        <p:txBody>
-          <a:bodyPr wrap="square" lIns="0" tIns="0" rIns="0" bIns="0" rtlCol="0" anchor="ctr"/>
-          <a:lstStyle/>
-          <a:p>
-            <a:pPr indent="0" marL="0">
-              <a:buNone/>
-            </a:pPr>
-            <a:r>
-              <a:rPr lang="en-US" sz="1100" b="1" spc="200" kern="0" dirty="0">
+          <p:cNvPr id="5" name="Text 3"/>
+          <p:cNvSpPr/>
+          <p:nvPr/>
+        </p:nvSpPr>
+        <p:spPr>
+          <a:xfrm>
+            <a:off x="1481328" y="1499616"/>
+            <a:ext cx="2743200" cy="237744"/>
+          </a:xfrm>
+          <a:prstGeom prst="rect">
+            <a:avLst/>
+          </a:prstGeom>
+          <a:noFill/>
+          <a:ln/>
+        </p:spPr>
+        <p:txBody>
+          <a:bodyPr wrap="square" lIns="0" tIns="0" rIns="0" bIns="0" rtlCol="0" anchor="ctr"/>
+          <a:lstStyle/>
+          <a:p>
+            <a:pPr indent="0" marL="0">
+              <a:buNone/>
+            </a:pPr>
+            <a:r>
+              <a:rPr lang="en-US" sz="1000" b="1" spc="200" kern="0" dirty="0">
                 <a:solidFill>
                   <a:srgbClr val="9B78F7"/>
                 </a:solidFill>
-                <a:latin typeface="Calibri" pitchFamily="34" charset="0"/>
-                <a:ea typeface="Calibri" pitchFamily="34" charset="-122"/>
-                <a:cs typeface="Calibri" pitchFamily="34" charset="-120"/>
+                <a:latin typeface="IBM Plex Sans" pitchFamily="34" charset="0"/>
+                <a:ea typeface="IBM Plex Sans" pitchFamily="34" charset="-122"/>
+                <a:cs typeface="IBM Plex Sans" pitchFamily="34" charset="-120"/>
               </a:rPr>
               <a:t>PROBLEM</a:t>
             </a:r>
-            <a:endParaRPr lang="en-US" sz="1100" dirty="0"/>
-          </a:p>
-        </p:txBody>
-      </p:sp>
-      <p:sp>
-        <p:nvSpPr>
-          <p:cNvPr id="5" name="Text 3"/>
-          <p:cNvSpPr/>
-          <p:nvPr/>
-        </p:nvSpPr>
-        <p:spPr>
-          <a:xfrm>
-            <a:off x="4315968" y="1481328"/>
-            <a:ext cx="3566160" cy="256032"/>
-          </a:xfrm>
-          <a:prstGeom prst="rect">
-            <a:avLst/>
-          </a:prstGeom>
-          <a:noFill/>
-          <a:ln/>
-        </p:spPr>
-        <p:txBody>
-          <a:bodyPr wrap="square" lIns="0" tIns="0" rIns="0" bIns="0" rtlCol="0" anchor="ctr"/>
-          <a:lstStyle/>
-          <a:p>
-            <a:pPr indent="0" marL="0">
-              <a:buNone/>
-            </a:pPr>
-            <a:r>
-              <a:rPr lang="en-US" sz="1100" b="1" spc="200" kern="0" dirty="0">
+            <a:endParaRPr lang="en-US" sz="1000" dirty="0"/>
+          </a:p>
+        </p:txBody>
+      </p:sp>
+      <p:sp>
+        <p:nvSpPr>
+          <p:cNvPr id="6" name="Text 4"/>
+          <p:cNvSpPr/>
+          <p:nvPr/>
+        </p:nvSpPr>
+        <p:spPr>
+          <a:xfrm>
+            <a:off x="4315968" y="1499616"/>
+            <a:ext cx="3566160" cy="237744"/>
+          </a:xfrm>
+          <a:prstGeom prst="rect">
+            <a:avLst/>
+          </a:prstGeom>
+          <a:noFill/>
+          <a:ln/>
+        </p:spPr>
+        <p:txBody>
+          <a:bodyPr wrap="square" lIns="0" tIns="0" rIns="0" bIns="0" rtlCol="0" anchor="ctr"/>
+          <a:lstStyle/>
+          <a:p>
+            <a:pPr indent="0" marL="0">
+              <a:buNone/>
+            </a:pPr>
+            <a:r>
+              <a:rPr lang="en-US" sz="1000" b="1" spc="200" kern="0" dirty="0">
                 <a:solidFill>
                   <a:srgbClr val="9B78F7"/>
                 </a:solidFill>
-                <a:latin typeface="Calibri" pitchFamily="34" charset="0"/>
-                <a:ea typeface="Calibri" pitchFamily="34" charset="-122"/>
-                <a:cs typeface="Calibri" pitchFamily="34" charset="-120"/>
+                <a:latin typeface="IBM Plex Sans" pitchFamily="34" charset="0"/>
+                <a:ea typeface="IBM Plex Sans" pitchFamily="34" charset="-122"/>
+                <a:cs typeface="IBM Plex Sans" pitchFamily="34" charset="-120"/>
               </a:rPr>
               <a:t>WHAT I FOUND</a:t>
             </a:r>
-            <a:endParaRPr lang="en-US" sz="1100" dirty="0"/>
-          </a:p>
-        </p:txBody>
-      </p:sp>
-      <p:sp>
-        <p:nvSpPr>
-          <p:cNvPr id="6" name="Text 4"/>
-          <p:cNvSpPr/>
-          <p:nvPr/>
-        </p:nvSpPr>
-        <p:spPr>
-          <a:xfrm>
-            <a:off x="8001000" y="1481328"/>
-            <a:ext cx="3383280" cy="256032"/>
-          </a:xfrm>
-          <a:prstGeom prst="rect">
-            <a:avLst/>
-          </a:prstGeom>
-          <a:noFill/>
-          <a:ln/>
-        </p:spPr>
-        <p:txBody>
-          <a:bodyPr wrap="square" lIns="0" tIns="0" rIns="0" bIns="0" rtlCol="0" anchor="ctr"/>
-          <a:lstStyle/>
-          <a:p>
-            <a:pPr indent="0" marL="0">
-              <a:buNone/>
-            </a:pPr>
-            <a:r>
-              <a:rPr lang="en-US" sz="1100" b="1" spc="200" kern="0" dirty="0">
+            <a:endParaRPr lang="en-US" sz="1000" dirty="0"/>
+          </a:p>
+        </p:txBody>
+      </p:sp>
+      <p:sp>
+        <p:nvSpPr>
+          <p:cNvPr id="7" name="Text 5"/>
+          <p:cNvSpPr/>
+          <p:nvPr/>
+        </p:nvSpPr>
+        <p:spPr>
+          <a:xfrm>
+            <a:off x="8001000" y="1499616"/>
+            <a:ext cx="3383280" cy="237744"/>
+          </a:xfrm>
+          <a:prstGeom prst="rect">
+            <a:avLst/>
+          </a:prstGeom>
+          <a:noFill/>
+          <a:ln/>
+        </p:spPr>
+        <p:txBody>
+          <a:bodyPr wrap="square" lIns="0" tIns="0" rIns="0" bIns="0" rtlCol="0" anchor="ctr"/>
+          <a:lstStyle/>
+          <a:p>
+            <a:pPr indent="0" marL="0">
+              <a:buNone/>
+            </a:pPr>
+            <a:r>
+              <a:rPr lang="en-US" sz="1000" b="1" spc="200" kern="0" dirty="0">
                 <a:solidFill>
                   <a:srgbClr val="9B78F7"/>
                 </a:solidFill>
-                <a:latin typeface="Calibri" pitchFamily="34" charset="0"/>
-                <a:ea typeface="Calibri" pitchFamily="34" charset="-122"/>
-                <a:cs typeface="Calibri" pitchFamily="34" charset="-120"/>
+                <a:latin typeface="IBM Plex Sans" pitchFamily="34" charset="0"/>
+                <a:ea typeface="IBM Plex Sans" pitchFamily="34" charset="-122"/>
+                <a:cs typeface="IBM Plex Sans" pitchFamily="34" charset="-120"/>
               </a:rPr>
               <a:t>FIX</a:t>
             </a:r>
-            <a:endParaRPr lang="en-US" sz="1100" dirty="0"/>
-          </a:p>
-        </p:txBody>
-      </p:sp>
-      <p:sp>
-        <p:nvSpPr>
-          <p:cNvPr id="7" name="Shape 5"/>
+            <a:endParaRPr lang="en-US" sz="1000" dirty="0"/>
+          </a:p>
+        </p:txBody>
+      </p:sp>
+      <p:sp>
+        <p:nvSpPr>
+          <p:cNvPr id="8" name="Shape 6"/>
           <p:cNvSpPr/>
           <p:nvPr/>
         </p:nvSpPr>
@@ -6632,7 +7357,7 @@
       </p:sp>
       <p:sp>
         <p:nvSpPr>
-          <p:cNvPr id="8" name="Shape 6"/>
+          <p:cNvPr id="9" name="Shape 7"/>
           <p:cNvSpPr/>
           <p:nvPr/>
         </p:nvSpPr>
@@ -6657,7 +7382,7 @@
       </p:sp>
       <p:sp>
         <p:nvSpPr>
-          <p:cNvPr id="9" name="Text 7"/>
+          <p:cNvPr id="10" name="Text 8"/>
           <p:cNvSpPr/>
           <p:nvPr/>
         </p:nvSpPr>
@@ -6684,9 +7409,9 @@
                 <a:solidFill>
                   <a:srgbClr val="FFFFFF"/>
                 </a:solidFill>
-                <a:latin typeface="Calibri" pitchFamily="34" charset="0"/>
-                <a:ea typeface="Calibri" pitchFamily="34" charset="-122"/>
-                <a:cs typeface="Calibri" pitchFamily="34" charset="-120"/>
+                <a:latin typeface="IBM Plex Sans" pitchFamily="34" charset="0"/>
+                <a:ea typeface="IBM Plex Sans" pitchFamily="34" charset="-122"/>
+                <a:cs typeface="IBM Plex Sans" pitchFamily="34" charset="-120"/>
               </a:rPr>
               <a:t>1</a:t>
             </a:r>
@@ -6696,7 +7421,7 @@
       </p:sp>
       <p:sp>
         <p:nvSpPr>
-          <p:cNvPr id="10" name="Text 8"/>
+          <p:cNvPr id="11" name="Text 9"/>
           <p:cNvSpPr/>
           <p:nvPr/>
         </p:nvSpPr>
@@ -6719,23 +7444,23 @@
               <a:buNone/>
             </a:pPr>
             <a:r>
-              <a:rPr lang="en-US" sz="1500" b="1" dirty="0">
+              <a:rPr lang="en-US" sz="1400" b="1" dirty="0">
                 <a:solidFill>
                   <a:srgbClr val="000000"/>
                 </a:solidFill>
-                <a:latin typeface="Calibri" pitchFamily="34" charset="0"/>
-                <a:ea typeface="Calibri" pitchFamily="34" charset="-122"/>
-                <a:cs typeface="Calibri" pitchFamily="34" charset="-120"/>
+                <a:latin typeface="IBM Plex Sans" pitchFamily="34" charset="0"/>
+                <a:ea typeface="IBM Plex Sans" pitchFamily="34" charset="-122"/>
+                <a:cs typeface="IBM Plex Sans" pitchFamily="34" charset="-120"/>
               </a:rPr>
               <a:t>Missing values</a:t>
             </a:r>
-            <a:endParaRPr lang="en-US" sz="1500" dirty="0"/>
-          </a:p>
-        </p:txBody>
-      </p:sp>
-      <p:sp>
-        <p:nvSpPr>
-          <p:cNvPr id="11" name="Text 9"/>
+            <a:endParaRPr lang="en-US" sz="1400" dirty="0"/>
+          </a:p>
+        </p:txBody>
+      </p:sp>
+      <p:sp>
+        <p:nvSpPr>
+          <p:cNvPr id="12" name="Text 10"/>
           <p:cNvSpPr/>
           <p:nvPr/>
         </p:nvSpPr>
@@ -6758,23 +7483,23 @@
               <a:buNone/>
             </a:pPr>
             <a:r>
-              <a:rPr lang="en-US" sz="1400" dirty="0">
+              <a:rPr lang="en-US" sz="1300" dirty="0">
                 <a:solidFill>
                   <a:srgbClr val="000000"/>
                 </a:solidFill>
-                <a:latin typeface="Calibri" pitchFamily="34" charset="0"/>
-                <a:ea typeface="Calibri" pitchFamily="34" charset="-122"/>
-                <a:cs typeface="Calibri" pitchFamily="34" charset="-120"/>
-              </a:rPr>
-              <a:t>9,901 with no reviews — 20.3%</a:t>
-            </a:r>
-            <a:endParaRPr lang="en-US" sz="1400" dirty="0"/>
-          </a:p>
-        </p:txBody>
-      </p:sp>
-      <p:sp>
-        <p:nvSpPr>
-          <p:cNvPr id="12" name="Text 10"/>
+                <a:latin typeface="IBM Plex Sans" pitchFamily="34" charset="0"/>
+                <a:ea typeface="IBM Plex Sans" pitchFamily="34" charset="-122"/>
+                <a:cs typeface="IBM Plex Sans" pitchFamily="34" charset="-120"/>
+              </a:rPr>
+              <a:t>9,901 with no reviews. 20.3%</a:t>
+            </a:r>
+            <a:endParaRPr lang="en-US" sz="1300" dirty="0"/>
+          </a:p>
+        </p:txBody>
+      </p:sp>
+      <p:sp>
+        <p:nvSpPr>
+          <p:cNvPr id="13" name="Text 11"/>
           <p:cNvSpPr/>
           <p:nvPr/>
         </p:nvSpPr>
@@ -6797,23 +7522,23 @@
               <a:buNone/>
             </a:pPr>
             <a:r>
-              <a:rPr lang="en-US" sz="1500" b="1" dirty="0">
+              <a:rPr lang="en-US" sz="1400" b="1" dirty="0">
                 <a:solidFill>
                   <a:srgbClr val="522CBA"/>
                 </a:solidFill>
-                <a:latin typeface="Calibri" pitchFamily="34" charset="0"/>
-                <a:ea typeface="Calibri" pitchFamily="34" charset="-122"/>
-                <a:cs typeface="Calibri" pitchFamily="34" charset="-120"/>
+                <a:latin typeface="IBM Plex Sans" pitchFamily="34" charset="0"/>
+                <a:ea typeface="IBM Plex Sans" pitchFamily="34" charset="-122"/>
+                <a:cs typeface="IBM Plex Sans" pitchFamily="34" charset="-120"/>
               </a:rPr>
               <a:t>reviews_per_month → 0</a:t>
             </a:r>
-            <a:endParaRPr lang="en-US" sz="1500" dirty="0"/>
-          </a:p>
-        </p:txBody>
-      </p:sp>
-      <p:sp>
-        <p:nvSpPr>
-          <p:cNvPr id="13" name="Shape 11"/>
+            <a:endParaRPr lang="en-US" sz="1400" dirty="0"/>
+          </a:p>
+        </p:txBody>
+      </p:sp>
+      <p:sp>
+        <p:nvSpPr>
+          <p:cNvPr id="14" name="Shape 12"/>
           <p:cNvSpPr/>
           <p:nvPr/>
         </p:nvSpPr>
@@ -6847,7 +7572,7 @@
       </p:sp>
       <p:sp>
         <p:nvSpPr>
-          <p:cNvPr id="14" name="Shape 12"/>
+          <p:cNvPr id="15" name="Shape 13"/>
           <p:cNvSpPr/>
           <p:nvPr/>
         </p:nvSpPr>
@@ -6872,7 +7597,7 @@
       </p:sp>
       <p:sp>
         <p:nvSpPr>
-          <p:cNvPr id="15" name="Text 13"/>
+          <p:cNvPr id="16" name="Text 14"/>
           <p:cNvSpPr/>
           <p:nvPr/>
         </p:nvSpPr>
@@ -6899,9 +7624,9 @@
                 <a:solidFill>
                   <a:srgbClr val="FFFFFF"/>
                 </a:solidFill>
-                <a:latin typeface="Calibri" pitchFamily="34" charset="0"/>
-                <a:ea typeface="Calibri" pitchFamily="34" charset="-122"/>
-                <a:cs typeface="Calibri" pitchFamily="34" charset="-120"/>
+                <a:latin typeface="IBM Plex Sans" pitchFamily="34" charset="0"/>
+                <a:ea typeface="IBM Plex Sans" pitchFamily="34" charset="-122"/>
+                <a:cs typeface="IBM Plex Sans" pitchFamily="34" charset="-120"/>
               </a:rPr>
               <a:t>2</a:t>
             </a:r>
@@ -6911,7 +7636,7 @@
       </p:sp>
       <p:sp>
         <p:nvSpPr>
-          <p:cNvPr id="16" name="Text 14"/>
+          <p:cNvPr id="17" name="Text 15"/>
           <p:cNvSpPr/>
           <p:nvPr/>
         </p:nvSpPr>
@@ -6934,23 +7659,23 @@
               <a:buNone/>
             </a:pPr>
             <a:r>
-              <a:rPr lang="en-US" sz="1500" b="1" dirty="0">
+              <a:rPr lang="en-US" sz="1400" b="1" dirty="0">
                 <a:solidFill>
                   <a:srgbClr val="000000"/>
                 </a:solidFill>
-                <a:latin typeface="Calibri" pitchFamily="34" charset="0"/>
-                <a:ea typeface="Calibri" pitchFamily="34" charset="-122"/>
-                <a:cs typeface="Calibri" pitchFamily="34" charset="-120"/>
+                <a:latin typeface="IBM Plex Sans" pitchFamily="34" charset="0"/>
+                <a:ea typeface="IBM Plex Sans" pitchFamily="34" charset="-122"/>
+                <a:cs typeface="IBM Plex Sans" pitchFamily="34" charset="-120"/>
               </a:rPr>
               <a:t>Hidden duplicates</a:t>
             </a:r>
-            <a:endParaRPr lang="en-US" sz="1500" dirty="0"/>
-          </a:p>
-        </p:txBody>
-      </p:sp>
-      <p:sp>
-        <p:nvSpPr>
-          <p:cNvPr id="17" name="Text 15"/>
+            <a:endParaRPr lang="en-US" sz="1400" dirty="0"/>
+          </a:p>
+        </p:txBody>
+      </p:sp>
+      <p:sp>
+        <p:nvSpPr>
+          <p:cNvPr id="18" name="Text 16"/>
           <p:cNvSpPr/>
           <p:nvPr/>
         </p:nvSpPr>
@@ -6973,23 +7698,23 @@
               <a:buNone/>
             </a:pPr>
             <a:r>
-              <a:rPr lang="en-US" sz="1400" dirty="0">
+              <a:rPr lang="en-US" sz="1300" dirty="0">
                 <a:solidFill>
                   <a:srgbClr val="000000"/>
                 </a:solidFill>
-                <a:latin typeface="Calibri" pitchFamily="34" charset="0"/>
-                <a:ea typeface="Calibri" pitchFamily="34" charset="-122"/>
-                <a:cs typeface="Calibri" pitchFamily="34" charset="-120"/>
-              </a:rPr>
-              <a:t>duplicated() said 0 · really 217</a:t>
-            </a:r>
-            <a:endParaRPr lang="en-US" sz="1400" dirty="0"/>
-          </a:p>
-        </p:txBody>
-      </p:sp>
-      <p:sp>
-        <p:nvSpPr>
-          <p:cNvPr id="18" name="Text 16"/>
+                <a:latin typeface="IBM Plex Sans" pitchFamily="34" charset="0"/>
+                <a:ea typeface="IBM Plex Sans" pitchFamily="34" charset="-122"/>
+                <a:cs typeface="IBM Plex Sans" pitchFamily="34" charset="-120"/>
+              </a:rPr>
+              <a:t>duplicated said 0. Really 217</a:t>
+            </a:r>
+            <a:endParaRPr lang="en-US" sz="1300" dirty="0"/>
+          </a:p>
+        </p:txBody>
+      </p:sp>
+      <p:sp>
+        <p:nvSpPr>
+          <p:cNvPr id="19" name="Text 17"/>
           <p:cNvSpPr/>
           <p:nvPr/>
         </p:nvSpPr>
@@ -7012,23 +7737,23 @@
               <a:buNone/>
             </a:pPr>
             <a:r>
-              <a:rPr lang="en-US" sz="1500" b="1" dirty="0">
+              <a:rPr lang="en-US" sz="1400" b="1" dirty="0">
                 <a:solidFill>
                   <a:srgbClr val="522CBA"/>
                 </a:solidFill>
-                <a:latin typeface="Calibri" pitchFamily="34" charset="0"/>
-                <a:ea typeface="Calibri" pitchFamily="34" charset="-122"/>
-                <a:cs typeface="Calibri" pitchFamily="34" charset="-120"/>
+                <a:latin typeface="IBM Plex Sans" pitchFamily="34" charset="0"/>
+                <a:ea typeface="IBM Plex Sans" pitchFamily="34" charset="-122"/>
+                <a:cs typeface="IBM Plex Sans" pitchFamily="34" charset="-120"/>
               </a:rPr>
               <a:t>keep the most recent</a:t>
             </a:r>
-            <a:endParaRPr lang="en-US" sz="1500" dirty="0"/>
-          </a:p>
-        </p:txBody>
-      </p:sp>
-      <p:sp>
-        <p:nvSpPr>
-          <p:cNvPr id="19" name="Shape 17"/>
+            <a:endParaRPr lang="en-US" sz="1400" dirty="0"/>
+          </a:p>
+        </p:txBody>
+      </p:sp>
+      <p:sp>
+        <p:nvSpPr>
+          <p:cNvPr id="20" name="Shape 18"/>
           <p:cNvSpPr/>
           <p:nvPr/>
         </p:nvSpPr>
@@ -7062,7 +7787,7 @@
       </p:sp>
       <p:sp>
         <p:nvSpPr>
-          <p:cNvPr id="20" name="Shape 18"/>
+          <p:cNvPr id="21" name="Shape 19"/>
           <p:cNvSpPr/>
           <p:nvPr/>
         </p:nvSpPr>
@@ -7075,7 +7800,7 @@
             <a:avLst/>
           </a:prstGeom>
           <a:solidFill>
-            <a:srgbClr val="522CBA"/>
+            <a:srgbClr val="57E3D8"/>
           </a:solidFill>
           <a:ln w="12700">
             <a:solidFill>
@@ -7087,7 +7812,7 @@
       </p:sp>
       <p:sp>
         <p:nvSpPr>
-          <p:cNvPr id="21" name="Text 19"/>
+          <p:cNvPr id="22" name="Text 20"/>
           <p:cNvSpPr/>
           <p:nvPr/>
         </p:nvSpPr>
@@ -7112,11 +7837,11 @@
             <a:r>
               <a:rPr lang="en-US" sz="1300" b="1" dirty="0">
                 <a:solidFill>
-                  <a:srgbClr val="FFFFFF"/>
-                </a:solidFill>
-                <a:latin typeface="Calibri" pitchFamily="34" charset="0"/>
-                <a:ea typeface="Calibri" pitchFamily="34" charset="-122"/>
-                <a:cs typeface="Calibri" pitchFamily="34" charset="-120"/>
+                  <a:srgbClr val="000000"/>
+                </a:solidFill>
+                <a:latin typeface="IBM Plex Sans" pitchFamily="34" charset="0"/>
+                <a:ea typeface="IBM Plex Sans" pitchFamily="34" charset="-122"/>
+                <a:cs typeface="IBM Plex Sans" pitchFamily="34" charset="-120"/>
               </a:rPr>
               <a:t>3</a:t>
             </a:r>
@@ -7126,7 +7851,7 @@
       </p:sp>
       <p:sp>
         <p:nvSpPr>
-          <p:cNvPr id="22" name="Text 20"/>
+          <p:cNvPr id="23" name="Text 21"/>
           <p:cNvSpPr/>
           <p:nvPr/>
         </p:nvSpPr>
@@ -7149,23 +7874,23 @@
               <a:buNone/>
             </a:pPr>
             <a:r>
-              <a:rPr lang="en-US" sz="1500" b="1" dirty="0">
+              <a:rPr lang="en-US" sz="1400" b="1" dirty="0">
                 <a:solidFill>
                   <a:srgbClr val="000000"/>
                 </a:solidFill>
-                <a:latin typeface="Calibri" pitchFamily="34" charset="0"/>
-                <a:ea typeface="Calibri" pitchFamily="34" charset="-122"/>
-                <a:cs typeface="Calibri" pitchFamily="34" charset="-120"/>
+                <a:latin typeface="IBM Plex Sans" pitchFamily="34" charset="0"/>
+                <a:ea typeface="IBM Plex Sans" pitchFamily="34" charset="-122"/>
+                <a:cs typeface="IBM Plex Sans" pitchFamily="34" charset="-120"/>
               </a:rPr>
               <a:t>Wrong data type</a:t>
             </a:r>
-            <a:endParaRPr lang="en-US" sz="1500" dirty="0"/>
-          </a:p>
-        </p:txBody>
-      </p:sp>
-      <p:sp>
-        <p:nvSpPr>
-          <p:cNvPr id="23" name="Text 21"/>
+            <a:endParaRPr lang="en-US" sz="1400" dirty="0"/>
+          </a:p>
+        </p:txBody>
+      </p:sp>
+      <p:sp>
+        <p:nvSpPr>
+          <p:cNvPr id="24" name="Text 22"/>
           <p:cNvSpPr/>
           <p:nvPr/>
         </p:nvSpPr>
@@ -7188,23 +7913,23 @@
               <a:buNone/>
             </a:pPr>
             <a:r>
-              <a:rPr lang="en-US" sz="1400" dirty="0">
+              <a:rPr lang="en-US" sz="1300" dirty="0">
                 <a:solidFill>
                   <a:srgbClr val="000000"/>
                 </a:solidFill>
-                <a:latin typeface="Calibri" pitchFamily="34" charset="0"/>
-                <a:ea typeface="Calibri" pitchFamily="34" charset="-122"/>
-                <a:cs typeface="Calibri" pitchFamily="34" charset="-120"/>
+                <a:latin typeface="IBM Plex Sans" pitchFamily="34" charset="0"/>
+                <a:ea typeface="IBM Plex Sans" pitchFamily="34" charset="-122"/>
+                <a:cs typeface="IBM Plex Sans" pitchFamily="34" charset="-120"/>
               </a:rPr>
               <a:t>last_review stored as text</a:t>
             </a:r>
-            <a:endParaRPr lang="en-US" sz="1400" dirty="0"/>
-          </a:p>
-        </p:txBody>
-      </p:sp>
-      <p:sp>
-        <p:nvSpPr>
-          <p:cNvPr id="24" name="Text 22"/>
+            <a:endParaRPr lang="en-US" sz="1300" dirty="0"/>
+          </a:p>
+        </p:txBody>
+      </p:sp>
+      <p:sp>
+        <p:nvSpPr>
+          <p:cNvPr id="25" name="Text 23"/>
           <p:cNvSpPr/>
           <p:nvPr/>
         </p:nvSpPr>
@@ -7227,23 +7952,23 @@
               <a:buNone/>
             </a:pPr>
             <a:r>
-              <a:rPr lang="en-US" sz="1500" b="1" dirty="0">
+              <a:rPr lang="en-US" sz="1400" b="1" dirty="0">
                 <a:solidFill>
                   <a:srgbClr val="522CBA"/>
                 </a:solidFill>
-                <a:latin typeface="Calibri" pitchFamily="34" charset="0"/>
-                <a:ea typeface="Calibri" pitchFamily="34" charset="-122"/>
-                <a:cs typeface="Calibri" pitchFamily="34" charset="-120"/>
+                <a:latin typeface="IBM Plex Sans" pitchFamily="34" charset="0"/>
+                <a:ea typeface="IBM Plex Sans" pitchFamily="34" charset="-122"/>
+                <a:cs typeface="IBM Plex Sans" pitchFamily="34" charset="-120"/>
               </a:rPr>
               <a:t>convert to datetime</a:t>
             </a:r>
-            <a:endParaRPr lang="en-US" sz="1500" dirty="0"/>
-          </a:p>
-        </p:txBody>
-      </p:sp>
-      <p:sp>
-        <p:nvSpPr>
-          <p:cNvPr id="25" name="Shape 23"/>
+            <a:endParaRPr lang="en-US" sz="1400" dirty="0"/>
+          </a:p>
+        </p:txBody>
+      </p:sp>
+      <p:sp>
+        <p:nvSpPr>
+          <p:cNvPr id="26" name="Shape 24"/>
           <p:cNvSpPr/>
           <p:nvPr/>
         </p:nvSpPr>
@@ -7277,7 +8002,7 @@
       </p:sp>
       <p:sp>
         <p:nvSpPr>
-          <p:cNvPr id="26" name="Shape 24"/>
+          <p:cNvPr id="27" name="Shape 25"/>
           <p:cNvSpPr/>
           <p:nvPr/>
         </p:nvSpPr>
@@ -7290,7 +8015,7 @@
             <a:avLst/>
           </a:prstGeom>
           <a:solidFill>
-            <a:srgbClr val="9B78F7"/>
+            <a:srgbClr val="F4A664"/>
           </a:solidFill>
           <a:ln w="12700">
             <a:solidFill>
@@ -7302,7 +8027,7 @@
       </p:sp>
       <p:sp>
         <p:nvSpPr>
-          <p:cNvPr id="27" name="Text 25"/>
+          <p:cNvPr id="28" name="Text 26"/>
           <p:cNvSpPr/>
           <p:nvPr/>
         </p:nvSpPr>
@@ -7327,11 +8052,11 @@
             <a:r>
               <a:rPr lang="en-US" sz="1300" b="1" dirty="0">
                 <a:solidFill>
-                  <a:srgbClr val="FFFFFF"/>
-                </a:solidFill>
-                <a:latin typeface="Calibri" pitchFamily="34" charset="0"/>
-                <a:ea typeface="Calibri" pitchFamily="34" charset="-122"/>
-                <a:cs typeface="Calibri" pitchFamily="34" charset="-120"/>
+                  <a:srgbClr val="000000"/>
+                </a:solidFill>
+                <a:latin typeface="IBM Plex Sans" pitchFamily="34" charset="0"/>
+                <a:ea typeface="IBM Plex Sans" pitchFamily="34" charset="-122"/>
+                <a:cs typeface="IBM Plex Sans" pitchFamily="34" charset="-120"/>
               </a:rPr>
               <a:t>4</a:t>
             </a:r>
@@ -7341,7 +8066,7 @@
       </p:sp>
       <p:sp>
         <p:nvSpPr>
-          <p:cNvPr id="28" name="Text 26"/>
+          <p:cNvPr id="29" name="Text 27"/>
           <p:cNvSpPr/>
           <p:nvPr/>
         </p:nvSpPr>
@@ -7364,23 +8089,23 @@
               <a:buNone/>
             </a:pPr>
             <a:r>
-              <a:rPr lang="en-US" sz="1500" b="1" dirty="0">
+              <a:rPr lang="en-US" sz="1400" b="1" dirty="0">
                 <a:solidFill>
                   <a:srgbClr val="000000"/>
                 </a:solidFill>
-                <a:latin typeface="Calibri" pitchFamily="34" charset="0"/>
-                <a:ea typeface="Calibri" pitchFamily="34" charset="-122"/>
-                <a:cs typeface="Calibri" pitchFamily="34" charset="-120"/>
+                <a:latin typeface="IBM Plex Sans" pitchFamily="34" charset="0"/>
+                <a:ea typeface="IBM Plex Sans" pitchFamily="34" charset="-122"/>
+                <a:cs typeface="IBM Plex Sans" pitchFamily="34" charset="-120"/>
               </a:rPr>
               <a:t>Invalid values</a:t>
             </a:r>
-            <a:endParaRPr lang="en-US" sz="1500" dirty="0"/>
-          </a:p>
-        </p:txBody>
-      </p:sp>
-      <p:sp>
-        <p:nvSpPr>
-          <p:cNvPr id="29" name="Text 27"/>
+            <a:endParaRPr lang="en-US" sz="1400" dirty="0"/>
+          </a:p>
+        </p:txBody>
+      </p:sp>
+      <p:sp>
+        <p:nvSpPr>
+          <p:cNvPr id="30" name="Text 28"/>
           <p:cNvSpPr/>
           <p:nvPr/>
         </p:nvSpPr>
@@ -7403,23 +8128,23 @@
               <a:buNone/>
             </a:pPr>
             <a:r>
-              <a:rPr lang="en-US" sz="1400" dirty="0">
+              <a:rPr lang="en-US" sz="1300" dirty="0">
                 <a:solidFill>
                   <a:srgbClr val="000000"/>
                 </a:solidFill>
-                <a:latin typeface="Calibri" pitchFamily="34" charset="0"/>
-                <a:ea typeface="Calibri" pitchFamily="34" charset="-122"/>
-                <a:cs typeface="Calibri" pitchFamily="34" charset="-120"/>
+                <a:latin typeface="IBM Plex Sans" pitchFamily="34" charset="0"/>
+                <a:ea typeface="IBM Plex Sans" pitchFamily="34" charset="-122"/>
+                <a:cs typeface="IBM Plex Sans" pitchFamily="34" charset="-120"/>
               </a:rPr>
               <a:t>11 listings priced at $0</a:t>
             </a:r>
-            <a:endParaRPr lang="en-US" sz="1400" dirty="0"/>
-          </a:p>
-        </p:txBody>
-      </p:sp>
-      <p:sp>
-        <p:nvSpPr>
-          <p:cNvPr id="30" name="Text 28"/>
+            <a:endParaRPr lang="en-US" sz="1300" dirty="0"/>
+          </a:p>
+        </p:txBody>
+      </p:sp>
+      <p:sp>
+        <p:nvSpPr>
+          <p:cNvPr id="31" name="Text 29"/>
           <p:cNvSpPr/>
           <p:nvPr/>
         </p:nvSpPr>
@@ -7442,23 +8167,23 @@
               <a:buNone/>
             </a:pPr>
             <a:r>
-              <a:rPr lang="en-US" sz="1500" b="1" dirty="0">
+              <a:rPr lang="en-US" sz="1400" b="1" dirty="0">
                 <a:solidFill>
                   <a:srgbClr val="522CBA"/>
                 </a:solidFill>
-                <a:latin typeface="Calibri" pitchFamily="34" charset="0"/>
-                <a:ea typeface="Calibri" pitchFamily="34" charset="-122"/>
-                <a:cs typeface="Calibri" pitchFamily="34" charset="-120"/>
+                <a:latin typeface="IBM Plex Sans" pitchFamily="34" charset="0"/>
+                <a:ea typeface="IBM Plex Sans" pitchFamily="34" charset="-122"/>
+                <a:cs typeface="IBM Plex Sans" pitchFamily="34" charset="-120"/>
               </a:rPr>
               <a:t>group median by location</a:t>
             </a:r>
-            <a:endParaRPr lang="en-US" sz="1500" dirty="0"/>
-          </a:p>
-        </p:txBody>
-      </p:sp>
-      <p:sp>
-        <p:nvSpPr>
-          <p:cNvPr id="31" name="Shape 29"/>
+            <a:endParaRPr lang="en-US" sz="1400" dirty="0"/>
+          </a:p>
+        </p:txBody>
+      </p:sp>
+      <p:sp>
+        <p:nvSpPr>
+          <p:cNvPr id="32" name="Shape 30"/>
           <p:cNvSpPr/>
           <p:nvPr/>
         </p:nvSpPr>
@@ -7492,7 +8217,7 @@
       </p:sp>
       <p:sp>
         <p:nvSpPr>
-          <p:cNvPr id="32" name="Shape 30"/>
+          <p:cNvPr id="33" name="Shape 31"/>
           <p:cNvSpPr/>
           <p:nvPr/>
         </p:nvSpPr>
@@ -7517,7 +8242,7 @@
       </p:sp>
       <p:sp>
         <p:nvSpPr>
-          <p:cNvPr id="33" name="Text 31"/>
+          <p:cNvPr id="34" name="Text 32"/>
           <p:cNvSpPr/>
           <p:nvPr/>
         </p:nvSpPr>
@@ -7544,9 +8269,9 @@
                 <a:solidFill>
                   <a:srgbClr val="FFFFFF"/>
                 </a:solidFill>
-                <a:latin typeface="Calibri" pitchFamily="34" charset="0"/>
-                <a:ea typeface="Calibri" pitchFamily="34" charset="-122"/>
-                <a:cs typeface="Calibri" pitchFamily="34" charset="-120"/>
+                <a:latin typeface="IBM Plex Sans" pitchFamily="34" charset="0"/>
+                <a:ea typeface="IBM Plex Sans" pitchFamily="34" charset="-122"/>
+                <a:cs typeface="IBM Plex Sans" pitchFamily="34" charset="-120"/>
               </a:rPr>
               <a:t>5</a:t>
             </a:r>
@@ -7556,7 +8281,7 @@
       </p:sp>
       <p:sp>
         <p:nvSpPr>
-          <p:cNvPr id="34" name="Text 32"/>
+          <p:cNvPr id="35" name="Text 33"/>
           <p:cNvSpPr/>
           <p:nvPr/>
         </p:nvSpPr>
@@ -7579,23 +8304,23 @@
               <a:buNone/>
             </a:pPr>
             <a:r>
-              <a:rPr lang="en-US" sz="1500" b="1" dirty="0">
+              <a:rPr lang="en-US" sz="1400" b="1" dirty="0">
                 <a:solidFill>
                   <a:srgbClr val="000000"/>
                 </a:solidFill>
-                <a:latin typeface="Calibri" pitchFamily="34" charset="0"/>
-                <a:ea typeface="Calibri" pitchFamily="34" charset="-122"/>
-                <a:cs typeface="Calibri" pitchFamily="34" charset="-120"/>
+                <a:latin typeface="IBM Plex Sans" pitchFamily="34" charset="0"/>
+                <a:ea typeface="IBM Plex Sans" pitchFamily="34" charset="-122"/>
+                <a:cs typeface="IBM Plex Sans" pitchFamily="34" charset="-120"/>
               </a:rPr>
               <a:t>Inconsistent categories</a:t>
             </a:r>
-            <a:endParaRPr lang="en-US" sz="1500" dirty="0"/>
-          </a:p>
-        </p:txBody>
-      </p:sp>
-      <p:sp>
-        <p:nvSpPr>
-          <p:cNvPr id="35" name="Text 33"/>
+            <a:endParaRPr lang="en-US" sz="1400" dirty="0"/>
+          </a:p>
+        </p:txBody>
+      </p:sp>
+      <p:sp>
+        <p:nvSpPr>
+          <p:cNvPr id="36" name="Text 34"/>
           <p:cNvSpPr/>
           <p:nvPr/>
         </p:nvSpPr>
@@ -7618,23 +8343,23 @@
               <a:buNone/>
             </a:pPr>
             <a:r>
-              <a:rPr lang="en-US" sz="1400" dirty="0">
+              <a:rPr lang="en-US" sz="1300" dirty="0">
                 <a:solidFill>
                   <a:srgbClr val="000000"/>
                 </a:solidFill>
-                <a:latin typeface="Calibri" pitchFamily="34" charset="0"/>
-                <a:ea typeface="Calibri" pitchFamily="34" charset="-122"/>
-                <a:cs typeface="Calibri" pitchFamily="34" charset="-120"/>
+                <a:latin typeface="IBM Plex Sans" pitchFamily="34" charset="0"/>
+                <a:ea typeface="IBM Plex Sans" pitchFamily="34" charset="-122"/>
+                <a:cs typeface="IBM Plex Sans" pitchFamily="34" charset="-120"/>
               </a:rPr>
               <a:t>11,453 host names → 11,429</a:t>
             </a:r>
-            <a:endParaRPr lang="en-US" sz="1400" dirty="0"/>
-          </a:p>
-        </p:txBody>
-      </p:sp>
-      <p:sp>
-        <p:nvSpPr>
-          <p:cNvPr id="36" name="Text 34"/>
+            <a:endParaRPr lang="en-US" sz="1300" dirty="0"/>
+          </a:p>
+        </p:txBody>
+      </p:sp>
+      <p:sp>
+        <p:nvSpPr>
+          <p:cNvPr id="37" name="Text 35"/>
           <p:cNvSpPr/>
           <p:nvPr/>
         </p:nvSpPr>
@@ -7657,23 +8382,23 @@
               <a:buNone/>
             </a:pPr>
             <a:r>
-              <a:rPr lang="en-US" sz="1500" b="1" dirty="0">
+              <a:rPr lang="en-US" sz="1400" b="1" dirty="0">
                 <a:solidFill>
                   <a:srgbClr val="522CBA"/>
                 </a:solidFill>
-                <a:latin typeface="Calibri" pitchFamily="34" charset="0"/>
-                <a:ea typeface="Calibri" pitchFamily="34" charset="-122"/>
-                <a:cs typeface="Calibri" pitchFamily="34" charset="-120"/>
-              </a:rPr>
-              <a:t>lowercase + strip</a:t>
-            </a:r>
-            <a:endParaRPr lang="en-US" sz="1500" dirty="0"/>
-          </a:p>
-        </p:txBody>
-      </p:sp>
-      <p:sp>
-        <p:nvSpPr>
-          <p:cNvPr id="37" name="Shape 35"/>
+                <a:latin typeface="IBM Plex Sans" pitchFamily="34" charset="0"/>
+                <a:ea typeface="IBM Plex Sans" pitchFamily="34" charset="-122"/>
+                <a:cs typeface="IBM Plex Sans" pitchFamily="34" charset="-120"/>
+              </a:rPr>
+              <a:t>lowercase and strip</a:t>
+            </a:r>
+            <a:endParaRPr lang="en-US" sz="1400" dirty="0"/>
+          </a:p>
+        </p:txBody>
+      </p:sp>
+      <p:sp>
+        <p:nvSpPr>
+          <p:cNvPr id="38" name="Shape 36"/>
           <p:cNvSpPr/>
           <p:nvPr/>
         </p:nvSpPr>
@@ -7707,7 +8432,7 @@
       </p:sp>
       <p:sp>
         <p:nvSpPr>
-          <p:cNvPr id="38" name="Shape 36"/>
+          <p:cNvPr id="39" name="Shape 37"/>
           <p:cNvSpPr/>
           <p:nvPr/>
         </p:nvSpPr>
@@ -7732,7 +8457,7 @@
       </p:sp>
       <p:sp>
         <p:nvSpPr>
-          <p:cNvPr id="39" name="Text 37"/>
+          <p:cNvPr id="40" name="Text 38"/>
           <p:cNvSpPr/>
           <p:nvPr/>
         </p:nvSpPr>
@@ -7759,9 +8484,9 @@
                 <a:solidFill>
                   <a:srgbClr val="FFFFFF"/>
                 </a:solidFill>
-                <a:latin typeface="Calibri" pitchFamily="34" charset="0"/>
-                <a:ea typeface="Calibri" pitchFamily="34" charset="-122"/>
-                <a:cs typeface="Calibri" pitchFamily="34" charset="-120"/>
+                <a:latin typeface="IBM Plex Sans" pitchFamily="34" charset="0"/>
+                <a:ea typeface="IBM Plex Sans" pitchFamily="34" charset="-122"/>
+                <a:cs typeface="IBM Plex Sans" pitchFamily="34" charset="-120"/>
               </a:rPr>
               <a:t>6</a:t>
             </a:r>
@@ -7771,7 +8496,7 @@
       </p:sp>
       <p:sp>
         <p:nvSpPr>
-          <p:cNvPr id="40" name="Text 38"/>
+          <p:cNvPr id="41" name="Text 39"/>
           <p:cNvSpPr/>
           <p:nvPr/>
         </p:nvSpPr>
@@ -7794,23 +8519,23 @@
               <a:buNone/>
             </a:pPr>
             <a:r>
-              <a:rPr lang="en-US" sz="1500" b="1" dirty="0">
+              <a:rPr lang="en-US" sz="1400" b="1" dirty="0">
                 <a:solidFill>
                   <a:srgbClr val="000000"/>
                 </a:solidFill>
-                <a:latin typeface="Calibri" pitchFamily="34" charset="0"/>
-                <a:ea typeface="Calibri" pitchFamily="34" charset="-122"/>
-                <a:cs typeface="Calibri" pitchFamily="34" charset="-120"/>
+                <a:latin typeface="IBM Plex Sans" pitchFamily="34" charset="0"/>
+                <a:ea typeface="IBM Plex Sans" pitchFamily="34" charset="-122"/>
+                <a:cs typeface="IBM Plex Sans" pitchFamily="34" charset="-120"/>
               </a:rPr>
               <a:t>Outliers</a:t>
             </a:r>
-            <a:endParaRPr lang="en-US" sz="1500" dirty="0"/>
-          </a:p>
-        </p:txBody>
-      </p:sp>
-      <p:sp>
-        <p:nvSpPr>
-          <p:cNvPr id="41" name="Text 39"/>
+            <a:endParaRPr lang="en-US" sz="1400" dirty="0"/>
+          </a:p>
+        </p:txBody>
+      </p:sp>
+      <p:sp>
+        <p:nvSpPr>
+          <p:cNvPr id="42" name="Text 40"/>
           <p:cNvSpPr/>
           <p:nvPr/>
         </p:nvSpPr>
@@ -7833,23 +8558,23 @@
               <a:buNone/>
             </a:pPr>
             <a:r>
-              <a:rPr lang="en-US" sz="1400" dirty="0">
+              <a:rPr lang="en-US" sz="1300" dirty="0">
                 <a:solidFill>
                   <a:srgbClr val="000000"/>
                 </a:solidFill>
-                <a:latin typeface="Calibri" pitchFamily="34" charset="0"/>
-                <a:ea typeface="Calibri" pitchFamily="34" charset="-122"/>
-                <a:cs typeface="Calibri" pitchFamily="34" charset="-120"/>
+                <a:latin typeface="IBM Plex Sans" pitchFamily="34" charset="0"/>
+                <a:ea typeface="IBM Plex Sans" pitchFamily="34" charset="-122"/>
+                <a:cs typeface="IBM Plex Sans" pitchFamily="34" charset="-120"/>
               </a:rPr>
               <a:t>1,250-night minimums</a:t>
             </a:r>
-            <a:endParaRPr lang="en-US" sz="1400" dirty="0"/>
-          </a:p>
-        </p:txBody>
-      </p:sp>
-      <p:sp>
-        <p:nvSpPr>
-          <p:cNvPr id="42" name="Text 40"/>
+            <a:endParaRPr lang="en-US" sz="1300" dirty="0"/>
+          </a:p>
+        </p:txBody>
+      </p:sp>
+      <p:sp>
+        <p:nvSpPr>
+          <p:cNvPr id="43" name="Text 41"/>
           <p:cNvSpPr/>
           <p:nvPr/>
         </p:nvSpPr>
@@ -7872,17 +8597,17 @@
               <a:buNone/>
             </a:pPr>
             <a:r>
-              <a:rPr lang="en-US" sz="1500" b="1" dirty="0">
+              <a:rPr lang="en-US" sz="1400" b="1" dirty="0">
                 <a:solidFill>
                   <a:srgbClr val="522CBA"/>
                 </a:solidFill>
-                <a:latin typeface="Calibri" pitchFamily="34" charset="0"/>
-                <a:ea typeface="Calibri" pitchFamily="34" charset="-122"/>
-                <a:cs typeface="Calibri" pitchFamily="34" charset="-120"/>
-              </a:rPr>
-              <a:t>cap at 365, keep the rest</a:t>
-            </a:r>
-            <a:endParaRPr lang="en-US" sz="1500" dirty="0"/>
+                <a:latin typeface="IBM Plex Sans" pitchFamily="34" charset="0"/>
+                <a:ea typeface="IBM Plex Sans" pitchFamily="34" charset="-122"/>
+                <a:cs typeface="IBM Plex Sans" pitchFamily="34" charset="-120"/>
+              </a:rPr>
+              <a:t>cap at 365 and keep the rest</a:t>
+            </a:r>
+            <a:endParaRPr lang="en-US" sz="1400" dirty="0"/>
           </a:p>
         </p:txBody>
       </p:sp>
@@ -7943,30 +8668,55 @@
               <a:buNone/>
             </a:pPr>
             <a:r>
-              <a:rPr lang="en-US" sz="3600" b="1" dirty="0">
+              <a:rPr lang="en-US" sz="3400" b="1" dirty="0">
                 <a:solidFill>
                   <a:srgbClr val="522CBA"/>
                 </a:solidFill>
-                <a:latin typeface="Cambria" pitchFamily="34" charset="0"/>
-                <a:ea typeface="Cambria" pitchFamily="34" charset="-122"/>
-                <a:cs typeface="Cambria" pitchFamily="34" charset="-120"/>
-              </a:rPr>
-              <a:t>Outliers: real, not wrong</a:t>
-            </a:r>
-            <a:endParaRPr lang="en-US" sz="3600" dirty="0"/>
-          </a:p>
-        </p:txBody>
-      </p:sp>
-      <p:sp>
-        <p:nvSpPr>
-          <p:cNvPr id="3" name="Text 1"/>
-          <p:cNvSpPr/>
-          <p:nvPr/>
-        </p:nvSpPr>
-        <p:spPr>
-          <a:xfrm>
-            <a:off x="566928" y="1042416"/>
-            <a:ext cx="11064240" cy="329184"/>
+                <a:latin typeface="IBM Plex Sans" pitchFamily="34" charset="0"/>
+                <a:ea typeface="IBM Plex Sans" pitchFamily="34" charset="-122"/>
+                <a:cs typeface="IBM Plex Sans" pitchFamily="34" charset="-120"/>
+              </a:rPr>
+              <a:t>Outliers are real not errors</a:t>
+            </a:r>
+            <a:endParaRPr lang="en-US" sz="3400" dirty="0"/>
+          </a:p>
+        </p:txBody>
+      </p:sp>
+      <p:sp>
+        <p:nvSpPr>
+          <p:cNvPr id="3" name="Shape 1"/>
+          <p:cNvSpPr/>
+          <p:nvPr/>
+        </p:nvSpPr>
+        <p:spPr>
+          <a:xfrm>
+            <a:off x="585216" y="1138428"/>
+            <a:ext cx="146304" cy="146304"/>
+          </a:xfrm>
+          <a:prstGeom prst="ellipse">
+            <a:avLst/>
+          </a:prstGeom>
+          <a:solidFill>
+            <a:srgbClr val="57E3D8"/>
+          </a:solidFill>
+          <a:ln w="12700">
+            <a:solidFill>
+              <a:srgbClr val="333333"/>
+            </a:solidFill>
+            <a:prstDash val="solid"/>
+          </a:ln>
+        </p:spPr>
+      </p:sp>
+      <p:sp>
+        <p:nvSpPr>
+          <p:cNvPr id="4" name="Text 2"/>
+          <p:cNvSpPr/>
+          <p:nvPr/>
+        </p:nvSpPr>
+        <p:spPr>
+          <a:xfrm>
+            <a:off x="859536" y="1042416"/>
+            <a:ext cx="10789920" cy="329184"/>
           </a:xfrm>
           <a:prstGeom prst="rect">
             <a:avLst/>
@@ -7986,11 +8736,11 @@
                 <a:solidFill>
                   <a:srgbClr val="9B78F7"/>
                 </a:solidFill>
-                <a:latin typeface="Calibri" pitchFamily="34" charset="0"/>
-                <a:ea typeface="Calibri" pitchFamily="34" charset="-122"/>
-                <a:cs typeface="Calibri" pitchFamily="34" charset="-120"/>
-              </a:rPr>
-              <a:t>Box plots + IQR</a:t>
+                <a:latin typeface="IBM Plex Sans" pitchFamily="34" charset="0"/>
+                <a:ea typeface="IBM Plex Sans" pitchFamily="34" charset="-122"/>
+                <a:cs typeface="IBM Plex Sans" pitchFamily="34" charset="-120"/>
+              </a:rPr>
+              <a:t>Box plots and IQR</a:t>
             </a:r>
             <a:endParaRPr lang="en-US" sz="1500" dirty="0"/>
           </a:p>
@@ -7998,7 +8748,7 @@
       </p:sp>
       <p:sp>
         <p:nvSpPr>
-          <p:cNvPr id="4" name="Shape 2"/>
+          <p:cNvPr id="5" name="Shape 3"/>
           <p:cNvSpPr/>
           <p:nvPr/>
         </p:nvSpPr>
@@ -8032,7 +8782,7 @@
       </p:sp>
       <p:pic>
         <p:nvPicPr>
-          <p:cNvPr id="5" name="Image 0" descr="/tmp/claude-0/-home-user-Tuwaiq-Bootcamp/31d76967-b7b5-527c-bee1-8d14c00fddcd/scratchpad/plots/outliers_box_1.png">    </p:cNvPr>
+          <p:cNvPr id="6" name="Image 0" descr="/tmp/claude-0/-home-user-Tuwaiq-Bootcamp/31d76967-b7b5-527c-bee1-8d14c00fddcd/scratchpad/plots/outliers_box_1.png">    </p:cNvPr>
           <p:cNvPicPr>
             <a:picLocks noChangeAspect="1"/>
           </p:cNvPicPr>
@@ -8055,7 +8805,7 @@
       </p:pic>
       <p:sp>
         <p:nvSpPr>
-          <p:cNvPr id="6" name="Shape 3"/>
+          <p:cNvPr id="7" name="Shape 4"/>
           <p:cNvSpPr/>
           <p:nvPr/>
         </p:nvSpPr>
@@ -8089,52 +8839,77 @@
       </p:sp>
       <p:sp>
         <p:nvSpPr>
-          <p:cNvPr id="7" name="Text 4"/>
-          <p:cNvSpPr/>
-          <p:nvPr/>
-        </p:nvSpPr>
-        <p:spPr>
-          <a:xfrm>
-            <a:off x="8869680" y="1773936"/>
-            <a:ext cx="2560320" cy="329184"/>
-          </a:xfrm>
-          <a:prstGeom prst="rect">
-            <a:avLst/>
-          </a:prstGeom>
-          <a:noFill/>
-          <a:ln/>
-        </p:spPr>
-        <p:txBody>
-          <a:bodyPr wrap="square" lIns="0" tIns="0" rIns="0" bIns="0" rtlCol="0" anchor="ctr"/>
-          <a:lstStyle/>
-          <a:p>
-            <a:pPr indent="0" marL="0">
-              <a:buNone/>
-            </a:pPr>
-            <a:r>
-              <a:rPr lang="en-US" sz="1600" b="1" dirty="0">
+          <p:cNvPr id="8" name="Shape 5"/>
+          <p:cNvSpPr/>
+          <p:nvPr/>
+        </p:nvSpPr>
+        <p:spPr>
+          <a:xfrm>
+            <a:off x="8869680" y="1874520"/>
+            <a:ext cx="137160" cy="137160"/>
+          </a:xfrm>
+          <a:prstGeom prst="ellipse">
+            <a:avLst/>
+          </a:prstGeom>
+          <a:solidFill>
+            <a:srgbClr val="F4A664"/>
+          </a:solidFill>
+          <a:ln w="12700">
+            <a:solidFill>
+              <a:srgbClr val="333333"/>
+            </a:solidFill>
+            <a:prstDash val="solid"/>
+          </a:ln>
+        </p:spPr>
+      </p:sp>
+      <p:sp>
+        <p:nvSpPr>
+          <p:cNvPr id="9" name="Text 6"/>
+          <p:cNvSpPr/>
+          <p:nvPr/>
+        </p:nvSpPr>
+        <p:spPr>
+          <a:xfrm>
+            <a:off x="9134856" y="1773936"/>
+            <a:ext cx="2386584" cy="347472"/>
+          </a:xfrm>
+          <a:prstGeom prst="rect">
+            <a:avLst/>
+          </a:prstGeom>
+          <a:noFill/>
+          <a:ln/>
+        </p:spPr>
+        <p:txBody>
+          <a:bodyPr wrap="square" lIns="0" tIns="0" rIns="0" bIns="0" rtlCol="0" anchor="ctr"/>
+          <a:lstStyle/>
+          <a:p>
+            <a:pPr indent="0" marL="0">
+              <a:buNone/>
+            </a:pPr>
+            <a:r>
+              <a:rPr lang="en-US" sz="1700" b="1" dirty="0">
                 <a:solidFill>
                   <a:srgbClr val="9B78F7"/>
                 </a:solidFill>
-                <a:latin typeface="Calibri" pitchFamily="34" charset="0"/>
-                <a:ea typeface="Calibri" pitchFamily="34" charset="-122"/>
-                <a:cs typeface="Calibri" pitchFamily="34" charset="-120"/>
+                <a:latin typeface="IBM Plex Sans" pitchFamily="34" charset="0"/>
+                <a:ea typeface="IBM Plex Sans" pitchFamily="34" charset="-122"/>
+                <a:cs typeface="IBM Plex Sans" pitchFamily="34" charset="-120"/>
               </a:rPr>
               <a:t>Flagged by IQR</a:t>
             </a:r>
-            <a:endParaRPr lang="en-US" sz="1600" dirty="0"/>
-          </a:p>
-        </p:txBody>
-      </p:sp>
-      <p:sp>
-        <p:nvSpPr>
-          <p:cNvPr id="8" name="Text 5"/>
-          <p:cNvSpPr/>
-          <p:nvPr/>
-        </p:nvSpPr>
-        <p:spPr>
-          <a:xfrm>
-            <a:off x="8869680" y="2231136"/>
+            <a:endParaRPr lang="en-US" sz="1700" dirty="0"/>
+          </a:p>
+        </p:txBody>
+      </p:sp>
+      <p:sp>
+        <p:nvSpPr>
+          <p:cNvPr id="10" name="Text 7"/>
+          <p:cNvSpPr/>
+          <p:nvPr/>
+        </p:nvSpPr>
+        <p:spPr>
+          <a:xfrm>
+            <a:off x="8869680" y="2286000"/>
             <a:ext cx="1783080" cy="384048"/>
           </a:xfrm>
           <a:prstGeom prst="rect">
@@ -8151,29 +8926,107 @@
               <a:buNone/>
             </a:pPr>
             <a:r>
-              <a:rPr lang="en-US" sz="1300" dirty="0">
+              <a:rPr lang="en-US" sz="1200" dirty="0">
                 <a:solidFill>
                   <a:srgbClr val="000000"/>
                 </a:solidFill>
-                <a:latin typeface="Calibri" pitchFamily="34" charset="0"/>
-                <a:ea typeface="Calibri" pitchFamily="34" charset="-122"/>
-                <a:cs typeface="Calibri" pitchFamily="34" charset="-120"/>
+                <a:latin typeface="IBM Plex Sans" pitchFamily="34" charset="0"/>
+                <a:ea typeface="IBM Plex Sans" pitchFamily="34" charset="-122"/>
+                <a:cs typeface="IBM Plex Sans" pitchFamily="34" charset="-120"/>
               </a:rPr>
               <a:t>price</a:t>
             </a:r>
+            <a:endParaRPr lang="en-US" sz="1200" dirty="0"/>
+          </a:p>
+        </p:txBody>
+      </p:sp>
+      <p:sp>
+        <p:nvSpPr>
+          <p:cNvPr id="11" name="Text 8"/>
+          <p:cNvSpPr/>
+          <p:nvPr/>
+        </p:nvSpPr>
+        <p:spPr>
+          <a:xfrm>
+            <a:off x="10607040" y="2286000"/>
+            <a:ext cx="804672" cy="384048"/>
+          </a:xfrm>
+          <a:prstGeom prst="rect">
+            <a:avLst/>
+          </a:prstGeom>
+          <a:noFill/>
+          <a:ln/>
+        </p:spPr>
+        <p:txBody>
+          <a:bodyPr wrap="square" lIns="0" tIns="0" rIns="0" bIns="0" rtlCol="0" anchor="ctr"/>
+          <a:lstStyle/>
+          <a:p>
+            <a:pPr algn="r" indent="0" marL="0">
+              <a:buNone/>
+            </a:pPr>
+            <a:r>
+              <a:rPr lang="en-US" sz="1300" b="1" dirty="0">
+                <a:solidFill>
+                  <a:srgbClr val="522CBA"/>
+                </a:solidFill>
+                <a:latin typeface="IBM Plex Sans" pitchFamily="34" charset="0"/>
+                <a:ea typeface="IBM Plex Sans" pitchFamily="34" charset="-122"/>
+                <a:cs typeface="IBM Plex Sans" pitchFamily="34" charset="-120"/>
+              </a:rPr>
+              <a:t>2,936</a:t>
+            </a:r>
             <a:endParaRPr lang="en-US" sz="1300" dirty="0"/>
           </a:p>
         </p:txBody>
       </p:sp>
       <p:sp>
         <p:nvSpPr>
-          <p:cNvPr id="9" name="Text 6"/>
-          <p:cNvSpPr/>
-          <p:nvPr/>
-        </p:nvSpPr>
-        <p:spPr>
-          <a:xfrm>
-            <a:off x="10607040" y="2231136"/>
+          <p:cNvPr id="12" name="Text 9"/>
+          <p:cNvSpPr/>
+          <p:nvPr/>
+        </p:nvSpPr>
+        <p:spPr>
+          <a:xfrm>
+            <a:off x="8869680" y="2779776"/>
+            <a:ext cx="1783080" cy="384048"/>
+          </a:xfrm>
+          <a:prstGeom prst="rect">
+            <a:avLst/>
+          </a:prstGeom>
+          <a:noFill/>
+          <a:ln/>
+        </p:spPr>
+        <p:txBody>
+          <a:bodyPr wrap="square" lIns="0" tIns="0" rIns="0" bIns="0" rtlCol="0" anchor="ctr"/>
+          <a:lstStyle/>
+          <a:p>
+            <a:pPr indent="0" marL="0">
+              <a:buNone/>
+            </a:pPr>
+            <a:r>
+              <a:rPr lang="en-US" sz="1200" dirty="0">
+                <a:solidFill>
+                  <a:srgbClr val="000000"/>
+                </a:solidFill>
+                <a:latin typeface="IBM Plex Sans" pitchFamily="34" charset="0"/>
+                <a:ea typeface="IBM Plex Sans" pitchFamily="34" charset="-122"/>
+                <a:cs typeface="IBM Plex Sans" pitchFamily="34" charset="-120"/>
+              </a:rPr>
+              <a:t>minimum_nights</a:t>
+            </a:r>
+            <a:endParaRPr lang="en-US" sz="1200" dirty="0"/>
+          </a:p>
+        </p:txBody>
+      </p:sp>
+      <p:sp>
+        <p:nvSpPr>
+          <p:cNvPr id="13" name="Text 10"/>
+          <p:cNvSpPr/>
+          <p:nvPr/>
+        </p:nvSpPr>
+        <p:spPr>
+          <a:xfrm>
+            <a:off x="10607040" y="2779776"/>
             <a:ext cx="804672" cy="384048"/>
           </a:xfrm>
           <a:prstGeom prst="rect">
@@ -8190,29 +9043,29 @@
               <a:buNone/>
             </a:pPr>
             <a:r>
-              <a:rPr lang="en-US" sz="1400" b="1" dirty="0">
+              <a:rPr lang="en-US" sz="1300" b="1" dirty="0">
                 <a:solidFill>
                   <a:srgbClr val="522CBA"/>
                 </a:solidFill>
-                <a:latin typeface="Calibri" pitchFamily="34" charset="0"/>
-                <a:ea typeface="Calibri" pitchFamily="34" charset="-122"/>
-                <a:cs typeface="Calibri" pitchFamily="34" charset="-120"/>
-              </a:rPr>
-              <a:t>2,936</a:t>
-            </a:r>
-            <a:endParaRPr lang="en-US" sz="1400" dirty="0"/>
-          </a:p>
-        </p:txBody>
-      </p:sp>
-      <p:sp>
-        <p:nvSpPr>
-          <p:cNvPr id="10" name="Text 7"/>
-          <p:cNvSpPr/>
-          <p:nvPr/>
-        </p:nvSpPr>
-        <p:spPr>
-          <a:xfrm>
-            <a:off x="8869680" y="2734056"/>
+                <a:latin typeface="IBM Plex Sans" pitchFamily="34" charset="0"/>
+                <a:ea typeface="IBM Plex Sans" pitchFamily="34" charset="-122"/>
+                <a:cs typeface="IBM Plex Sans" pitchFamily="34" charset="-120"/>
+              </a:rPr>
+              <a:t>6,466</a:t>
+            </a:r>
+            <a:endParaRPr lang="en-US" sz="1300" dirty="0"/>
+          </a:p>
+        </p:txBody>
+      </p:sp>
+      <p:sp>
+        <p:nvSpPr>
+          <p:cNvPr id="14" name="Text 11"/>
+          <p:cNvSpPr/>
+          <p:nvPr/>
+        </p:nvSpPr>
+        <p:spPr>
+          <a:xfrm>
+            <a:off x="8869680" y="3273552"/>
             <a:ext cx="1783080" cy="384048"/>
           </a:xfrm>
           <a:prstGeom prst="rect">
@@ -8229,15 +9082,54 @@
               <a:buNone/>
             </a:pPr>
             <a:r>
-              <a:rPr lang="en-US" sz="1300" dirty="0">
+              <a:rPr lang="en-US" sz="1200" dirty="0">
                 <a:solidFill>
                   <a:srgbClr val="000000"/>
                 </a:solidFill>
-                <a:latin typeface="Calibri" pitchFamily="34" charset="0"/>
-                <a:ea typeface="Calibri" pitchFamily="34" charset="-122"/>
-                <a:cs typeface="Calibri" pitchFamily="34" charset="-120"/>
-              </a:rPr>
-              <a:t>minimum_nights</a:t>
+                <a:latin typeface="IBM Plex Sans" pitchFamily="34" charset="0"/>
+                <a:ea typeface="IBM Plex Sans" pitchFamily="34" charset="-122"/>
+                <a:cs typeface="IBM Plex Sans" pitchFamily="34" charset="-120"/>
+              </a:rPr>
+              <a:t>number_of_reviews</a:t>
+            </a:r>
+            <a:endParaRPr lang="en-US" sz="1200" dirty="0"/>
+          </a:p>
+        </p:txBody>
+      </p:sp>
+      <p:sp>
+        <p:nvSpPr>
+          <p:cNvPr id="15" name="Text 12"/>
+          <p:cNvSpPr/>
+          <p:nvPr/>
+        </p:nvSpPr>
+        <p:spPr>
+          <a:xfrm>
+            <a:off x="10607040" y="3273552"/>
+            <a:ext cx="804672" cy="384048"/>
+          </a:xfrm>
+          <a:prstGeom prst="rect">
+            <a:avLst/>
+          </a:prstGeom>
+          <a:noFill/>
+          <a:ln/>
+        </p:spPr>
+        <p:txBody>
+          <a:bodyPr wrap="square" lIns="0" tIns="0" rIns="0" bIns="0" rtlCol="0" anchor="ctr"/>
+          <a:lstStyle/>
+          <a:p>
+            <a:pPr algn="r" indent="0" marL="0">
+              <a:buNone/>
+            </a:pPr>
+            <a:r>
+              <a:rPr lang="en-US" sz="1300" b="1" dirty="0">
+                <a:solidFill>
+                  <a:srgbClr val="522CBA"/>
+                </a:solidFill>
+                <a:latin typeface="IBM Plex Sans" pitchFamily="34" charset="0"/>
+                <a:ea typeface="IBM Plex Sans" pitchFamily="34" charset="-122"/>
+                <a:cs typeface="IBM Plex Sans" pitchFamily="34" charset="-120"/>
+              </a:rPr>
+              <a:t>6,021</a:t>
             </a:r>
             <a:endParaRPr lang="en-US" sz="1300" dirty="0"/>
           </a:p>
@@ -8245,13 +9137,52 @@
       </p:sp>
       <p:sp>
         <p:nvSpPr>
-          <p:cNvPr id="11" name="Text 8"/>
-          <p:cNvSpPr/>
-          <p:nvPr/>
-        </p:nvSpPr>
-        <p:spPr>
-          <a:xfrm>
-            <a:off x="10607040" y="2734056"/>
+          <p:cNvPr id="16" name="Text 13"/>
+          <p:cNvSpPr/>
+          <p:nvPr/>
+        </p:nvSpPr>
+        <p:spPr>
+          <a:xfrm>
+            <a:off x="8869680" y="3767328"/>
+            <a:ext cx="1783080" cy="384048"/>
+          </a:xfrm>
+          <a:prstGeom prst="rect">
+            <a:avLst/>
+          </a:prstGeom>
+          <a:noFill/>
+          <a:ln/>
+        </p:spPr>
+        <p:txBody>
+          <a:bodyPr wrap="square" lIns="0" tIns="0" rIns="0" bIns="0" rtlCol="0" anchor="ctr"/>
+          <a:lstStyle/>
+          <a:p>
+            <a:pPr indent="0" marL="0">
+              <a:buNone/>
+            </a:pPr>
+            <a:r>
+              <a:rPr lang="en-US" sz="1200" dirty="0">
+                <a:solidFill>
+                  <a:srgbClr val="000000"/>
+                </a:solidFill>
+                <a:latin typeface="IBM Plex Sans" pitchFamily="34" charset="0"/>
+                <a:ea typeface="IBM Plex Sans" pitchFamily="34" charset="-122"/>
+                <a:cs typeface="IBM Plex Sans" pitchFamily="34" charset="-120"/>
+              </a:rPr>
+              <a:t>reviews_per_month</a:t>
+            </a:r>
+            <a:endParaRPr lang="en-US" sz="1200" dirty="0"/>
+          </a:p>
+        </p:txBody>
+      </p:sp>
+      <p:sp>
+        <p:nvSpPr>
+          <p:cNvPr id="17" name="Text 14"/>
+          <p:cNvSpPr/>
+          <p:nvPr/>
+        </p:nvSpPr>
+        <p:spPr>
+          <a:xfrm>
+            <a:off x="10607040" y="3767328"/>
             <a:ext cx="804672" cy="384048"/>
           </a:xfrm>
           <a:prstGeom prst="rect">
@@ -8268,29 +9199,29 @@
               <a:buNone/>
             </a:pPr>
             <a:r>
-              <a:rPr lang="en-US" sz="1400" b="1" dirty="0">
+              <a:rPr lang="en-US" sz="1300" b="1" dirty="0">
                 <a:solidFill>
                   <a:srgbClr val="522CBA"/>
                 </a:solidFill>
-                <a:latin typeface="Calibri" pitchFamily="34" charset="0"/>
-                <a:ea typeface="Calibri" pitchFamily="34" charset="-122"/>
-                <a:cs typeface="Calibri" pitchFamily="34" charset="-120"/>
-              </a:rPr>
-              <a:t>6,466</a:t>
-            </a:r>
-            <a:endParaRPr lang="en-US" sz="1400" dirty="0"/>
-          </a:p>
-        </p:txBody>
-      </p:sp>
-      <p:sp>
-        <p:nvSpPr>
-          <p:cNvPr id="12" name="Text 9"/>
-          <p:cNvSpPr/>
-          <p:nvPr/>
-        </p:nvSpPr>
-        <p:spPr>
-          <a:xfrm>
-            <a:off x="8869680" y="3236976"/>
+                <a:latin typeface="IBM Plex Sans" pitchFamily="34" charset="0"/>
+                <a:ea typeface="IBM Plex Sans" pitchFamily="34" charset="-122"/>
+                <a:cs typeface="IBM Plex Sans" pitchFamily="34" charset="-120"/>
+              </a:rPr>
+              <a:t>3,207</a:t>
+            </a:r>
+            <a:endParaRPr lang="en-US" sz="1300" dirty="0"/>
+          </a:p>
+        </p:txBody>
+      </p:sp>
+      <p:sp>
+        <p:nvSpPr>
+          <p:cNvPr id="18" name="Text 15"/>
+          <p:cNvSpPr/>
+          <p:nvPr/>
+        </p:nvSpPr>
+        <p:spPr>
+          <a:xfrm>
+            <a:off x="8869680" y="4261104"/>
             <a:ext cx="1783080" cy="384048"/>
           </a:xfrm>
           <a:prstGeom prst="rect">
@@ -8307,15 +9238,54 @@
               <a:buNone/>
             </a:pPr>
             <a:r>
-              <a:rPr lang="en-US" sz="1300" dirty="0">
+              <a:rPr lang="en-US" sz="1200" dirty="0">
                 <a:solidFill>
                   <a:srgbClr val="000000"/>
                 </a:solidFill>
-                <a:latin typeface="Calibri" pitchFamily="34" charset="0"/>
-                <a:ea typeface="Calibri" pitchFamily="34" charset="-122"/>
-                <a:cs typeface="Calibri" pitchFamily="34" charset="-120"/>
-              </a:rPr>
-              <a:t>number_of_reviews</a:t>
+                <a:latin typeface="IBM Plex Sans" pitchFamily="34" charset="0"/>
+                <a:ea typeface="IBM Plex Sans" pitchFamily="34" charset="-122"/>
+                <a:cs typeface="IBM Plex Sans" pitchFamily="34" charset="-120"/>
+              </a:rPr>
+              <a:t>host_listings</a:t>
+            </a:r>
+            <a:endParaRPr lang="en-US" sz="1200" dirty="0"/>
+          </a:p>
+        </p:txBody>
+      </p:sp>
+      <p:sp>
+        <p:nvSpPr>
+          <p:cNvPr id="19" name="Text 16"/>
+          <p:cNvSpPr/>
+          <p:nvPr/>
+        </p:nvSpPr>
+        <p:spPr>
+          <a:xfrm>
+            <a:off x="10607040" y="4261104"/>
+            <a:ext cx="804672" cy="384048"/>
+          </a:xfrm>
+          <a:prstGeom prst="rect">
+            <a:avLst/>
+          </a:prstGeom>
+          <a:noFill/>
+          <a:ln/>
+        </p:spPr>
+        <p:txBody>
+          <a:bodyPr wrap="square" lIns="0" tIns="0" rIns="0" bIns="0" rtlCol="0" anchor="ctr"/>
+          <a:lstStyle/>
+          <a:p>
+            <a:pPr algn="r" indent="0" marL="0">
+              <a:buNone/>
+            </a:pPr>
+            <a:r>
+              <a:rPr lang="en-US" sz="1300" b="1" dirty="0">
+                <a:solidFill>
+                  <a:srgbClr val="522CBA"/>
+                </a:solidFill>
+                <a:latin typeface="IBM Plex Sans" pitchFamily="34" charset="0"/>
+                <a:ea typeface="IBM Plex Sans" pitchFamily="34" charset="-122"/>
+                <a:cs typeface="IBM Plex Sans" pitchFamily="34" charset="-120"/>
+              </a:rPr>
+              <a:t>6,895</a:t>
             </a:r>
             <a:endParaRPr lang="en-US" sz="1300" dirty="0"/>
           </a:p>
@@ -8323,13 +9293,52 @@
       </p:sp>
       <p:sp>
         <p:nvSpPr>
-          <p:cNvPr id="13" name="Text 10"/>
-          <p:cNvSpPr/>
-          <p:nvPr/>
-        </p:nvSpPr>
-        <p:spPr>
-          <a:xfrm>
-            <a:off x="10607040" y="3236976"/>
+          <p:cNvPr id="20" name="Text 17"/>
+          <p:cNvSpPr/>
+          <p:nvPr/>
+        </p:nvSpPr>
+        <p:spPr>
+          <a:xfrm>
+            <a:off x="8869680" y="4754880"/>
+            <a:ext cx="1783080" cy="384048"/>
+          </a:xfrm>
+          <a:prstGeom prst="rect">
+            <a:avLst/>
+          </a:prstGeom>
+          <a:noFill/>
+          <a:ln/>
+        </p:spPr>
+        <p:txBody>
+          <a:bodyPr wrap="square" lIns="0" tIns="0" rIns="0" bIns="0" rtlCol="0" anchor="ctr"/>
+          <a:lstStyle/>
+          <a:p>
+            <a:pPr indent="0" marL="0">
+              <a:buNone/>
+            </a:pPr>
+            <a:r>
+              <a:rPr lang="en-US" sz="1200" dirty="0">
+                <a:solidFill>
+                  <a:srgbClr val="000000"/>
+                </a:solidFill>
+                <a:latin typeface="IBM Plex Sans" pitchFamily="34" charset="0"/>
+                <a:ea typeface="IBM Plex Sans" pitchFamily="34" charset="-122"/>
+                <a:cs typeface="IBM Plex Sans" pitchFamily="34" charset="-120"/>
+              </a:rPr>
+              <a:t>availability_365</a:t>
+            </a:r>
+            <a:endParaRPr lang="en-US" sz="1200" dirty="0"/>
+          </a:p>
+        </p:txBody>
+      </p:sp>
+      <p:sp>
+        <p:nvSpPr>
+          <p:cNvPr id="21" name="Text 18"/>
+          <p:cNvSpPr/>
+          <p:nvPr/>
+        </p:nvSpPr>
+        <p:spPr>
+          <a:xfrm>
+            <a:off x="10607040" y="4754880"/>
             <a:ext cx="804672" cy="384048"/>
           </a:xfrm>
           <a:prstGeom prst="rect">
@@ -8346,54 +9355,15 @@
               <a:buNone/>
             </a:pPr>
             <a:r>
-              <a:rPr lang="en-US" sz="1400" b="1" dirty="0">
+              <a:rPr lang="en-US" sz="1300" b="1" dirty="0">
                 <a:solidFill>
                   <a:srgbClr val="522CBA"/>
                 </a:solidFill>
-                <a:latin typeface="Calibri" pitchFamily="34" charset="0"/>
-                <a:ea typeface="Calibri" pitchFamily="34" charset="-122"/>
-                <a:cs typeface="Calibri" pitchFamily="34" charset="-120"/>
-              </a:rPr>
-              <a:t>6,021</a:t>
-            </a:r>
-            <a:endParaRPr lang="en-US" sz="1400" dirty="0"/>
-          </a:p>
-        </p:txBody>
-      </p:sp>
-      <p:sp>
-        <p:nvSpPr>
-          <p:cNvPr id="14" name="Text 11"/>
-          <p:cNvSpPr/>
-          <p:nvPr/>
-        </p:nvSpPr>
-        <p:spPr>
-          <a:xfrm>
-            <a:off x="8869680" y="3739896"/>
-            <a:ext cx="1783080" cy="384048"/>
-          </a:xfrm>
-          <a:prstGeom prst="rect">
-            <a:avLst/>
-          </a:prstGeom>
-          <a:noFill/>
-          <a:ln/>
-        </p:spPr>
-        <p:txBody>
-          <a:bodyPr wrap="square" lIns="0" tIns="0" rIns="0" bIns="0" rtlCol="0" anchor="ctr"/>
-          <a:lstStyle/>
-          <a:p>
-            <a:pPr indent="0" marL="0">
-              <a:buNone/>
-            </a:pPr>
-            <a:r>
-              <a:rPr lang="en-US" sz="1300" dirty="0">
-                <a:solidFill>
-                  <a:srgbClr val="000000"/>
-                </a:solidFill>
-                <a:latin typeface="Calibri" pitchFamily="34" charset="0"/>
-                <a:ea typeface="Calibri" pitchFamily="34" charset="-122"/>
-                <a:cs typeface="Calibri" pitchFamily="34" charset="-120"/>
-              </a:rPr>
-              <a:t>reviews_per_month</a:t>
+                <a:latin typeface="IBM Plex Sans" pitchFamily="34" charset="0"/>
+                <a:ea typeface="IBM Plex Sans" pitchFamily="34" charset="-122"/>
+                <a:cs typeface="IBM Plex Sans" pitchFamily="34" charset="-120"/>
+              </a:rPr>
+              <a:t>0</a:t>
             </a:r>
             <a:endParaRPr lang="en-US" sz="1300" dirty="0"/>
           </a:p>
@@ -8401,235 +9371,40 @@
       </p:sp>
       <p:sp>
         <p:nvSpPr>
-          <p:cNvPr id="15" name="Text 12"/>
-          <p:cNvSpPr/>
-          <p:nvPr/>
-        </p:nvSpPr>
-        <p:spPr>
-          <a:xfrm>
-            <a:off x="10607040" y="3739896"/>
-            <a:ext cx="804672" cy="384048"/>
-          </a:xfrm>
-          <a:prstGeom prst="rect">
-            <a:avLst/>
-          </a:prstGeom>
-          <a:noFill/>
-          <a:ln/>
-        </p:spPr>
-        <p:txBody>
-          <a:bodyPr wrap="square" lIns="0" tIns="0" rIns="0" bIns="0" rtlCol="0" anchor="ctr"/>
-          <a:lstStyle/>
-          <a:p>
-            <a:pPr algn="r" indent="0" marL="0">
-              <a:buNone/>
-            </a:pPr>
-            <a:r>
-              <a:rPr lang="en-US" sz="1400" b="1" dirty="0">
+          <p:cNvPr id="22" name="Text 19"/>
+          <p:cNvSpPr/>
+          <p:nvPr/>
+        </p:nvSpPr>
+        <p:spPr>
+          <a:xfrm>
+            <a:off x="8869680" y="5321808"/>
+            <a:ext cx="2606040" cy="548640"/>
+          </a:xfrm>
+          <a:prstGeom prst="rect">
+            <a:avLst/>
+          </a:prstGeom>
+          <a:noFill/>
+          <a:ln/>
+        </p:spPr>
+        <p:txBody>
+          <a:bodyPr wrap="square" lIns="0" tIns="0" rIns="0" bIns="0" rtlCol="0" anchor="ctr"/>
+          <a:lstStyle/>
+          <a:p>
+            <a:pPr indent="0" marL="0">
+              <a:buNone/>
+            </a:pPr>
+            <a:r>
+              <a:rPr lang="en-US" sz="1300" b="1" dirty="0">
                 <a:solidFill>
                   <a:srgbClr val="522CBA"/>
                 </a:solidFill>
-                <a:latin typeface="Calibri" pitchFamily="34" charset="0"/>
-                <a:ea typeface="Calibri" pitchFamily="34" charset="-122"/>
-                <a:cs typeface="Calibri" pitchFamily="34" charset="-120"/>
-              </a:rPr>
-              <a:t>3,207</a:t>
-            </a:r>
-            <a:endParaRPr lang="en-US" sz="1400" dirty="0"/>
-          </a:p>
-        </p:txBody>
-      </p:sp>
-      <p:sp>
-        <p:nvSpPr>
-          <p:cNvPr id="16" name="Text 13"/>
-          <p:cNvSpPr/>
-          <p:nvPr/>
-        </p:nvSpPr>
-        <p:spPr>
-          <a:xfrm>
-            <a:off x="8869680" y="4242816"/>
-            <a:ext cx="1783080" cy="384048"/>
-          </a:xfrm>
-          <a:prstGeom prst="rect">
-            <a:avLst/>
-          </a:prstGeom>
-          <a:noFill/>
-          <a:ln/>
-        </p:spPr>
-        <p:txBody>
-          <a:bodyPr wrap="square" lIns="0" tIns="0" rIns="0" bIns="0" rtlCol="0" anchor="ctr"/>
-          <a:lstStyle/>
-          <a:p>
-            <a:pPr indent="0" marL="0">
-              <a:buNone/>
-            </a:pPr>
-            <a:r>
-              <a:rPr lang="en-US" sz="1300" dirty="0">
-                <a:solidFill>
-                  <a:srgbClr val="000000"/>
-                </a:solidFill>
-                <a:latin typeface="Calibri" pitchFamily="34" charset="0"/>
-                <a:ea typeface="Calibri" pitchFamily="34" charset="-122"/>
-                <a:cs typeface="Calibri" pitchFamily="34" charset="-120"/>
-              </a:rPr>
-              <a:t>host_listings</a:t>
+                <a:latin typeface="IBM Plex Sans" pitchFamily="34" charset="0"/>
+                <a:ea typeface="IBM Plex Sans" pitchFamily="34" charset="-122"/>
+                <a:cs typeface="IBM Plex Sans" pitchFamily="34" charset="-120"/>
+              </a:rPr>
+              <a:t>Kept all. Capped only minimum_nights.</a:t>
             </a:r>
             <a:endParaRPr lang="en-US" sz="1300" dirty="0"/>
-          </a:p>
-        </p:txBody>
-      </p:sp>
-      <p:sp>
-        <p:nvSpPr>
-          <p:cNvPr id="17" name="Text 14"/>
-          <p:cNvSpPr/>
-          <p:nvPr/>
-        </p:nvSpPr>
-        <p:spPr>
-          <a:xfrm>
-            <a:off x="10607040" y="4242816"/>
-            <a:ext cx="804672" cy="384048"/>
-          </a:xfrm>
-          <a:prstGeom prst="rect">
-            <a:avLst/>
-          </a:prstGeom>
-          <a:noFill/>
-          <a:ln/>
-        </p:spPr>
-        <p:txBody>
-          <a:bodyPr wrap="square" lIns="0" tIns="0" rIns="0" bIns="0" rtlCol="0" anchor="ctr"/>
-          <a:lstStyle/>
-          <a:p>
-            <a:pPr algn="r" indent="0" marL="0">
-              <a:buNone/>
-            </a:pPr>
-            <a:r>
-              <a:rPr lang="en-US" sz="1400" b="1" dirty="0">
-                <a:solidFill>
-                  <a:srgbClr val="522CBA"/>
-                </a:solidFill>
-                <a:latin typeface="Calibri" pitchFamily="34" charset="0"/>
-                <a:ea typeface="Calibri" pitchFamily="34" charset="-122"/>
-                <a:cs typeface="Calibri" pitchFamily="34" charset="-120"/>
-              </a:rPr>
-              <a:t>6,895</a:t>
-            </a:r>
-            <a:endParaRPr lang="en-US" sz="1400" dirty="0"/>
-          </a:p>
-        </p:txBody>
-      </p:sp>
-      <p:sp>
-        <p:nvSpPr>
-          <p:cNvPr id="18" name="Text 15"/>
-          <p:cNvSpPr/>
-          <p:nvPr/>
-        </p:nvSpPr>
-        <p:spPr>
-          <a:xfrm>
-            <a:off x="8869680" y="4745736"/>
-            <a:ext cx="1783080" cy="384048"/>
-          </a:xfrm>
-          <a:prstGeom prst="rect">
-            <a:avLst/>
-          </a:prstGeom>
-          <a:noFill/>
-          <a:ln/>
-        </p:spPr>
-        <p:txBody>
-          <a:bodyPr wrap="square" lIns="0" tIns="0" rIns="0" bIns="0" rtlCol="0" anchor="ctr"/>
-          <a:lstStyle/>
-          <a:p>
-            <a:pPr indent="0" marL="0">
-              <a:buNone/>
-            </a:pPr>
-            <a:r>
-              <a:rPr lang="en-US" sz="1300" dirty="0">
-                <a:solidFill>
-                  <a:srgbClr val="000000"/>
-                </a:solidFill>
-                <a:latin typeface="Calibri" pitchFamily="34" charset="0"/>
-                <a:ea typeface="Calibri" pitchFamily="34" charset="-122"/>
-                <a:cs typeface="Calibri" pitchFamily="34" charset="-120"/>
-              </a:rPr>
-              <a:t>availability_365</a:t>
-            </a:r>
-            <a:endParaRPr lang="en-US" sz="1300" dirty="0"/>
-          </a:p>
-        </p:txBody>
-      </p:sp>
-      <p:sp>
-        <p:nvSpPr>
-          <p:cNvPr id="19" name="Text 16"/>
-          <p:cNvSpPr/>
-          <p:nvPr/>
-        </p:nvSpPr>
-        <p:spPr>
-          <a:xfrm>
-            <a:off x="10607040" y="4745736"/>
-            <a:ext cx="804672" cy="384048"/>
-          </a:xfrm>
-          <a:prstGeom prst="rect">
-            <a:avLst/>
-          </a:prstGeom>
-          <a:noFill/>
-          <a:ln/>
-        </p:spPr>
-        <p:txBody>
-          <a:bodyPr wrap="square" lIns="0" tIns="0" rIns="0" bIns="0" rtlCol="0" anchor="ctr"/>
-          <a:lstStyle/>
-          <a:p>
-            <a:pPr algn="r" indent="0" marL="0">
-              <a:buNone/>
-            </a:pPr>
-            <a:r>
-              <a:rPr lang="en-US" sz="1400" b="1" dirty="0">
-                <a:solidFill>
-                  <a:srgbClr val="522CBA"/>
-                </a:solidFill>
-                <a:latin typeface="Calibri" pitchFamily="34" charset="0"/>
-                <a:ea typeface="Calibri" pitchFamily="34" charset="-122"/>
-                <a:cs typeface="Calibri" pitchFamily="34" charset="-120"/>
-              </a:rPr>
-              <a:t>0</a:t>
-            </a:r>
-            <a:endParaRPr lang="en-US" sz="1400" dirty="0"/>
-          </a:p>
-        </p:txBody>
-      </p:sp>
-      <p:sp>
-        <p:nvSpPr>
-          <p:cNvPr id="20" name="Text 17"/>
-          <p:cNvSpPr/>
-          <p:nvPr/>
-        </p:nvSpPr>
-        <p:spPr>
-          <a:xfrm>
-            <a:off x="8869680" y="5321808"/>
-            <a:ext cx="2560320" cy="548640"/>
-          </a:xfrm>
-          <a:prstGeom prst="rect">
-            <a:avLst/>
-          </a:prstGeom>
-          <a:noFill/>
-          <a:ln/>
-        </p:spPr>
-        <p:txBody>
-          <a:bodyPr wrap="square" lIns="0" tIns="0" rIns="0" bIns="0" rtlCol="0" anchor="ctr"/>
-          <a:lstStyle/>
-          <a:p>
-            <a:pPr indent="0" marL="0">
-              <a:buNone/>
-            </a:pPr>
-            <a:r>
-              <a:rPr lang="en-US" sz="1400" b="1" dirty="0">
-                <a:solidFill>
-                  <a:srgbClr val="522CBA"/>
-                </a:solidFill>
-                <a:latin typeface="Calibri" pitchFamily="34" charset="0"/>
-                <a:ea typeface="Calibri" pitchFamily="34" charset="-122"/>
-                <a:cs typeface="Calibri" pitchFamily="34" charset="-120"/>
-              </a:rPr>
-              <a:t>Kept all — capped only minimum_nights</a:t>
-            </a:r>
-            <a:endParaRPr lang="en-US" sz="1400" dirty="0"/>
           </a:p>
         </p:txBody>
       </p:sp>
@@ -8690,30 +9465,55 @@
               <a:buNone/>
             </a:pPr>
             <a:r>
-              <a:rPr lang="en-US" sz="3600" b="1" dirty="0">
+              <a:rPr lang="en-US" sz="3400" b="1" dirty="0">
                 <a:solidFill>
                   <a:srgbClr val="522CBA"/>
                 </a:solidFill>
-                <a:latin typeface="Cambria" pitchFamily="34" charset="0"/>
-                <a:ea typeface="Cambria" pitchFamily="34" charset="-122"/>
-                <a:cs typeface="Cambria" pitchFamily="34" charset="-120"/>
+                <a:latin typeface="IBM Plex Sans" pitchFamily="34" charset="0"/>
+                <a:ea typeface="IBM Plex Sans" pitchFamily="34" charset="-122"/>
+                <a:cs typeface="IBM Plex Sans" pitchFamily="34" charset="-120"/>
               </a:rPr>
               <a:t>Everything skews right</a:t>
             </a:r>
-            <a:endParaRPr lang="en-US" sz="3600" dirty="0"/>
-          </a:p>
-        </p:txBody>
-      </p:sp>
-      <p:sp>
-        <p:nvSpPr>
-          <p:cNvPr id="3" name="Text 1"/>
-          <p:cNvSpPr/>
-          <p:nvPr/>
-        </p:nvSpPr>
-        <p:spPr>
-          <a:xfrm>
-            <a:off x="566928" y="1042416"/>
-            <a:ext cx="11064240" cy="329184"/>
+            <a:endParaRPr lang="en-US" sz="3400" dirty="0"/>
+          </a:p>
+        </p:txBody>
+      </p:sp>
+      <p:sp>
+        <p:nvSpPr>
+          <p:cNvPr id="3" name="Shape 1"/>
+          <p:cNvSpPr/>
+          <p:nvPr/>
+        </p:nvSpPr>
+        <p:spPr>
+          <a:xfrm>
+            <a:off x="585216" y="1138428"/>
+            <a:ext cx="146304" cy="146304"/>
+          </a:xfrm>
+          <a:prstGeom prst="ellipse">
+            <a:avLst/>
+          </a:prstGeom>
+          <a:solidFill>
+            <a:srgbClr val="F4A664"/>
+          </a:solidFill>
+          <a:ln w="12700">
+            <a:solidFill>
+              <a:srgbClr val="333333"/>
+            </a:solidFill>
+            <a:prstDash val="solid"/>
+          </a:ln>
+        </p:spPr>
+      </p:sp>
+      <p:sp>
+        <p:nvSpPr>
+          <p:cNvPr id="4" name="Text 2"/>
+          <p:cNvSpPr/>
+          <p:nvPr/>
+        </p:nvSpPr>
+        <p:spPr>
+          <a:xfrm>
+            <a:off x="859536" y="1042416"/>
+            <a:ext cx="10789920" cy="329184"/>
           </a:xfrm>
           <a:prstGeom prst="rect">
             <a:avLst/>
@@ -8733,9 +9533,9 @@
                 <a:solidFill>
                   <a:srgbClr val="9B78F7"/>
                 </a:solidFill>
-                <a:latin typeface="Calibri" pitchFamily="34" charset="0"/>
-                <a:ea typeface="Calibri" pitchFamily="34" charset="-122"/>
-                <a:cs typeface="Calibri" pitchFamily="34" charset="-120"/>
+                <a:latin typeface="IBM Plex Sans" pitchFamily="34" charset="0"/>
+                <a:ea typeface="IBM Plex Sans" pitchFamily="34" charset="-122"/>
+                <a:cs typeface="IBM Plex Sans" pitchFamily="34" charset="-120"/>
               </a:rPr>
               <a:t>Mean above median in all six</a:t>
             </a:r>
@@ -8745,7 +9545,7 @@
       </p:sp>
       <p:sp>
         <p:nvSpPr>
-          <p:cNvPr id="4" name="Shape 2"/>
+          <p:cNvPr id="5" name="Shape 3"/>
           <p:cNvSpPr/>
           <p:nvPr/>
         </p:nvSpPr>
@@ -8779,7 +9579,7 @@
       </p:sp>
       <p:pic>
         <p:nvPicPr>
-          <p:cNvPr id="5" name="Image 0" descr="/tmp/claude-0/-home-user-Tuwaiq-Bootcamp/31d76967-b7b5-527c-bee1-8d14c00fddcd/scratchpad/plots/distributions_hist_1.png">    </p:cNvPr>
+          <p:cNvPr id="6" name="Image 0" descr="/tmp/claude-0/-home-user-Tuwaiq-Bootcamp/31d76967-b7b5-527c-bee1-8d14c00fddcd/scratchpad/plots/distributions_hist_1.png">    </p:cNvPr>
           <p:cNvPicPr>
             <a:picLocks noChangeAspect="1"/>
           </p:cNvPicPr>
@@ -8802,7 +9602,7 @@
       </p:pic>
       <p:sp>
         <p:nvSpPr>
-          <p:cNvPr id="6" name="Shape 3"/>
+          <p:cNvPr id="7" name="Shape 4"/>
           <p:cNvSpPr/>
           <p:nvPr/>
         </p:nvSpPr>
@@ -8836,13 +9636,38 @@
       </p:sp>
       <p:sp>
         <p:nvSpPr>
-          <p:cNvPr id="7" name="Text 4"/>
-          <p:cNvSpPr/>
-          <p:nvPr/>
-        </p:nvSpPr>
-        <p:spPr>
-          <a:xfrm>
-            <a:off x="8869680" y="1874520"/>
+          <p:cNvPr id="8" name="Shape 5"/>
+          <p:cNvSpPr/>
+          <p:nvPr/>
+        </p:nvSpPr>
+        <p:spPr>
+          <a:xfrm>
+            <a:off x="8869680" y="1847088"/>
+            <a:ext cx="137160" cy="137160"/>
+          </a:xfrm>
+          <a:prstGeom prst="ellipse">
+            <a:avLst/>
+          </a:prstGeom>
+          <a:solidFill>
+            <a:srgbClr val="57E3D8"/>
+          </a:solidFill>
+          <a:ln w="12700">
+            <a:solidFill>
+              <a:srgbClr val="333333"/>
+            </a:solidFill>
+            <a:prstDash val="solid"/>
+          </a:ln>
+        </p:spPr>
+      </p:sp>
+      <p:sp>
+        <p:nvSpPr>
+          <p:cNvPr id="9" name="Text 6"/>
+          <p:cNvSpPr/>
+          <p:nvPr/>
+        </p:nvSpPr>
+        <p:spPr>
+          <a:xfrm>
+            <a:off x="8869680" y="2048256"/>
             <a:ext cx="2560320" cy="548640"/>
           </a:xfrm>
           <a:prstGeom prst="rect">
@@ -8859,29 +9684,29 @@
               <a:buNone/>
             </a:pPr>
             <a:r>
-              <a:rPr lang="en-US" sz="3000" b="1" dirty="0">
+              <a:rPr lang="en-US" sz="2900" b="1" dirty="0">
                 <a:solidFill>
                   <a:srgbClr val="9B78F7"/>
                 </a:solidFill>
-                <a:latin typeface="Cambria" pitchFamily="34" charset="0"/>
-                <a:ea typeface="Cambria" pitchFamily="34" charset="-122"/>
-                <a:cs typeface="Cambria" pitchFamily="34" charset="-120"/>
+                <a:latin typeface="IBM Plex Sans" pitchFamily="34" charset="0"/>
+                <a:ea typeface="IBM Plex Sans" pitchFamily="34" charset="-122"/>
+                <a:cs typeface="IBM Plex Sans" pitchFamily="34" charset="-120"/>
               </a:rPr>
               <a:t>$152</a:t>
             </a:r>
-            <a:endParaRPr lang="en-US" sz="3000" dirty="0"/>
-          </a:p>
-        </p:txBody>
-      </p:sp>
-      <p:sp>
-        <p:nvSpPr>
-          <p:cNvPr id="8" name="Text 5"/>
-          <p:cNvSpPr/>
-          <p:nvPr/>
-        </p:nvSpPr>
-        <p:spPr>
-          <a:xfrm>
-            <a:off x="8869680" y="2395728"/>
+            <a:endParaRPr lang="en-US" sz="2900" dirty="0"/>
+          </a:p>
+        </p:txBody>
+      </p:sp>
+      <p:sp>
+        <p:nvSpPr>
+          <p:cNvPr id="10" name="Text 7"/>
+          <p:cNvSpPr/>
+          <p:nvPr/>
+        </p:nvSpPr>
+        <p:spPr>
+          <a:xfrm>
+            <a:off x="8869680" y="2578608"/>
             <a:ext cx="2560320" cy="310896"/>
           </a:xfrm>
           <a:prstGeom prst="rect">
@@ -8898,29 +9723,29 @@
               <a:buNone/>
             </a:pPr>
             <a:r>
-              <a:rPr lang="en-US" sz="1400" dirty="0">
+              <a:rPr lang="en-US" sz="1300" dirty="0">
                 <a:solidFill>
                   <a:srgbClr val="000000"/>
                 </a:solidFill>
-                <a:latin typeface="Calibri" pitchFamily="34" charset="0"/>
-                <a:ea typeface="Calibri" pitchFamily="34" charset="-122"/>
-                <a:cs typeface="Calibri" pitchFamily="34" charset="-120"/>
+                <a:latin typeface="IBM Plex Sans" pitchFamily="34" charset="0"/>
+                <a:ea typeface="IBM Plex Sans" pitchFamily="34" charset="-122"/>
+                <a:cs typeface="IBM Plex Sans" pitchFamily="34" charset="-120"/>
               </a:rPr>
               <a:t>mean</a:t>
             </a:r>
-            <a:endParaRPr lang="en-US" sz="1400" dirty="0"/>
-          </a:p>
-        </p:txBody>
-      </p:sp>
-      <p:sp>
-        <p:nvSpPr>
-          <p:cNvPr id="9" name="Text 6"/>
-          <p:cNvSpPr/>
-          <p:nvPr/>
-        </p:nvSpPr>
-        <p:spPr>
-          <a:xfrm>
-            <a:off x="8869680" y="2999232"/>
+            <a:endParaRPr lang="en-US" sz="1300" dirty="0"/>
+          </a:p>
+        </p:txBody>
+      </p:sp>
+      <p:sp>
+        <p:nvSpPr>
+          <p:cNvPr id="11" name="Text 8"/>
+          <p:cNvSpPr/>
+          <p:nvPr/>
+        </p:nvSpPr>
+        <p:spPr>
+          <a:xfrm>
+            <a:off x="8869680" y="3127248"/>
             <a:ext cx="2560320" cy="566928"/>
           </a:xfrm>
           <a:prstGeom prst="rect">
@@ -8937,69 +9762,69 @@
               <a:buNone/>
             </a:pPr>
             <a:r>
-              <a:rPr lang="en-US" sz="3600" b="1" dirty="0">
+              <a:rPr lang="en-US" sz="3400" b="1" dirty="0">
                 <a:solidFill>
                   <a:srgbClr val="522CBA"/>
                 </a:solidFill>
-                <a:latin typeface="Cambria" pitchFamily="34" charset="0"/>
-                <a:ea typeface="Cambria" pitchFamily="34" charset="-122"/>
-                <a:cs typeface="Cambria" pitchFamily="34" charset="-120"/>
+                <a:latin typeface="IBM Plex Sans" pitchFamily="34" charset="0"/>
+                <a:ea typeface="IBM Plex Sans" pitchFamily="34" charset="-122"/>
+                <a:cs typeface="IBM Plex Sans" pitchFamily="34" charset="-120"/>
               </a:rPr>
               <a:t>$105</a:t>
             </a:r>
-            <a:endParaRPr lang="en-US" sz="3600" dirty="0"/>
-          </a:p>
-        </p:txBody>
-      </p:sp>
-      <p:sp>
-        <p:nvSpPr>
-          <p:cNvPr id="10" name="Text 7"/>
-          <p:cNvSpPr/>
-          <p:nvPr/>
-        </p:nvSpPr>
-        <p:spPr>
-          <a:xfrm>
-            <a:off x="8869680" y="3584448"/>
-            <a:ext cx="2560320" cy="457200"/>
-          </a:xfrm>
-          <a:prstGeom prst="rect">
-            <a:avLst/>
-          </a:prstGeom>
-          <a:noFill/>
-          <a:ln/>
-        </p:spPr>
-        <p:txBody>
-          <a:bodyPr wrap="square" lIns="0" tIns="0" rIns="0" bIns="0" rtlCol="0" anchor="ctr"/>
-          <a:lstStyle/>
-          <a:p>
-            <a:pPr indent="0" marL="0">
-              <a:buNone/>
-            </a:pPr>
-            <a:r>
-              <a:rPr lang="en-US" sz="1400" b="1" dirty="0">
+            <a:endParaRPr lang="en-US" sz="3400" dirty="0"/>
+          </a:p>
+        </p:txBody>
+      </p:sp>
+      <p:sp>
+        <p:nvSpPr>
+          <p:cNvPr id="12" name="Text 9"/>
+          <p:cNvSpPr/>
+          <p:nvPr/>
+        </p:nvSpPr>
+        <p:spPr>
+          <a:xfrm>
+            <a:off x="8869680" y="3712464"/>
+            <a:ext cx="2606040" cy="457200"/>
+          </a:xfrm>
+          <a:prstGeom prst="rect">
+            <a:avLst/>
+          </a:prstGeom>
+          <a:noFill/>
+          <a:ln/>
+        </p:spPr>
+        <p:txBody>
+          <a:bodyPr wrap="square" lIns="0" tIns="0" rIns="0" bIns="0" rtlCol="0" anchor="ctr"/>
+          <a:lstStyle/>
+          <a:p>
+            <a:pPr indent="0" marL="0">
+              <a:buNone/>
+            </a:pPr>
+            <a:r>
+              <a:rPr lang="en-US" sz="1300" b="1" dirty="0">
                 <a:solidFill>
                   <a:srgbClr val="000000"/>
                 </a:solidFill>
-                <a:latin typeface="Calibri" pitchFamily="34" charset="0"/>
-                <a:ea typeface="Calibri" pitchFamily="34" charset="-122"/>
-                <a:cs typeface="Calibri" pitchFamily="34" charset="-120"/>
-              </a:rPr>
-              <a:t>median — the honest number</a:t>
-            </a:r>
-            <a:endParaRPr lang="en-US" sz="1400" dirty="0"/>
-          </a:p>
-        </p:txBody>
-      </p:sp>
-      <p:sp>
-        <p:nvSpPr>
-          <p:cNvPr id="11" name="Text 8"/>
-          <p:cNvSpPr/>
-          <p:nvPr/>
-        </p:nvSpPr>
-        <p:spPr>
-          <a:xfrm>
-            <a:off x="8869680" y="4279392"/>
-            <a:ext cx="2560320" cy="1463040"/>
+                <a:latin typeface="IBM Plex Sans" pitchFamily="34" charset="0"/>
+                <a:ea typeface="IBM Plex Sans" pitchFamily="34" charset="-122"/>
+                <a:cs typeface="IBM Plex Sans" pitchFamily="34" charset="-120"/>
+              </a:rPr>
+              <a:t>median is the honest number</a:t>
+            </a:r>
+            <a:endParaRPr lang="en-US" sz="1300" dirty="0"/>
+          </a:p>
+        </p:txBody>
+      </p:sp>
+      <p:sp>
+        <p:nvSpPr>
+          <p:cNvPr id="13" name="Text 10"/>
+          <p:cNvSpPr/>
+          <p:nvPr/>
+        </p:nvSpPr>
+        <p:spPr>
+          <a:xfrm>
+            <a:off x="8869680" y="4370832"/>
+            <a:ext cx="2606040" cy="1371600"/>
           </a:xfrm>
           <a:prstGeom prst="rect">
             <a:avLst/>
@@ -9023,9 +9848,9 @@
                 <a:solidFill>
                   <a:srgbClr val="000000"/>
                 </a:solidFill>
-                <a:latin typeface="Calibri" pitchFamily="34" charset="0"/>
-                <a:ea typeface="Calibri" pitchFamily="34" charset="-122"/>
-                <a:cs typeface="Calibri" pitchFamily="34" charset="-120"/>
+                <a:latin typeface="IBM Plex Sans" pitchFamily="34" charset="0"/>
+                <a:ea typeface="IBM Plex Sans" pitchFamily="34" charset="-122"/>
+                <a:cs typeface="IBM Plex Sans" pitchFamily="34" charset="-120"/>
               </a:rPr>
               <a:t>Long tail of luxury listings</a:t>
             </a:r>
@@ -9044,9 +9869,9 @@
                 <a:solidFill>
                   <a:srgbClr val="000000"/>
                 </a:solidFill>
-                <a:latin typeface="Calibri" pitchFamily="34" charset="0"/>
-                <a:ea typeface="Calibri" pitchFamily="34" charset="-122"/>
-                <a:cs typeface="Calibri" pitchFamily="34" charset="-120"/>
+                <a:latin typeface="IBM Plex Sans" pitchFamily="34" charset="0"/>
+                <a:ea typeface="IBM Plex Sans" pitchFamily="34" charset="-122"/>
+                <a:cs typeface="IBM Plex Sans" pitchFamily="34" charset="-120"/>
               </a:rPr>
               <a:t>availability is bimodal</a:t>
             </a:r>
@@ -9065,11 +9890,11 @@
                 <a:solidFill>
                   <a:srgbClr val="000000"/>
                 </a:solidFill>
-                <a:latin typeface="Calibri" pitchFamily="34" charset="0"/>
-                <a:ea typeface="Calibri" pitchFamily="34" charset="-122"/>
-                <a:cs typeface="Calibri" pitchFamily="34" charset="-120"/>
-              </a:rPr>
-              <a:t>0 days or 365 — nothing between</a:t>
+                <a:latin typeface="IBM Plex Sans" pitchFamily="34" charset="0"/>
+                <a:ea typeface="IBM Plex Sans" pitchFamily="34" charset="-122"/>
+                <a:cs typeface="IBM Plex Sans" pitchFamily="34" charset="-120"/>
+              </a:rPr>
+              <a:t>0 days or 365 with nothing between</a:t>
             </a:r>
             <a:endParaRPr lang="en-US" sz="1300" dirty="0"/>
           </a:p>
@@ -9132,30 +9957,55 @@
               <a:buNone/>
             </a:pPr>
             <a:r>
-              <a:rPr lang="en-US" sz="3600" b="1" dirty="0">
+              <a:rPr lang="en-US" sz="3400" b="1" dirty="0">
                 <a:solidFill>
                   <a:srgbClr val="522CBA"/>
                 </a:solidFill>
-                <a:latin typeface="Cambria" pitchFamily="34" charset="0"/>
-                <a:ea typeface="Cambria" pitchFamily="34" charset="-122"/>
-                <a:cs typeface="Cambria" pitchFamily="34" charset="-120"/>
+                <a:latin typeface="IBM Plex Sans" pitchFamily="34" charset="0"/>
+                <a:ea typeface="IBM Plex Sans" pitchFamily="34" charset="-122"/>
+                <a:cs typeface="IBM Plex Sans" pitchFamily="34" charset="-120"/>
               </a:rPr>
               <a:t>A concentrated market</a:t>
             </a:r>
-            <a:endParaRPr lang="en-US" sz="3600" dirty="0"/>
-          </a:p>
-        </p:txBody>
-      </p:sp>
-      <p:sp>
-        <p:nvSpPr>
-          <p:cNvPr id="3" name="Text 1"/>
-          <p:cNvSpPr/>
-          <p:nvPr/>
-        </p:nvSpPr>
-        <p:spPr>
-          <a:xfrm>
-            <a:off x="566928" y="1042416"/>
-            <a:ext cx="11064240" cy="329184"/>
+            <a:endParaRPr lang="en-US" sz="3400" dirty="0"/>
+          </a:p>
+        </p:txBody>
+      </p:sp>
+      <p:sp>
+        <p:nvSpPr>
+          <p:cNvPr id="3" name="Shape 1"/>
+          <p:cNvSpPr/>
+          <p:nvPr/>
+        </p:nvSpPr>
+        <p:spPr>
+          <a:xfrm>
+            <a:off x="585216" y="1138428"/>
+            <a:ext cx="146304" cy="146304"/>
+          </a:xfrm>
+          <a:prstGeom prst="ellipse">
+            <a:avLst/>
+          </a:prstGeom>
+          <a:solidFill>
+            <a:srgbClr val="57E3D8"/>
+          </a:solidFill>
+          <a:ln w="12700">
+            <a:solidFill>
+              <a:srgbClr val="333333"/>
+            </a:solidFill>
+            <a:prstDash val="solid"/>
+          </a:ln>
+        </p:spPr>
+      </p:sp>
+      <p:sp>
+        <p:nvSpPr>
+          <p:cNvPr id="4" name="Text 2"/>
+          <p:cNvSpPr/>
+          <p:nvPr/>
+        </p:nvSpPr>
+        <p:spPr>
+          <a:xfrm>
+            <a:off x="859536" y="1042416"/>
+            <a:ext cx="10789920" cy="329184"/>
           </a:xfrm>
           <a:prstGeom prst="rect">
             <a:avLst/>
@@ -9175,11 +10025,11 @@
                 <a:solidFill>
                   <a:srgbClr val="9B78F7"/>
                 </a:solidFill>
-                <a:latin typeface="Calibri" pitchFamily="34" charset="0"/>
-                <a:ea typeface="Calibri" pitchFamily="34" charset="-122"/>
-                <a:cs typeface="Calibri" pitchFamily="34" charset="-120"/>
-              </a:rPr>
-              <a:t>Two room types, two boroughs</a:t>
+                <a:latin typeface="IBM Plex Sans" pitchFamily="34" charset="0"/>
+                <a:ea typeface="IBM Plex Sans" pitchFamily="34" charset="-122"/>
+                <a:cs typeface="IBM Plex Sans" pitchFamily="34" charset="-120"/>
+              </a:rPr>
+              <a:t>Two room types and two boroughs</a:t>
             </a:r>
             <a:endParaRPr lang="en-US" sz="1500" dirty="0"/>
           </a:p>
@@ -9187,7 +10037,7 @@
       </p:sp>
       <p:sp>
         <p:nvSpPr>
-          <p:cNvPr id="4" name="Shape 2"/>
+          <p:cNvPr id="5" name="Shape 3"/>
           <p:cNvSpPr/>
           <p:nvPr/>
         </p:nvSpPr>
@@ -9221,7 +10071,7 @@
       </p:sp>
       <p:pic>
         <p:nvPicPr>
-          <p:cNvPr id="5" name="Image 0" descr="/tmp/claude-0/-home-user-Tuwaiq-Bootcamp/31d76967-b7b5-527c-bee1-8d14c00fddcd/scratchpad/plots/categorical_1.png">    </p:cNvPr>
+          <p:cNvPr id="6" name="Image 0" descr="/tmp/claude-0/-home-user-Tuwaiq-Bootcamp/31d76967-b7b5-527c-bee1-8d14c00fddcd/scratchpad/plots/categorical_1.png">    </p:cNvPr>
           <p:cNvPicPr>
             <a:picLocks noChangeAspect="1"/>
           </p:cNvPicPr>
@@ -9244,7 +10094,7 @@
       </p:pic>
       <p:sp>
         <p:nvSpPr>
-          <p:cNvPr id="6" name="Shape 3"/>
+          <p:cNvPr id="7" name="Shape 4"/>
           <p:cNvSpPr/>
           <p:nvPr/>
         </p:nvSpPr>
@@ -9278,7 +10128,7 @@
       </p:sp>
       <p:pic>
         <p:nvPicPr>
-          <p:cNvPr id="7" name="Image 1" descr="/tmp/claude-0/-home-user-Tuwaiq-Bootcamp/31d76967-b7b5-527c-bee1-8d14c00fddcd/scratchpad/plots/categorical_2.png">    </p:cNvPr>
+          <p:cNvPr id="8" name="Image 1" descr="/tmp/claude-0/-home-user-Tuwaiq-Bootcamp/31d76967-b7b5-527c-bee1-8d14c00fddcd/scratchpad/plots/categorical_2.png">    </p:cNvPr>
           <p:cNvPicPr>
             <a:picLocks noChangeAspect="1"/>
           </p:cNvPicPr>
@@ -9301,7 +10151,7 @@
       </p:pic>
       <p:sp>
         <p:nvSpPr>
-          <p:cNvPr id="8" name="Shape 4"/>
+          <p:cNvPr id="9" name="Shape 5"/>
           <p:cNvSpPr/>
           <p:nvPr/>
         </p:nvSpPr>
@@ -9335,7 +10185,7 @@
       </p:sp>
       <p:pic>
         <p:nvPicPr>
-          <p:cNvPr id="9" name="Image 2" descr="/tmp/claude-0/-home-user-Tuwaiq-Bootcamp/31d76967-b7b5-527c-bee1-8d14c00fddcd/scratchpad/plots/categorical_3.png">    </p:cNvPr>
+          <p:cNvPr id="10" name="Image 2" descr="/tmp/claude-0/-home-user-Tuwaiq-Bootcamp/31d76967-b7b5-527c-bee1-8d14c00fddcd/scratchpad/plots/categorical_3.png">    </p:cNvPr>
           <p:cNvPicPr>
             <a:picLocks noChangeAspect="1"/>
           </p:cNvPicPr>
@@ -9358,7 +10208,7 @@
       </p:pic>
       <p:sp>
         <p:nvSpPr>
-          <p:cNvPr id="10" name="Text 5"/>
+          <p:cNvPr id="11" name="Text 6"/>
           <p:cNvSpPr/>
           <p:nvPr/>
         </p:nvSpPr>
@@ -9385,9 +10235,9 @@
                 <a:solidFill>
                   <a:srgbClr val="522CBA"/>
                 </a:solidFill>
-                <a:latin typeface="Calibri" pitchFamily="34" charset="0"/>
-                <a:ea typeface="Calibri" pitchFamily="34" charset="-122"/>
-                <a:cs typeface="Calibri" pitchFamily="34" charset="-120"/>
+                <a:latin typeface="IBM Plex Sans" pitchFamily="34" charset="0"/>
+                <a:ea typeface="IBM Plex Sans" pitchFamily="34" charset="-122"/>
+                <a:cs typeface="IBM Plex Sans" pitchFamily="34" charset="-120"/>
               </a:rPr>
               <a:t>Entire 52% · Private 46% · Shared 2%</a:t>
             </a:r>
@@ -9397,7 +10247,7 @@
       </p:sp>
       <p:sp>
         <p:nvSpPr>
-          <p:cNvPr id="11" name="Text 6"/>
+          <p:cNvPr id="12" name="Text 7"/>
           <p:cNvSpPr/>
           <p:nvPr/>
         </p:nvSpPr>
@@ -9424,11 +10274,11 @@
                 <a:solidFill>
                   <a:srgbClr val="522CBA"/>
                 </a:solidFill>
-                <a:latin typeface="Calibri" pitchFamily="34" charset="0"/>
-                <a:ea typeface="Calibri" pitchFamily="34" charset="-122"/>
-                <a:cs typeface="Calibri" pitchFamily="34" charset="-120"/>
-              </a:rPr>
-              <a:t>Manhattan + Brooklyn = 85%</a:t>
+                <a:latin typeface="IBM Plex Sans" pitchFamily="34" charset="0"/>
+                <a:ea typeface="IBM Plex Sans" pitchFamily="34" charset="-122"/>
+                <a:cs typeface="IBM Plex Sans" pitchFamily="34" charset="-120"/>
+              </a:rPr>
+              <a:t>Manhattan and Brooklyn are 85%</a:t>
             </a:r>
             <a:endParaRPr lang="en-US" sz="1200" dirty="0"/>
           </a:p>
@@ -9436,7 +10286,7 @@
       </p:sp>
       <p:sp>
         <p:nvSpPr>
-          <p:cNvPr id="12" name="Text 7"/>
+          <p:cNvPr id="13" name="Text 8"/>
           <p:cNvSpPr/>
           <p:nvPr/>
         </p:nvSpPr>
@@ -9463,9 +10313,9 @@
                 <a:solidFill>
                   <a:srgbClr val="522CBA"/>
                 </a:solidFill>
-                <a:latin typeface="Calibri" pitchFamily="34" charset="0"/>
-                <a:ea typeface="Calibri" pitchFamily="34" charset="-122"/>
-                <a:cs typeface="Calibri" pitchFamily="34" charset="-120"/>
+                <a:latin typeface="IBM Plex Sans" pitchFamily="34" charset="0"/>
+                <a:ea typeface="IBM Plex Sans" pitchFamily="34" charset="-122"/>
+                <a:cs typeface="IBM Plex Sans" pitchFamily="34" charset="-120"/>
               </a:rPr>
               <a:t>Room type within each borough</a:t>
             </a:r>
@@ -9475,7 +10325,7 @@
       </p:sp>
       <p:sp>
         <p:nvSpPr>
-          <p:cNvPr id="13" name="Shape 8"/>
+          <p:cNvPr id="14" name="Shape 9"/>
           <p:cNvSpPr/>
           <p:nvPr/>
         </p:nvSpPr>
@@ -9509,40 +10359,65 @@
       </p:sp>
       <p:sp>
         <p:nvSpPr>
-          <p:cNvPr id="14" name="Text 9"/>
-          <p:cNvSpPr/>
-          <p:nvPr/>
-        </p:nvSpPr>
-        <p:spPr>
-          <a:xfrm>
-            <a:off x="841248" y="5358384"/>
-            <a:ext cx="10515600" cy="585216"/>
-          </a:xfrm>
-          <a:prstGeom prst="rect">
-            <a:avLst/>
-          </a:prstGeom>
-          <a:noFill/>
-          <a:ln/>
-        </p:spPr>
-        <p:txBody>
-          <a:bodyPr wrap="square" lIns="0" tIns="0" rIns="0" bIns="0" rtlCol="0" anchor="ctr"/>
-          <a:lstStyle/>
-          <a:p>
-            <a:pPr indent="0" marL="0">
-              <a:buNone/>
-            </a:pPr>
-            <a:r>
-              <a:rPr lang="en-US" sz="1600" b="1" dirty="0">
+          <p:cNvPr id="15" name="Shape 10"/>
+          <p:cNvSpPr/>
+          <p:nvPr/>
+        </p:nvSpPr>
+        <p:spPr>
+          <a:xfrm>
+            <a:off x="859536" y="5568696"/>
+            <a:ext cx="164592" cy="164592"/>
+          </a:xfrm>
+          <a:prstGeom prst="ellipse">
+            <a:avLst/>
+          </a:prstGeom>
+          <a:solidFill>
+            <a:srgbClr val="F4A664"/>
+          </a:solidFill>
+          <a:ln w="12700">
+            <a:solidFill>
+              <a:srgbClr val="333333"/>
+            </a:solidFill>
+            <a:prstDash val="solid"/>
+          </a:ln>
+        </p:spPr>
+      </p:sp>
+      <p:sp>
+        <p:nvSpPr>
+          <p:cNvPr id="16" name="Text 11"/>
+          <p:cNvSpPr/>
+          <p:nvPr/>
+        </p:nvSpPr>
+        <p:spPr>
+          <a:xfrm>
+            <a:off x="1170432" y="5358384"/>
+            <a:ext cx="10241280" cy="585216"/>
+          </a:xfrm>
+          <a:prstGeom prst="rect">
+            <a:avLst/>
+          </a:prstGeom>
+          <a:noFill/>
+          <a:ln/>
+        </p:spPr>
+        <p:txBody>
+          <a:bodyPr wrap="square" lIns="0" tIns="0" rIns="0" bIns="0" rtlCol="0" anchor="ctr"/>
+          <a:lstStyle/>
+          <a:p>
+            <a:pPr indent="0" marL="0">
+              <a:buNone/>
+            </a:pPr>
+            <a:r>
+              <a:rPr lang="en-US" sz="1500" b="1" dirty="0">
                 <a:solidFill>
                   <a:srgbClr val="522CBA"/>
                 </a:solidFill>
-                <a:latin typeface="Calibri" pitchFamily="34" charset="0"/>
-                <a:ea typeface="Calibri" pitchFamily="34" charset="-122"/>
-                <a:cs typeface="Calibri" pitchFamily="34" charset="-120"/>
-              </a:rPr>
-              <a:t>Both columns badly imbalanced — minority classes too small to model</a:t>
-            </a:r>
-            <a:endParaRPr lang="en-US" sz="1600" dirty="0"/>
+                <a:latin typeface="IBM Plex Sans" pitchFamily="34" charset="0"/>
+                <a:ea typeface="IBM Plex Sans" pitchFamily="34" charset="-122"/>
+                <a:cs typeface="IBM Plex Sans" pitchFamily="34" charset="-120"/>
+              </a:rPr>
+              <a:t>Both columns are badly imbalanced. Minority classes are too small to model.</a:t>
+            </a:r>
+            <a:endParaRPr lang="en-US" sz="1500" dirty="0"/>
           </a:p>
         </p:txBody>
       </p:sp>
@@ -9603,30 +10478,55 @@
               <a:buNone/>
             </a:pPr>
             <a:r>
-              <a:rPr lang="en-US" sz="3600" b="1" dirty="0">
+              <a:rPr lang="en-US" sz="3400" b="1" dirty="0">
                 <a:solidFill>
                   <a:srgbClr val="522CBA"/>
                 </a:solidFill>
-                <a:latin typeface="Cambria" pitchFamily="34" charset="0"/>
-                <a:ea typeface="Cambria" pitchFamily="34" charset="-122"/>
-                <a:cs typeface="Cambria" pitchFamily="34" charset="-120"/>
+                <a:latin typeface="IBM Plex Sans" pitchFamily="34" charset="0"/>
+                <a:ea typeface="IBM Plex Sans" pitchFamily="34" charset="-122"/>
+                <a:cs typeface="IBM Plex Sans" pitchFamily="34" charset="-120"/>
               </a:rPr>
               <a:t>Price ignores the numbers</a:t>
             </a:r>
-            <a:endParaRPr lang="en-US" sz="3600" dirty="0"/>
-          </a:p>
-        </p:txBody>
-      </p:sp>
-      <p:sp>
-        <p:nvSpPr>
-          <p:cNvPr id="3" name="Text 1"/>
-          <p:cNvSpPr/>
-          <p:nvPr/>
-        </p:nvSpPr>
-        <p:spPr>
-          <a:xfrm>
-            <a:off x="566928" y="1042416"/>
-            <a:ext cx="11064240" cy="329184"/>
+            <a:endParaRPr lang="en-US" sz="3400" dirty="0"/>
+          </a:p>
+        </p:txBody>
+      </p:sp>
+      <p:sp>
+        <p:nvSpPr>
+          <p:cNvPr id="3" name="Shape 1"/>
+          <p:cNvSpPr/>
+          <p:nvPr/>
+        </p:nvSpPr>
+        <p:spPr>
+          <a:xfrm>
+            <a:off x="585216" y="1138428"/>
+            <a:ext cx="146304" cy="146304"/>
+          </a:xfrm>
+          <a:prstGeom prst="ellipse">
+            <a:avLst/>
+          </a:prstGeom>
+          <a:solidFill>
+            <a:srgbClr val="F4A664"/>
+          </a:solidFill>
+          <a:ln w="12700">
+            <a:solidFill>
+              <a:srgbClr val="333333"/>
+            </a:solidFill>
+            <a:prstDash val="solid"/>
+          </a:ln>
+        </p:spPr>
+      </p:sp>
+      <p:sp>
+        <p:nvSpPr>
+          <p:cNvPr id="4" name="Text 2"/>
+          <p:cNvSpPr/>
+          <p:nvPr/>
+        </p:nvSpPr>
+        <p:spPr>
+          <a:xfrm>
+            <a:off x="859536" y="1042416"/>
+            <a:ext cx="10789920" cy="329184"/>
           </a:xfrm>
           <a:prstGeom prst="rect">
             <a:avLst/>
@@ -9646,9 +10546,9 @@
                 <a:solidFill>
                   <a:srgbClr val="9B78F7"/>
                 </a:solidFill>
-                <a:latin typeface="Calibri" pitchFamily="34" charset="0"/>
-                <a:ea typeface="Calibri" pitchFamily="34" charset="-122"/>
-                <a:cs typeface="Calibri" pitchFamily="34" charset="-120"/>
+                <a:latin typeface="IBM Plex Sans" pitchFamily="34" charset="0"/>
+                <a:ea typeface="IBM Plex Sans" pitchFamily="34" charset="-122"/>
+                <a:cs typeface="IBM Plex Sans" pitchFamily="34" charset="-120"/>
               </a:rPr>
               <a:t>Every correlation under 0.08</a:t>
             </a:r>
@@ -9658,7 +10558,7 @@
       </p:sp>
       <p:sp>
         <p:nvSpPr>
-          <p:cNvPr id="4" name="Shape 2"/>
+          <p:cNvPr id="5" name="Shape 3"/>
           <p:cNvSpPr/>
           <p:nvPr/>
         </p:nvSpPr>
@@ -9692,7 +10592,7 @@
       </p:sp>
       <p:pic>
         <p:nvPicPr>
-          <p:cNvPr id="5" name="Image 0" descr="/tmp/claude-0/-home-user-Tuwaiq-Bootcamp/31d76967-b7b5-527c-bee1-8d14c00fddcd/scratchpad/plots/relationships_1.png">    </p:cNvPr>
+          <p:cNvPr id="6" name="Image 0" descr="/tmp/claude-0/-home-user-Tuwaiq-Bootcamp/31d76967-b7b5-527c-bee1-8d14c00fddcd/scratchpad/plots/relationships_1.png">    </p:cNvPr>
           <p:cNvPicPr>
             <a:picLocks noChangeAspect="1"/>
           </p:cNvPicPr>
@@ -9715,7 +10615,7 @@
       </p:pic>
       <p:sp>
         <p:nvSpPr>
-          <p:cNvPr id="6" name="Shape 3"/>
+          <p:cNvPr id="7" name="Shape 4"/>
           <p:cNvSpPr/>
           <p:nvPr/>
         </p:nvSpPr>
@@ -9749,7 +10649,7 @@
       </p:sp>
       <p:pic>
         <p:nvPicPr>
-          <p:cNvPr id="7" name="Image 1" descr="/tmp/claude-0/-home-user-Tuwaiq-Bootcamp/31d76967-b7b5-527c-bee1-8d14c00fddcd/scratchpad/plots/relationships_2.png">    </p:cNvPr>
+          <p:cNvPr id="8" name="Image 1" descr="/tmp/claude-0/-home-user-Tuwaiq-Bootcamp/31d76967-b7b5-527c-bee1-8d14c00fddcd/scratchpad/plots/relationships_2.png">    </p:cNvPr>
           <p:cNvPicPr>
             <a:picLocks noChangeAspect="1"/>
           </p:cNvPicPr>
@@ -9772,7 +10672,7 @@
       </p:pic>
       <p:sp>
         <p:nvSpPr>
-          <p:cNvPr id="8" name="Shape 4"/>
+          <p:cNvPr id="9" name="Shape 5"/>
           <p:cNvSpPr/>
           <p:nvPr/>
         </p:nvSpPr>
@@ -9806,7 +10706,7 @@
       </p:sp>
       <p:pic>
         <p:nvPicPr>
-          <p:cNvPr id="9" name="Image 2" descr="/tmp/claude-0/-home-user-Tuwaiq-Bootcamp/31d76967-b7b5-527c-bee1-8d14c00fddcd/scratchpad/plots/relationships_3.png">    </p:cNvPr>
+          <p:cNvPr id="10" name="Image 2" descr="/tmp/claude-0/-home-user-Tuwaiq-Bootcamp/31d76967-b7b5-527c-bee1-8d14c00fddcd/scratchpad/plots/relationships_3.png">    </p:cNvPr>
           <p:cNvPicPr>
             <a:picLocks noChangeAspect="1"/>
           </p:cNvPicPr>
@@ -9829,7 +10729,7 @@
       </p:pic>
       <p:sp>
         <p:nvSpPr>
-          <p:cNvPr id="10" name="Text 5"/>
+          <p:cNvPr id="11" name="Text 6"/>
           <p:cNvSpPr/>
           <p:nvPr/>
         </p:nvSpPr>
@@ -9856,9 +10756,9 @@
                 <a:solidFill>
                   <a:srgbClr val="522CBA"/>
                 </a:solidFill>
-                <a:latin typeface="Calibri" pitchFamily="34" charset="0"/>
-                <a:ea typeface="Calibri" pitchFamily="34" charset="-122"/>
-                <a:cs typeface="Calibri" pitchFamily="34" charset="-120"/>
+                <a:latin typeface="IBM Plex Sans" pitchFamily="34" charset="0"/>
+                <a:ea typeface="IBM Plex Sans" pitchFamily="34" charset="-122"/>
+                <a:cs typeface="IBM Plex Sans" pitchFamily="34" charset="-120"/>
               </a:rPr>
               <a:t>Correlation matrix</a:t>
             </a:r>
@@ -9868,7 +10768,7 @@
       </p:sp>
       <p:sp>
         <p:nvSpPr>
-          <p:cNvPr id="11" name="Text 6"/>
+          <p:cNvPr id="12" name="Text 7"/>
           <p:cNvSpPr/>
           <p:nvPr/>
         </p:nvSpPr>
@@ -9895,9 +10795,9 @@
                 <a:solidFill>
                   <a:srgbClr val="522CBA"/>
                 </a:solidFill>
-                <a:latin typeface="Calibri" pitchFamily="34" charset="0"/>
-                <a:ea typeface="Calibri" pitchFamily="34" charset="-122"/>
-                <a:cs typeface="Calibri" pitchFamily="34" charset="-120"/>
+                <a:latin typeface="IBM Plex Sans" pitchFamily="34" charset="0"/>
+                <a:ea typeface="IBM Plex Sans" pitchFamily="34" charset="-122"/>
+                <a:cs typeface="IBM Plex Sans" pitchFamily="34" charset="-120"/>
               </a:rPr>
               <a:t>Price vs reviews</a:t>
             </a:r>
@@ -9907,7 +10807,7 @@
       </p:sp>
       <p:sp>
         <p:nvSpPr>
-          <p:cNvPr id="12" name="Text 7"/>
+          <p:cNvPr id="13" name="Text 8"/>
           <p:cNvSpPr/>
           <p:nvPr/>
         </p:nvSpPr>
@@ -9934,9 +10834,9 @@
                 <a:solidFill>
                   <a:srgbClr val="522CBA"/>
                 </a:solidFill>
-                <a:latin typeface="Calibri" pitchFamily="34" charset="0"/>
-                <a:ea typeface="Calibri" pitchFamily="34" charset="-122"/>
-                <a:cs typeface="Calibri" pitchFamily="34" charset="-120"/>
+                <a:latin typeface="IBM Plex Sans" pitchFamily="34" charset="0"/>
+                <a:ea typeface="IBM Plex Sans" pitchFamily="34" charset="-122"/>
+                <a:cs typeface="IBM Plex Sans" pitchFamily="34" charset="-120"/>
               </a:rPr>
               <a:t>Price vs availability</a:t>
             </a:r>
@@ -9946,40 +10846,65 @@
       </p:sp>
       <p:sp>
         <p:nvSpPr>
-          <p:cNvPr id="13" name="Text 8"/>
-          <p:cNvSpPr/>
-          <p:nvPr/>
-        </p:nvSpPr>
-        <p:spPr>
-          <a:xfrm>
-            <a:off x="566928" y="5852160"/>
-            <a:ext cx="11073384" cy="502920"/>
-          </a:xfrm>
-          <a:prstGeom prst="rect">
-            <a:avLst/>
-          </a:prstGeom>
-          <a:noFill/>
-          <a:ln/>
-        </p:spPr>
-        <p:txBody>
-          <a:bodyPr wrap="square" lIns="0" tIns="0" rIns="0" bIns="0" rtlCol="0" anchor="ctr"/>
-          <a:lstStyle/>
-          <a:p>
-            <a:pPr algn="ctr" indent="0" marL="0">
-              <a:buNone/>
-            </a:pPr>
-            <a:r>
-              <a:rPr lang="en-US" sz="2200" b="1" dirty="0">
+          <p:cNvPr id="14" name="Shape 9"/>
+          <p:cNvSpPr/>
+          <p:nvPr/>
+        </p:nvSpPr>
+        <p:spPr>
+          <a:xfrm>
+            <a:off x="4224528" y="5971032"/>
+            <a:ext cx="173736" cy="173736"/>
+          </a:xfrm>
+          <a:prstGeom prst="ellipse">
+            <a:avLst/>
+          </a:prstGeom>
+          <a:solidFill>
+            <a:srgbClr val="57E3D8"/>
+          </a:solidFill>
+          <a:ln w="12700">
+            <a:solidFill>
+              <a:srgbClr val="333333"/>
+            </a:solidFill>
+            <a:prstDash val="solid"/>
+          </a:ln>
+        </p:spPr>
+      </p:sp>
+      <p:sp>
+        <p:nvSpPr>
+          <p:cNvPr id="15" name="Text 10"/>
+          <p:cNvSpPr/>
+          <p:nvPr/>
+        </p:nvSpPr>
+        <p:spPr>
+          <a:xfrm>
+            <a:off x="4553712" y="5852160"/>
+            <a:ext cx="7315200" cy="457200"/>
+          </a:xfrm>
+          <a:prstGeom prst="rect">
+            <a:avLst/>
+          </a:prstGeom>
+          <a:noFill/>
+          <a:ln/>
+        </p:spPr>
+        <p:txBody>
+          <a:bodyPr wrap="square" lIns="0" tIns="0" rIns="0" bIns="0" rtlCol="0" anchor="ctr"/>
+          <a:lstStyle/>
+          <a:p>
+            <a:pPr indent="0" marL="0">
+              <a:buNone/>
+            </a:pPr>
+            <a:r>
+              <a:rPr lang="en-US" sz="2100" b="1" dirty="0">
                 <a:solidFill>
                   <a:srgbClr val="522CBA"/>
                 </a:solidFill>
-                <a:latin typeface="Cambria" pitchFamily="34" charset="0"/>
-                <a:ea typeface="Cambria" pitchFamily="34" charset="-122"/>
-                <a:cs typeface="Cambria" pitchFamily="34" charset="-120"/>
-              </a:rPr>
-              <a:t>Not activity.  Location and room type.</a:t>
-            </a:r>
-            <a:endParaRPr lang="en-US" sz="2200" dirty="0"/>
+                <a:latin typeface="IBM Plex Sans" pitchFamily="34" charset="0"/>
+                <a:ea typeface="IBM Plex Sans" pitchFamily="34" charset="-122"/>
+                <a:cs typeface="IBM Plex Sans" pitchFamily="34" charset="-120"/>
+              </a:rPr>
+              <a:t>Not activity. Location and room type.</a:t>
+            </a:r>
+            <a:endParaRPr lang="en-US" sz="2100" dirty="0"/>
           </a:p>
         </p:txBody>
       </p:sp>
@@ -10040,30 +10965,55 @@
               <a:buNone/>
             </a:pPr>
             <a:r>
-              <a:rPr lang="en-US" sz="3600" b="1" dirty="0">
+              <a:rPr lang="en-US" sz="3400" b="1" dirty="0">
                 <a:solidFill>
                   <a:srgbClr val="522CBA"/>
                 </a:solidFill>
-                <a:latin typeface="Cambria" pitchFamily="34" charset="0"/>
-                <a:ea typeface="Cambria" pitchFamily="34" charset="-122"/>
-                <a:cs typeface="Cambria" pitchFamily="34" charset="-120"/>
+                <a:latin typeface="IBM Plex Sans" pitchFamily="34" charset="0"/>
+                <a:ea typeface="IBM Plex Sans" pitchFamily="34" charset="-122"/>
+                <a:cs typeface="IBM Plex Sans" pitchFamily="34" charset="-120"/>
               </a:rPr>
               <a:t>Where the money is</a:t>
             </a:r>
-            <a:endParaRPr lang="en-US" sz="3600" dirty="0"/>
-          </a:p>
-        </p:txBody>
-      </p:sp>
-      <p:sp>
-        <p:nvSpPr>
-          <p:cNvPr id="3" name="Text 1"/>
-          <p:cNvSpPr/>
-          <p:nvPr/>
-        </p:nvSpPr>
-        <p:spPr>
-          <a:xfrm>
-            <a:off x="566928" y="1042416"/>
-            <a:ext cx="11064240" cy="329184"/>
+            <a:endParaRPr lang="en-US" sz="3400" dirty="0"/>
+          </a:p>
+        </p:txBody>
+      </p:sp>
+      <p:sp>
+        <p:nvSpPr>
+          <p:cNvPr id="3" name="Shape 1"/>
+          <p:cNvSpPr/>
+          <p:nvPr/>
+        </p:nvSpPr>
+        <p:spPr>
+          <a:xfrm>
+            <a:off x="585216" y="1138428"/>
+            <a:ext cx="146304" cy="146304"/>
+          </a:xfrm>
+          <a:prstGeom prst="ellipse">
+            <a:avLst/>
+          </a:prstGeom>
+          <a:solidFill>
+            <a:srgbClr val="57E3D8"/>
+          </a:solidFill>
+          <a:ln w="12700">
+            <a:solidFill>
+              <a:srgbClr val="333333"/>
+            </a:solidFill>
+            <a:prstDash val="solid"/>
+          </a:ln>
+        </p:spPr>
+      </p:sp>
+      <p:sp>
+        <p:nvSpPr>
+          <p:cNvPr id="4" name="Text 2"/>
+          <p:cNvSpPr/>
+          <p:nvPr/>
+        </p:nvSpPr>
+        <p:spPr>
+          <a:xfrm>
+            <a:off x="859536" y="1042416"/>
+            <a:ext cx="10789920" cy="329184"/>
           </a:xfrm>
           <a:prstGeom prst="rect">
             <a:avLst/>
@@ -10083,9 +11033,9 @@
                 <a:solidFill>
                   <a:srgbClr val="9B78F7"/>
                 </a:solidFill>
-                <a:latin typeface="Calibri" pitchFamily="34" charset="0"/>
-                <a:ea typeface="Calibri" pitchFamily="34" charset="-122"/>
-                <a:cs typeface="Calibri" pitchFamily="34" charset="-120"/>
+                <a:latin typeface="IBM Plex Sans" pitchFamily="34" charset="0"/>
+                <a:ea typeface="IBM Plex Sans" pitchFamily="34" charset="-122"/>
+                <a:cs typeface="IBM Plex Sans" pitchFamily="34" charset="-120"/>
               </a:rPr>
               <a:t>Histogram capped at $1,000</a:t>
             </a:r>
@@ -10095,7 +11045,7 @@
       </p:sp>
       <p:sp>
         <p:nvSpPr>
-          <p:cNvPr id="4" name="Shape 2"/>
+          <p:cNvPr id="5" name="Shape 3"/>
           <p:cNvSpPr/>
           <p:nvPr/>
         </p:nvSpPr>
@@ -10129,7 +11079,7 @@
       </p:sp>
       <p:pic>
         <p:nvPicPr>
-          <p:cNvPr id="5" name="Image 0" descr="/tmp/claude-0/-home-user-Tuwaiq-Bootcamp/31d76967-b7b5-527c-bee1-8d14c00fddcd/scratchpad/plots/viz_1.png">    </p:cNvPr>
+          <p:cNvPr id="6" name="Image 0" descr="/tmp/claude-0/-home-user-Tuwaiq-Bootcamp/31d76967-b7b5-527c-bee1-8d14c00fddcd/scratchpad/plots/viz_1.png">    </p:cNvPr>
           <p:cNvPicPr>
             <a:picLocks noChangeAspect="1"/>
           </p:cNvPicPr>
@@ -10152,7 +11102,7 @@
       </p:pic>
       <p:sp>
         <p:nvSpPr>
-          <p:cNvPr id="6" name="Shape 3"/>
+          <p:cNvPr id="7" name="Shape 4"/>
           <p:cNvSpPr/>
           <p:nvPr/>
         </p:nvSpPr>
@@ -10186,7 +11136,7 @@
       </p:sp>
       <p:pic>
         <p:nvPicPr>
-          <p:cNvPr id="7" name="Image 1" descr="/tmp/claude-0/-home-user-Tuwaiq-Bootcamp/31d76967-b7b5-527c-bee1-8d14c00fddcd/scratchpad/plots/viz_2.png">    </p:cNvPr>
+          <p:cNvPr id="8" name="Image 1" descr="/tmp/claude-0/-home-user-Tuwaiq-Bootcamp/31d76967-b7b5-527c-bee1-8d14c00fddcd/scratchpad/plots/viz_2.png">    </p:cNvPr>
           <p:cNvPicPr>
             <a:picLocks noChangeAspect="1"/>
           </p:cNvPicPr>
@@ -10209,7 +11159,7 @@
       </p:pic>
       <p:sp>
         <p:nvSpPr>
-          <p:cNvPr id="8" name="Text 4"/>
+          <p:cNvPr id="9" name="Text 5"/>
           <p:cNvSpPr/>
           <p:nvPr/>
         </p:nvSpPr>
@@ -10236,9 +11186,9 @@
                 <a:solidFill>
                   <a:srgbClr val="522CBA"/>
                 </a:solidFill>
-                <a:latin typeface="Calibri" pitchFamily="34" charset="0"/>
-                <a:ea typeface="Calibri" pitchFamily="34" charset="-122"/>
-                <a:cs typeface="Calibri" pitchFamily="34" charset="-120"/>
+                <a:latin typeface="IBM Plex Sans" pitchFamily="34" charset="0"/>
+                <a:ea typeface="IBM Plex Sans" pitchFamily="34" charset="-122"/>
+                <a:cs typeface="IBM Plex Sans" pitchFamily="34" charset="-120"/>
               </a:rPr>
               <a:t>Most listings under $200</a:t>
             </a:r>
@@ -10248,7 +11198,7 @@
       </p:sp>
       <p:sp>
         <p:nvSpPr>
-          <p:cNvPr id="9" name="Text 5"/>
+          <p:cNvPr id="10" name="Text 6"/>
           <p:cNvSpPr/>
           <p:nvPr/>
         </p:nvSpPr>
@@ -10275,11 +11225,11 @@
                 <a:solidFill>
                   <a:srgbClr val="522CBA"/>
                 </a:solidFill>
-                <a:latin typeface="Calibri" pitchFamily="34" charset="0"/>
-                <a:ea typeface="Calibri" pitchFamily="34" charset="-122"/>
-                <a:cs typeface="Calibri" pitchFamily="34" charset="-120"/>
-              </a:rPr>
-              <a:t>Manhattan: highest median, widest spread</a:t>
+                <a:latin typeface="IBM Plex Sans" pitchFamily="34" charset="0"/>
+                <a:ea typeface="IBM Plex Sans" pitchFamily="34" charset="-122"/>
+                <a:cs typeface="IBM Plex Sans" pitchFamily="34" charset="-120"/>
+              </a:rPr>
+              <a:t>Manhattan has the widest spread</a:t>
             </a:r>
             <a:endParaRPr lang="en-US" sz="1200" dirty="0"/>
           </a:p>
@@ -10287,7 +11237,7 @@
       </p:sp>
       <p:sp>
         <p:nvSpPr>
-          <p:cNvPr id="10" name="Text 6"/>
+          <p:cNvPr id="11" name="Text 7"/>
           <p:cNvSpPr/>
           <p:nvPr/>
         </p:nvSpPr>
@@ -10310,17 +11260,17 @@
               <a:buNone/>
             </a:pPr>
             <a:r>
-              <a:rPr lang="en-US" sz="1600" b="1" dirty="0">
+              <a:rPr lang="en-US" sz="1500" b="1" dirty="0">
                 <a:solidFill>
                   <a:srgbClr val="9B78F7"/>
                 </a:solidFill>
-                <a:latin typeface="Calibri" pitchFamily="34" charset="0"/>
-                <a:ea typeface="Calibri" pitchFamily="34" charset="-122"/>
-                <a:cs typeface="Calibri" pitchFamily="34" charset="-120"/>
+                <a:latin typeface="IBM Plex Sans" pitchFamily="34" charset="0"/>
+                <a:ea typeface="IBM Plex Sans" pitchFamily="34" charset="-122"/>
+                <a:cs typeface="IBM Plex Sans" pitchFamily="34" charset="-120"/>
               </a:rPr>
               <a:t>Manhattan $196  ·  Brooklyn $125  ·  Staten Island $115  ·  Queens $100  ·  Bronx $88</a:t>
             </a:r>
-            <a:endParaRPr lang="en-US" sz="1600" dirty="0"/>
+            <a:endParaRPr lang="en-US" sz="1500" dirty="0"/>
           </a:p>
         </p:txBody>
       </p:sp>
@@ -10381,30 +11331,55 @@
               <a:buNone/>
             </a:pPr>
             <a:r>
-              <a:rPr lang="en-US" sz="3600" b="1" dirty="0">
+              <a:rPr lang="en-US" sz="3400" b="1" dirty="0">
                 <a:solidFill>
                   <a:srgbClr val="522CBA"/>
                 </a:solidFill>
-                <a:latin typeface="Cambria" pitchFamily="34" charset="0"/>
-                <a:ea typeface="Cambria" pitchFamily="34" charset="-122"/>
-                <a:cs typeface="Cambria" pitchFamily="34" charset="-120"/>
+                <a:latin typeface="IBM Plex Sans" pitchFamily="34" charset="0"/>
+                <a:ea typeface="IBM Plex Sans" pitchFamily="34" charset="-122"/>
+                <a:cs typeface="IBM Plex Sans" pitchFamily="34" charset="-120"/>
               </a:rPr>
               <a:t>The premium guests pay</a:t>
             </a:r>
-            <a:endParaRPr lang="en-US" sz="3600" dirty="0"/>
-          </a:p>
-        </p:txBody>
-      </p:sp>
-      <p:sp>
-        <p:nvSpPr>
-          <p:cNvPr id="3" name="Text 1"/>
-          <p:cNvSpPr/>
-          <p:nvPr/>
-        </p:nvSpPr>
-        <p:spPr>
-          <a:xfrm>
-            <a:off x="566928" y="1042416"/>
-            <a:ext cx="11064240" cy="329184"/>
+            <a:endParaRPr lang="en-US" sz="3400" dirty="0"/>
+          </a:p>
+        </p:txBody>
+      </p:sp>
+      <p:sp>
+        <p:nvSpPr>
+          <p:cNvPr id="3" name="Shape 1"/>
+          <p:cNvSpPr/>
+          <p:nvPr/>
+        </p:nvSpPr>
+        <p:spPr>
+          <a:xfrm>
+            <a:off x="585216" y="1138428"/>
+            <a:ext cx="146304" cy="146304"/>
+          </a:xfrm>
+          <a:prstGeom prst="ellipse">
+            <a:avLst/>
+          </a:prstGeom>
+          <a:solidFill>
+            <a:srgbClr val="F4A664"/>
+          </a:solidFill>
+          <a:ln w="12700">
+            <a:solidFill>
+              <a:srgbClr val="333333"/>
+            </a:solidFill>
+            <a:prstDash val="solid"/>
+          </a:ln>
+        </p:spPr>
+      </p:sp>
+      <p:sp>
+        <p:nvSpPr>
+          <p:cNvPr id="4" name="Text 2"/>
+          <p:cNvSpPr/>
+          <p:nvPr/>
+        </p:nvSpPr>
+        <p:spPr>
+          <a:xfrm>
+            <a:off x="859536" y="1042416"/>
+            <a:ext cx="10789920" cy="329184"/>
           </a:xfrm>
           <a:prstGeom prst="rect">
             <a:avLst/>
@@ -10424,9 +11399,9 @@
                 <a:solidFill>
                   <a:srgbClr val="9B78F7"/>
                 </a:solidFill>
-                <a:latin typeface="Calibri" pitchFamily="34" charset="0"/>
-                <a:ea typeface="Calibri" pitchFamily="34" charset="-122"/>
-                <a:cs typeface="Calibri" pitchFamily="34" charset="-120"/>
+                <a:latin typeface="IBM Plex Sans" pitchFamily="34" charset="0"/>
+                <a:ea typeface="IBM Plex Sans" pitchFamily="34" charset="-122"/>
+                <a:cs typeface="IBM Plex Sans" pitchFamily="34" charset="-120"/>
               </a:rPr>
               <a:t>Room type is the sharpest divide</a:t>
             </a:r>
@@ -10436,7 +11411,7 @@
       </p:sp>
       <p:sp>
         <p:nvSpPr>
-          <p:cNvPr id="4" name="Shape 2"/>
+          <p:cNvPr id="5" name="Shape 3"/>
           <p:cNvSpPr/>
           <p:nvPr/>
         </p:nvSpPr>
@@ -10470,7 +11445,7 @@
       </p:sp>
       <p:pic>
         <p:nvPicPr>
-          <p:cNvPr id="5" name="Image 0" descr="/tmp/claude-0/-home-user-Tuwaiq-Bootcamp/31d76967-b7b5-527c-bee1-8d14c00fddcd/scratchpad/plots/viz_3.png">    </p:cNvPr>
+          <p:cNvPr id="6" name="Image 0" descr="/tmp/claude-0/-home-user-Tuwaiq-Bootcamp/31d76967-b7b5-527c-bee1-8d14c00fddcd/scratchpad/plots/viz_3.png">    </p:cNvPr>
           <p:cNvPicPr>
             <a:picLocks noChangeAspect="1"/>
           </p:cNvPicPr>
@@ -10493,7 +11468,7 @@
       </p:pic>
       <p:sp>
         <p:nvSpPr>
-          <p:cNvPr id="6" name="Shape 3"/>
+          <p:cNvPr id="7" name="Shape 4"/>
           <p:cNvSpPr/>
           <p:nvPr/>
         </p:nvSpPr>
@@ -10527,7 +11502,7 @@
       </p:sp>
       <p:pic>
         <p:nvPicPr>
-          <p:cNvPr id="7" name="Image 1" descr="/tmp/claude-0/-home-user-Tuwaiq-Bootcamp/31d76967-b7b5-527c-bee1-8d14c00fddcd/scratchpad/plots/viz_4.png">    </p:cNvPr>
+          <p:cNvPr id="8" name="Image 1" descr="/tmp/claude-0/-home-user-Tuwaiq-Bootcamp/31d76967-b7b5-527c-bee1-8d14c00fddcd/scratchpad/plots/viz_4.png">    </p:cNvPr>
           <p:cNvPicPr>
             <a:picLocks noChangeAspect="1"/>
           </p:cNvPicPr>
@@ -10550,7 +11525,7 @@
       </p:pic>
       <p:sp>
         <p:nvSpPr>
-          <p:cNvPr id="8" name="Text 4"/>
+          <p:cNvPr id="9" name="Text 5"/>
           <p:cNvSpPr/>
           <p:nvPr/>
         </p:nvSpPr>
@@ -10577,9 +11552,9 @@
                 <a:solidFill>
                   <a:srgbClr val="522CBA"/>
                 </a:solidFill>
-                <a:latin typeface="Calibri" pitchFamily="34" charset="0"/>
-                <a:ea typeface="Calibri" pitchFamily="34" charset="-122"/>
-                <a:cs typeface="Calibri" pitchFamily="34" charset="-120"/>
+                <a:latin typeface="IBM Plex Sans" pitchFamily="34" charset="0"/>
+                <a:ea typeface="IBM Plex Sans" pitchFamily="34" charset="-122"/>
+                <a:cs typeface="IBM Plex Sans" pitchFamily="34" charset="-120"/>
               </a:rPr>
               <a:t>Entire $211 · Private $90 · Shared $71</a:t>
             </a:r>
@@ -10589,7 +11564,7 @@
       </p:sp>
       <p:sp>
         <p:nvSpPr>
-          <p:cNvPr id="9" name="Text 5"/>
+          <p:cNvPr id="10" name="Text 6"/>
           <p:cNvSpPr/>
           <p:nvPr/>
         </p:nvSpPr>
@@ -10616,9 +11591,9 @@
                 <a:solidFill>
                   <a:srgbClr val="522CBA"/>
                 </a:solidFill>
-                <a:latin typeface="Calibri" pitchFamily="34" charset="0"/>
-                <a:ea typeface="Calibri" pitchFamily="34" charset="-122"/>
-                <a:cs typeface="Calibri" pitchFamily="34" charset="-120"/>
+                <a:latin typeface="IBM Plex Sans" pitchFamily="34" charset="0"/>
+                <a:ea typeface="IBM Plex Sans" pitchFamily="34" charset="-122"/>
+                <a:cs typeface="IBM Plex Sans" pitchFamily="34" charset="-120"/>
               </a:rPr>
               <a:t>Reviews and availability unrelated</a:t>
             </a:r>
@@ -10628,40 +11603,65 @@
       </p:sp>
       <p:sp>
         <p:nvSpPr>
-          <p:cNvPr id="10" name="Text 6"/>
-          <p:cNvSpPr/>
-          <p:nvPr/>
-        </p:nvSpPr>
-        <p:spPr>
-          <a:xfrm>
-            <a:off x="566928" y="5961888"/>
-            <a:ext cx="11073384" cy="411480"/>
-          </a:xfrm>
-          <a:prstGeom prst="rect">
-            <a:avLst/>
-          </a:prstGeom>
-          <a:noFill/>
-          <a:ln/>
-        </p:spPr>
-        <p:txBody>
-          <a:bodyPr wrap="square" lIns="0" tIns="0" rIns="0" bIns="0" rtlCol="0" anchor="ctr"/>
-          <a:lstStyle/>
-          <a:p>
-            <a:pPr algn="ctr" indent="0" marL="0">
-              <a:buNone/>
-            </a:pPr>
-            <a:r>
-              <a:rPr lang="en-US" sz="2000" b="1" dirty="0">
+          <p:cNvPr id="11" name="Shape 7"/>
+          <p:cNvSpPr/>
+          <p:nvPr/>
+        </p:nvSpPr>
+        <p:spPr>
+          <a:xfrm>
+            <a:off x="4279392" y="6062472"/>
+            <a:ext cx="173736" cy="173736"/>
+          </a:xfrm>
+          <a:prstGeom prst="ellipse">
+            <a:avLst/>
+          </a:prstGeom>
+          <a:solidFill>
+            <a:srgbClr val="F4A664"/>
+          </a:solidFill>
+          <a:ln w="12700">
+            <a:solidFill>
+              <a:srgbClr val="333333"/>
+            </a:solidFill>
+            <a:prstDash val="solid"/>
+          </a:ln>
+        </p:spPr>
+      </p:sp>
+      <p:sp>
+        <p:nvSpPr>
+          <p:cNvPr id="12" name="Text 8"/>
+          <p:cNvSpPr/>
+          <p:nvPr/>
+        </p:nvSpPr>
+        <p:spPr>
+          <a:xfrm>
+            <a:off x="4608576" y="5943600"/>
+            <a:ext cx="6949440" cy="457200"/>
+          </a:xfrm>
+          <a:prstGeom prst="rect">
+            <a:avLst/>
+          </a:prstGeom>
+          <a:noFill/>
+          <a:ln/>
+        </p:spPr>
+        <p:txBody>
+          <a:bodyPr wrap="square" lIns="0" tIns="0" rIns="0" bIns="0" rtlCol="0" anchor="ctr"/>
+          <a:lstStyle/>
+          <a:p>
+            <a:pPr indent="0" marL="0">
+              <a:buNone/>
+            </a:pPr>
+            <a:r>
+              <a:rPr lang="en-US" sz="1900" b="1" dirty="0">
                 <a:solidFill>
                   <a:srgbClr val="522CBA"/>
                 </a:solidFill>
-                <a:latin typeface="Cambria" pitchFamily="34" charset="0"/>
-                <a:ea typeface="Cambria" pitchFamily="34" charset="-122"/>
-                <a:cs typeface="Cambria" pitchFamily="34" charset="-120"/>
+                <a:latin typeface="IBM Plex Sans" pitchFamily="34" charset="0"/>
+                <a:ea typeface="IBM Plex Sans" pitchFamily="34" charset="-122"/>
+                <a:cs typeface="IBM Plex Sans" pitchFamily="34" charset="-120"/>
               </a:rPr>
               <a:t>2.4x for not sharing a front door</a:t>
             </a:r>
-            <a:endParaRPr lang="en-US" sz="2000" dirty="0"/>
+            <a:endParaRPr lang="en-US" sz="1900" dirty="0"/>
           </a:p>
         </p:txBody>
       </p:sp>
